--- a/ai/src/ppt dataset/Black and White Simple Minimalist Pitch Deck Marketing Presentation.pptx
+++ b/ai/src/ppt dataset/Black and White Simple Minimalist Pitch Deck Marketing Presentation.pptx
@@ -3131,6 +3131,10 @@
             </a:stretch>
           </a:blipFill>
         </p:spPr>
+        <p:txBody>
+          <a:bodyPr/>
+          <a:p/>
+        </p:txBody>
       </p:sp>
       <p:sp>
         <p:nvSpPr>
@@ -3152,25 +3156,7 @@
             <a:spAutoFit/>
           </a:bodyPr>
           <a:lstStyle/>
-          <a:p>
-            <a:pPr algn="ctr">
-              <a:lnSpc>
-                <a:spcPts val="20160"/>
-              </a:lnSpc>
-            </a:pPr>
-            <a:r>
-              <a:rPr lang="en-US" sz="14400">
-                <a:solidFill>
-                  <a:srgbClr val="000000"/>
-                </a:solidFill>
-                <a:latin typeface="DM Serif Display"/>
-                <a:ea typeface="DM Serif Display"/>
-                <a:cs typeface="DM Serif Display"/>
-                <a:sym typeface="DM Serif Display"/>
-              </a:rPr>
-              <a:t>Pitch Deck</a:t>
-            </a:r>
-          </a:p>
+          <a:p/>
         </p:txBody>
       </p:sp>
       <p:sp>
@@ -3193,28 +3179,7 @@
             <a:spAutoFit/>
           </a:bodyPr>
           <a:lstStyle/>
-          <a:p>
-            <a:pPr algn="ctr">
-              <a:lnSpc>
-                <a:spcPts val="3359"/>
-              </a:lnSpc>
-              <a:spcBef>
-                <a:spcPct val="0"/>
-              </a:spcBef>
-            </a:pPr>
-            <a:r>
-              <a:rPr lang="en-US" sz="2400" spc="240">
-                <a:solidFill>
-                  <a:srgbClr val="000000"/>
-                </a:solidFill>
-                <a:latin typeface="Open Sauce"/>
-                <a:ea typeface="Open Sauce"/>
-                <a:cs typeface="Open Sauce"/>
-                <a:sym typeface="Open Sauce"/>
-              </a:rPr>
-              <a:t>STRATEGY-DRIVEN MARKETING THAT GROWS BRANDS</a:t>
-            </a:r>
-          </a:p>
+          <a:p/>
         </p:txBody>
       </p:sp>
       <p:sp>
@@ -3237,30 +3202,7 @@
             <a:spAutoFit/>
           </a:bodyPr>
           <a:lstStyle/>
-          <a:p>
-            <a:pPr algn="ctr">
-              <a:lnSpc>
-                <a:spcPts val="4480"/>
-              </a:lnSpc>
-              <a:spcBef>
-                <a:spcPct val="0"/>
-              </a:spcBef>
-            </a:pPr>
-            <a:r>
-              <a:rPr lang="en-US" sz="3200">
-                <a:solidFill>
-                  <a:srgbClr val="000000">
-                    <a:alpha val="49804"/>
-                  </a:srgbClr>
-                </a:solidFill>
-                <a:latin typeface="DM Serif Display"/>
-                <a:ea typeface="DM Serif Display"/>
-                <a:cs typeface="DM Serif Display"/>
-                <a:sym typeface="DM Serif Display"/>
-              </a:rPr>
-              <a:t>Taylor Alonso</a:t>
-            </a:r>
-          </a:p>
+          <a:p/>
         </p:txBody>
       </p:sp>
       <p:sp>
@@ -3283,30 +3225,7 @@
             <a:spAutoFit/>
           </a:bodyPr>
           <a:lstStyle/>
-          <a:p>
-            <a:pPr algn="ctr" marL="0" indent="0" lvl="0">
-              <a:lnSpc>
-                <a:spcPts val="2239"/>
-              </a:lnSpc>
-              <a:spcBef>
-                <a:spcPct val="0"/>
-              </a:spcBef>
-            </a:pPr>
-            <a:r>
-              <a:rPr lang="en-US" sz="1599" spc="159" strike="noStrike" u="none">
-                <a:solidFill>
-                  <a:srgbClr val="000000">
-                    <a:alpha val="49804"/>
-                  </a:srgbClr>
-                </a:solidFill>
-                <a:latin typeface="Open Sauce"/>
-                <a:ea typeface="Open Sauce"/>
-                <a:cs typeface="Open Sauce"/>
-                <a:sym typeface="Open Sauce"/>
-              </a:rPr>
-              <a:t>STUDIO SHODWE</a:t>
-            </a:r>
-          </a:p>
+          <a:p/>
         </p:txBody>
       </p:sp>
     </p:spTree>
@@ -3386,6 +3305,10 @@
             <a:miter/>
           </a:ln>
         </p:spPr>
+        <p:txBody>
+          <a:bodyPr/>
+          <a:p/>
+        </p:txBody>
       </p:sp>
       <p:sp>
         <p:nvSpPr>
@@ -3410,6 +3333,10 @@
             <a:tailEnd type="none" len="sm" w="sm"/>
           </a:ln>
         </p:spPr>
+        <p:txBody>
+          <a:bodyPr/>
+          <a:p/>
+        </p:txBody>
       </p:sp>
       <p:sp>
         <p:nvSpPr>
@@ -3431,25 +3358,7 @@
             <a:spAutoFit/>
           </a:bodyPr>
           <a:lstStyle/>
-          <a:p>
-            <a:pPr algn="l">
-              <a:lnSpc>
-                <a:spcPts val="8959"/>
-              </a:lnSpc>
-            </a:pPr>
-            <a:r>
-              <a:rPr lang="en-US" sz="6399">
-                <a:solidFill>
-                  <a:srgbClr val="000000"/>
-                </a:solidFill>
-                <a:latin typeface="DM Serif Display"/>
-                <a:ea typeface="DM Serif Display"/>
-                <a:cs typeface="DM Serif Display"/>
-                <a:sym typeface="DM Serif Display"/>
-              </a:rPr>
-              <a:t>Roadmap</a:t>
-            </a:r>
-          </a:p>
+          <a:p/>
         </p:txBody>
       </p:sp>
       <p:sp>
@@ -3472,30 +3381,7 @@
             <a:spAutoFit/>
           </a:bodyPr>
           <a:lstStyle/>
-          <a:p>
-            <a:pPr algn="l" marL="0" indent="0" lvl="0">
-              <a:lnSpc>
-                <a:spcPts val="2239"/>
-              </a:lnSpc>
-              <a:spcBef>
-                <a:spcPct val="0"/>
-              </a:spcBef>
-            </a:pPr>
-            <a:r>
-              <a:rPr lang="en-US" sz="1599" spc="159" strike="noStrike" u="none">
-                <a:solidFill>
-                  <a:srgbClr val="000000">
-                    <a:alpha val="49804"/>
-                  </a:srgbClr>
-                </a:solidFill>
-                <a:latin typeface="Open Sauce"/>
-                <a:ea typeface="Open Sauce"/>
-                <a:cs typeface="Open Sauce"/>
-                <a:sym typeface="Open Sauce"/>
-              </a:rPr>
-              <a:t>STUDIO SHODWE</a:t>
-            </a:r>
-          </a:p>
+          <a:p/>
         </p:txBody>
       </p:sp>
       <p:sp>
@@ -3518,30 +3404,7 @@
             <a:spAutoFit/>
           </a:bodyPr>
           <a:lstStyle/>
-          <a:p>
-            <a:pPr algn="r" marL="0" indent="0" lvl="0">
-              <a:lnSpc>
-                <a:spcPts val="2239"/>
-              </a:lnSpc>
-              <a:spcBef>
-                <a:spcPct val="0"/>
-              </a:spcBef>
-            </a:pPr>
-            <a:r>
-              <a:rPr lang="en-US" sz="1599" spc="159">
-                <a:solidFill>
-                  <a:srgbClr val="000000">
-                    <a:alpha val="49804"/>
-                  </a:srgbClr>
-                </a:solidFill>
-                <a:latin typeface="Open Sauce"/>
-                <a:ea typeface="Open Sauce"/>
-                <a:cs typeface="Open Sauce"/>
-                <a:sym typeface="Open Sauce"/>
-              </a:rPr>
-              <a:t>10</a:t>
-            </a:r>
-          </a:p>
+          <a:p/>
         </p:txBody>
       </p:sp>
       <p:sp>
@@ -3564,28 +3427,7 @@
             <a:spAutoFit/>
           </a:bodyPr>
           <a:lstStyle/>
-          <a:p>
-            <a:pPr algn="l" marL="0" indent="0" lvl="0">
-              <a:lnSpc>
-                <a:spcPts val="5120"/>
-              </a:lnSpc>
-              <a:spcBef>
-                <a:spcPct val="0"/>
-              </a:spcBef>
-            </a:pPr>
-            <a:r>
-              <a:rPr lang="en-US" b="true" sz="3200" strike="noStrike" u="none">
-                <a:solidFill>
-                  <a:srgbClr val="000000"/>
-                </a:solidFill>
-                <a:latin typeface="Open Sauce Bold"/>
-                <a:ea typeface="Open Sauce Bold"/>
-                <a:cs typeface="Open Sauce Bold"/>
-                <a:sym typeface="Open Sauce Bold"/>
-              </a:rPr>
-              <a:t>Phase 1</a:t>
-            </a:r>
-          </a:p>
+          <a:p/>
         </p:txBody>
       </p:sp>
       <p:sp>
@@ -3608,25 +3450,7 @@
             <a:spAutoFit/>
           </a:bodyPr>
           <a:lstStyle/>
-          <a:p>
-            <a:pPr algn="l">
-              <a:lnSpc>
-                <a:spcPts val="3840"/>
-              </a:lnSpc>
-            </a:pPr>
-            <a:r>
-              <a:rPr lang="en-US" sz="2400">
-                <a:solidFill>
-                  <a:srgbClr val="000000"/>
-                </a:solidFill>
-                <a:latin typeface="Open Sauce"/>
-                <a:ea typeface="Open Sauce"/>
-                <a:cs typeface="Open Sauce"/>
-                <a:sym typeface="Open Sauce"/>
-              </a:rPr>
-              <a:t>Build portfolio &amp; case studies</a:t>
-            </a:r>
-          </a:p>
+          <a:p/>
         </p:txBody>
       </p:sp>
       <p:sp>
@@ -3652,6 +3476,10 @@
             <a:tailEnd type="none" len="sm" w="sm"/>
           </a:ln>
         </p:spPr>
+        <p:txBody>
+          <a:bodyPr/>
+          <a:p/>
+        </p:txBody>
       </p:sp>
       <p:sp>
         <p:nvSpPr>
@@ -3676,6 +3504,10 @@
             <a:tailEnd type="none" len="sm" w="sm"/>
           </a:ln>
         </p:spPr>
+        <p:txBody>
+          <a:bodyPr/>
+          <a:p/>
+        </p:txBody>
       </p:sp>
       <p:sp>
         <p:nvSpPr>
@@ -3697,28 +3529,7 @@
             <a:spAutoFit/>
           </a:bodyPr>
           <a:lstStyle/>
-          <a:p>
-            <a:pPr algn="l" marL="0" indent="0" lvl="0">
-              <a:lnSpc>
-                <a:spcPts val="5120"/>
-              </a:lnSpc>
-              <a:spcBef>
-                <a:spcPct val="0"/>
-              </a:spcBef>
-            </a:pPr>
-            <a:r>
-              <a:rPr lang="en-US" b="true" sz="3200" strike="noStrike" u="none">
-                <a:solidFill>
-                  <a:srgbClr val="000000"/>
-                </a:solidFill>
-                <a:latin typeface="Open Sauce Bold"/>
-                <a:ea typeface="Open Sauce Bold"/>
-                <a:cs typeface="Open Sauce Bold"/>
-                <a:sym typeface="Open Sauce Bold"/>
-              </a:rPr>
-              <a:t>Phase 2</a:t>
-            </a:r>
-          </a:p>
+          <a:p/>
         </p:txBody>
       </p:sp>
       <p:sp>
@@ -3741,25 +3552,7 @@
             <a:spAutoFit/>
           </a:bodyPr>
           <a:lstStyle/>
-          <a:p>
-            <a:pPr algn="l">
-              <a:lnSpc>
-                <a:spcPts val="3840"/>
-              </a:lnSpc>
-            </a:pPr>
-            <a:r>
-              <a:rPr lang="en-US" sz="2400">
-                <a:solidFill>
-                  <a:srgbClr val="000000"/>
-                </a:solidFill>
-                <a:latin typeface="Open Sauce"/>
-                <a:ea typeface="Open Sauce"/>
-                <a:cs typeface="Open Sauce"/>
-                <a:sym typeface="Open Sauce"/>
-              </a:rPr>
-              <a:t>Launch marketing workshops</a:t>
-            </a:r>
-          </a:p>
+          <a:p/>
         </p:txBody>
       </p:sp>
       <p:sp>
@@ -3785,6 +3578,10 @@
             <a:tailEnd type="oval" len="lg" w="lg"/>
           </a:ln>
         </p:spPr>
+        <p:txBody>
+          <a:bodyPr/>
+          <a:p/>
+        </p:txBody>
       </p:sp>
       <p:sp>
         <p:nvSpPr>
@@ -3806,28 +3603,7 @@
             <a:spAutoFit/>
           </a:bodyPr>
           <a:lstStyle/>
-          <a:p>
-            <a:pPr algn="l" marL="0" indent="0" lvl="0">
-              <a:lnSpc>
-                <a:spcPts val="5120"/>
-              </a:lnSpc>
-              <a:spcBef>
-                <a:spcPct val="0"/>
-              </a:spcBef>
-            </a:pPr>
-            <a:r>
-              <a:rPr lang="en-US" b="true" sz="3200" strike="noStrike" u="none">
-                <a:solidFill>
-                  <a:srgbClr val="000000"/>
-                </a:solidFill>
-                <a:latin typeface="Open Sauce Bold"/>
-                <a:ea typeface="Open Sauce Bold"/>
-                <a:cs typeface="Open Sauce Bold"/>
-                <a:sym typeface="Open Sauce Bold"/>
-              </a:rPr>
-              <a:t>Phase 3</a:t>
-            </a:r>
-          </a:p>
+          <a:p/>
         </p:txBody>
       </p:sp>
       <p:sp>
@@ -3850,25 +3626,7 @@
             <a:spAutoFit/>
           </a:bodyPr>
           <a:lstStyle/>
-          <a:p>
-            <a:pPr algn="l">
-              <a:lnSpc>
-                <a:spcPts val="3840"/>
-              </a:lnSpc>
-            </a:pPr>
-            <a:r>
-              <a:rPr lang="en-US" sz="2400">
-                <a:solidFill>
-                  <a:srgbClr val="000000"/>
-                </a:solidFill>
-                <a:latin typeface="Open Sauce"/>
-                <a:ea typeface="Open Sauce"/>
-                <a:cs typeface="Open Sauce"/>
-                <a:sym typeface="Open Sauce"/>
-              </a:rPr>
-              <a:t>Develop marketing playbook tool</a:t>
-            </a:r>
-          </a:p>
+          <a:p/>
         </p:txBody>
       </p:sp>
       <p:sp>
@@ -3894,6 +3652,10 @@
             <a:tailEnd type="none" len="sm" w="sm"/>
           </a:ln>
         </p:spPr>
+        <p:txBody>
+          <a:bodyPr/>
+          <a:p/>
+        </p:txBody>
       </p:sp>
       <p:sp>
         <p:nvSpPr>
@@ -3915,28 +3677,7 @@
             <a:spAutoFit/>
           </a:bodyPr>
           <a:lstStyle/>
-          <a:p>
-            <a:pPr algn="l" marL="0" indent="0" lvl="0">
-              <a:lnSpc>
-                <a:spcPts val="5120"/>
-              </a:lnSpc>
-              <a:spcBef>
-                <a:spcPct val="0"/>
-              </a:spcBef>
-            </a:pPr>
-            <a:r>
-              <a:rPr lang="en-US" b="true" sz="3200" strike="noStrike" u="none">
-                <a:solidFill>
-                  <a:srgbClr val="000000"/>
-                </a:solidFill>
-                <a:latin typeface="Open Sauce Bold"/>
-                <a:ea typeface="Open Sauce Bold"/>
-                <a:cs typeface="Open Sauce Bold"/>
-                <a:sym typeface="Open Sauce Bold"/>
-              </a:rPr>
-              <a:t>Phase 4</a:t>
-            </a:r>
-          </a:p>
+          <a:p/>
         </p:txBody>
       </p:sp>
       <p:sp>
@@ -3959,25 +3700,7 @@
             <a:spAutoFit/>
           </a:bodyPr>
           <a:lstStyle/>
-          <a:p>
-            <a:pPr algn="l">
-              <a:lnSpc>
-                <a:spcPts val="3840"/>
-              </a:lnSpc>
-            </a:pPr>
-            <a:r>
-              <a:rPr lang="en-US" sz="2400">
-                <a:solidFill>
-                  <a:srgbClr val="000000"/>
-                </a:solidFill>
-                <a:latin typeface="Open Sauce"/>
-                <a:ea typeface="Open Sauce"/>
-                <a:cs typeface="Open Sauce"/>
-                <a:sym typeface="Open Sauce"/>
-              </a:rPr>
-              <a:t>Scale via agency partners</a:t>
-            </a:r>
-          </a:p>
+          <a:p/>
         </p:txBody>
       </p:sp>
       <p:sp>
@@ -4003,6 +3726,10 @@
             <a:tailEnd type="oval" len="lg" w="lg"/>
           </a:ln>
         </p:spPr>
+        <p:txBody>
+          <a:bodyPr/>
+          <a:p/>
+        </p:txBody>
       </p:sp>
     </p:spTree>
   </p:cSld>
@@ -4081,6 +3808,10 @@
             <a:miter/>
           </a:ln>
         </p:spPr>
+        <p:txBody>
+          <a:bodyPr/>
+          <a:p/>
+        </p:txBody>
       </p:sp>
       <p:sp>
         <p:nvSpPr>
@@ -4105,6 +3836,10 @@
             <a:tailEnd type="none" len="sm" w="sm"/>
           </a:ln>
         </p:spPr>
+        <p:txBody>
+          <a:bodyPr/>
+          <a:p/>
+        </p:txBody>
       </p:sp>
       <p:sp>
         <p:nvSpPr>
@@ -4126,25 +3861,7 @@
             <a:spAutoFit/>
           </a:bodyPr>
           <a:lstStyle/>
-          <a:p>
-            <a:pPr algn="l">
-              <a:lnSpc>
-                <a:spcPts val="8959"/>
-              </a:lnSpc>
-            </a:pPr>
-            <a:r>
-              <a:rPr lang="en-US" sz="6399">
-                <a:solidFill>
-                  <a:srgbClr val="000000"/>
-                </a:solidFill>
-                <a:latin typeface="DM Serif Display"/>
-                <a:ea typeface="DM Serif Display"/>
-                <a:cs typeface="DM Serif Display"/>
-                <a:sym typeface="DM Serif Display"/>
-              </a:rPr>
-              <a:t>Contact Info</a:t>
-            </a:r>
-          </a:p>
+          <a:p/>
         </p:txBody>
       </p:sp>
       <p:sp>
@@ -4167,30 +3884,7 @@
             <a:spAutoFit/>
           </a:bodyPr>
           <a:lstStyle/>
-          <a:p>
-            <a:pPr algn="l" marL="0" indent="0" lvl="0">
-              <a:lnSpc>
-                <a:spcPts val="2239"/>
-              </a:lnSpc>
-              <a:spcBef>
-                <a:spcPct val="0"/>
-              </a:spcBef>
-            </a:pPr>
-            <a:r>
-              <a:rPr lang="en-US" sz="1599" spc="159" strike="noStrike" u="none">
-                <a:solidFill>
-                  <a:srgbClr val="000000">
-                    <a:alpha val="49804"/>
-                  </a:srgbClr>
-                </a:solidFill>
-                <a:latin typeface="Open Sauce"/>
-                <a:ea typeface="Open Sauce"/>
-                <a:cs typeface="Open Sauce"/>
-                <a:sym typeface="Open Sauce"/>
-              </a:rPr>
-              <a:t>STUDIO SHODWE</a:t>
-            </a:r>
-          </a:p>
+          <a:p/>
         </p:txBody>
       </p:sp>
       <p:sp>
@@ -4213,30 +3907,7 @@
             <a:spAutoFit/>
           </a:bodyPr>
           <a:lstStyle/>
-          <a:p>
-            <a:pPr algn="r" marL="0" indent="0" lvl="0">
-              <a:lnSpc>
-                <a:spcPts val="2239"/>
-              </a:lnSpc>
-              <a:spcBef>
-                <a:spcPct val="0"/>
-              </a:spcBef>
-            </a:pPr>
-            <a:r>
-              <a:rPr lang="en-US" sz="1599" spc="159">
-                <a:solidFill>
-                  <a:srgbClr val="000000">
-                    <a:alpha val="49804"/>
-                  </a:srgbClr>
-                </a:solidFill>
-                <a:latin typeface="Open Sauce"/>
-                <a:ea typeface="Open Sauce"/>
-                <a:cs typeface="Open Sauce"/>
-                <a:sym typeface="Open Sauce"/>
-              </a:rPr>
-              <a:t>11</a:t>
-            </a:r>
-          </a:p>
+          <a:p/>
         </p:txBody>
       </p:sp>
       <p:sp>
@@ -4259,280 +3930,7 @@
             <a:spAutoFit/>
           </a:bodyPr>
           <a:lstStyle/>
-          <a:p>
-            <a:pPr algn="l" marL="0" indent="0" lvl="0">
-              <a:lnSpc>
-                <a:spcPts val="3840"/>
-              </a:lnSpc>
-              <a:spcBef>
-                <a:spcPct val="0"/>
-              </a:spcBef>
-            </a:pPr>
-            <a:r>
-              <a:rPr lang="en-US" sz="2400">
-                <a:solidFill>
-                  <a:srgbClr val="000000"/>
-                </a:solidFill>
-                <a:latin typeface="Open Sauce"/>
-                <a:ea typeface="Open Sauce"/>
-                <a:cs typeface="Open Sauce"/>
-                <a:sym typeface="Open Sauce"/>
-              </a:rPr>
-              <a:t>L</a:t>
-            </a:r>
-            <a:r>
-              <a:rPr lang="en-US" sz="2400" strike="noStrike" u="none">
-                <a:solidFill>
-                  <a:srgbClr val="000000"/>
-                </a:solidFill>
-                <a:latin typeface="Open Sauce"/>
-                <a:ea typeface="Open Sauce"/>
-                <a:cs typeface="Open Sauce"/>
-                <a:sym typeface="Open Sauce"/>
-              </a:rPr>
-              <a:t>e</a:t>
-            </a:r>
-            <a:r>
-              <a:rPr lang="en-US" sz="2400" strike="noStrike" u="none">
-                <a:solidFill>
-                  <a:srgbClr val="000000"/>
-                </a:solidFill>
-                <a:latin typeface="Open Sauce"/>
-                <a:ea typeface="Open Sauce"/>
-                <a:cs typeface="Open Sauce"/>
-                <a:sym typeface="Open Sauce"/>
-              </a:rPr>
-              <a:t>t’</a:t>
-            </a:r>
-            <a:r>
-              <a:rPr lang="en-US" sz="2400" strike="noStrike" u="none">
-                <a:solidFill>
-                  <a:srgbClr val="000000"/>
-                </a:solidFill>
-                <a:latin typeface="Open Sauce"/>
-                <a:ea typeface="Open Sauce"/>
-                <a:cs typeface="Open Sauce"/>
-                <a:sym typeface="Open Sauce"/>
-              </a:rPr>
-              <a:t>s </a:t>
-            </a:r>
-            <a:r>
-              <a:rPr lang="en-US" sz="2400" strike="noStrike" u="none">
-                <a:solidFill>
-                  <a:srgbClr val="000000"/>
-                </a:solidFill>
-                <a:latin typeface="Open Sauce"/>
-                <a:ea typeface="Open Sauce"/>
-                <a:cs typeface="Open Sauce"/>
-                <a:sym typeface="Open Sauce"/>
-              </a:rPr>
-              <a:t>g</a:t>
-            </a:r>
-            <a:r>
-              <a:rPr lang="en-US" sz="2400" strike="noStrike" u="none">
-                <a:solidFill>
-                  <a:srgbClr val="000000"/>
-                </a:solidFill>
-                <a:latin typeface="Open Sauce"/>
-                <a:ea typeface="Open Sauce"/>
-                <a:cs typeface="Open Sauce"/>
-                <a:sym typeface="Open Sauce"/>
-              </a:rPr>
-              <a:t>r</a:t>
-            </a:r>
-            <a:r>
-              <a:rPr lang="en-US" sz="2400" strike="noStrike" u="none">
-                <a:solidFill>
-                  <a:srgbClr val="000000"/>
-                </a:solidFill>
-                <a:latin typeface="Open Sauce"/>
-                <a:ea typeface="Open Sauce"/>
-                <a:cs typeface="Open Sauce"/>
-                <a:sym typeface="Open Sauce"/>
-              </a:rPr>
-              <a:t>ow</a:t>
-            </a:r>
-            <a:r>
-              <a:rPr lang="en-US" sz="2400" strike="noStrike" u="none">
-                <a:solidFill>
-                  <a:srgbClr val="000000"/>
-                </a:solidFill>
-                <a:latin typeface="Open Sauce"/>
-                <a:ea typeface="Open Sauce"/>
-                <a:cs typeface="Open Sauce"/>
-                <a:sym typeface="Open Sauce"/>
-              </a:rPr>
-              <a:t> </a:t>
-            </a:r>
-            <a:r>
-              <a:rPr lang="en-US" sz="2400" strike="noStrike" u="none">
-                <a:solidFill>
-                  <a:srgbClr val="000000"/>
-                </a:solidFill>
-                <a:latin typeface="Open Sauce"/>
-                <a:ea typeface="Open Sauce"/>
-                <a:cs typeface="Open Sauce"/>
-                <a:sym typeface="Open Sauce"/>
-              </a:rPr>
-              <a:t>y</a:t>
-            </a:r>
-            <a:r>
-              <a:rPr lang="en-US" sz="2400" strike="noStrike" u="none">
-                <a:solidFill>
-                  <a:srgbClr val="000000"/>
-                </a:solidFill>
-                <a:latin typeface="Open Sauce"/>
-                <a:ea typeface="Open Sauce"/>
-                <a:cs typeface="Open Sauce"/>
-                <a:sym typeface="Open Sauce"/>
-              </a:rPr>
-              <a:t>o</a:t>
-            </a:r>
-            <a:r>
-              <a:rPr lang="en-US" sz="2400" strike="noStrike" u="none">
-                <a:solidFill>
-                  <a:srgbClr val="000000"/>
-                </a:solidFill>
-                <a:latin typeface="Open Sauce"/>
-                <a:ea typeface="Open Sauce"/>
-                <a:cs typeface="Open Sauce"/>
-                <a:sym typeface="Open Sauce"/>
-              </a:rPr>
-              <a:t>u</a:t>
-            </a:r>
-            <a:r>
-              <a:rPr lang="en-US" sz="2400" strike="noStrike" u="none">
-                <a:solidFill>
-                  <a:srgbClr val="000000"/>
-                </a:solidFill>
-                <a:latin typeface="Open Sauce"/>
-                <a:ea typeface="Open Sauce"/>
-                <a:cs typeface="Open Sauce"/>
-                <a:sym typeface="Open Sauce"/>
-              </a:rPr>
-              <a:t>r b</a:t>
-            </a:r>
-            <a:r>
-              <a:rPr lang="en-US" sz="2400" strike="noStrike" u="none">
-                <a:solidFill>
-                  <a:srgbClr val="000000"/>
-                </a:solidFill>
-                <a:latin typeface="Open Sauce"/>
-                <a:ea typeface="Open Sauce"/>
-                <a:cs typeface="Open Sauce"/>
-                <a:sym typeface="Open Sauce"/>
-              </a:rPr>
-              <a:t>ra</a:t>
-            </a:r>
-            <a:r>
-              <a:rPr lang="en-US" sz="2400" strike="noStrike" u="none">
-                <a:solidFill>
-                  <a:srgbClr val="000000"/>
-                </a:solidFill>
-                <a:latin typeface="Open Sauce"/>
-                <a:ea typeface="Open Sauce"/>
-                <a:cs typeface="Open Sauce"/>
-                <a:sym typeface="Open Sauce"/>
-              </a:rPr>
-              <a:t>n</a:t>
-            </a:r>
-            <a:r>
-              <a:rPr lang="en-US" sz="2400" strike="noStrike" u="none">
-                <a:solidFill>
-                  <a:srgbClr val="000000"/>
-                </a:solidFill>
-                <a:latin typeface="Open Sauce"/>
-                <a:ea typeface="Open Sauce"/>
-                <a:cs typeface="Open Sauce"/>
-                <a:sym typeface="Open Sauce"/>
-              </a:rPr>
-              <a:t>d</a:t>
-            </a:r>
-            <a:r>
-              <a:rPr lang="en-US" sz="2400" strike="noStrike" u="none">
-                <a:solidFill>
-                  <a:srgbClr val="000000"/>
-                </a:solidFill>
-                <a:latin typeface="Open Sauce"/>
-                <a:ea typeface="Open Sauce"/>
-                <a:cs typeface="Open Sauce"/>
-                <a:sym typeface="Open Sauce"/>
-              </a:rPr>
-              <a:t> </a:t>
-            </a:r>
-            <a:r>
-              <a:rPr lang="en-US" sz="2400" strike="noStrike" u="none">
-                <a:solidFill>
-                  <a:srgbClr val="000000"/>
-                </a:solidFill>
-                <a:latin typeface="Open Sauce"/>
-                <a:ea typeface="Open Sauce"/>
-                <a:cs typeface="Open Sauce"/>
-                <a:sym typeface="Open Sauce"/>
-              </a:rPr>
-              <a:t>t</a:t>
-            </a:r>
-            <a:r>
-              <a:rPr lang="en-US" sz="2400" strike="noStrike" u="none">
-                <a:solidFill>
-                  <a:srgbClr val="000000"/>
-                </a:solidFill>
-                <a:latin typeface="Open Sauce"/>
-                <a:ea typeface="Open Sauce"/>
-                <a:cs typeface="Open Sauce"/>
-                <a:sym typeface="Open Sauce"/>
-              </a:rPr>
-              <a:t>o</a:t>
-            </a:r>
-            <a:r>
-              <a:rPr lang="en-US" sz="2400" strike="noStrike" u="none">
-                <a:solidFill>
-                  <a:srgbClr val="000000"/>
-                </a:solidFill>
-                <a:latin typeface="Open Sauce"/>
-                <a:ea typeface="Open Sauce"/>
-                <a:cs typeface="Open Sauce"/>
-                <a:sym typeface="Open Sauce"/>
-              </a:rPr>
-              <a:t>geth</a:t>
-            </a:r>
-            <a:r>
-              <a:rPr lang="en-US" sz="2400" strike="noStrike" u="none">
-                <a:solidFill>
-                  <a:srgbClr val="000000"/>
-                </a:solidFill>
-                <a:latin typeface="Open Sauce"/>
-                <a:ea typeface="Open Sauce"/>
-                <a:cs typeface="Open Sauce"/>
-                <a:sym typeface="Open Sauce"/>
-              </a:rPr>
-              <a:t>e</a:t>
-            </a:r>
-            <a:r>
-              <a:rPr lang="en-US" sz="2400" strike="noStrike" u="none">
-                <a:solidFill>
-                  <a:srgbClr val="000000"/>
-                </a:solidFill>
-                <a:latin typeface="Open Sauce"/>
-                <a:ea typeface="Open Sauce"/>
-                <a:cs typeface="Open Sauce"/>
-                <a:sym typeface="Open Sauce"/>
-              </a:rPr>
-              <a:t>r</a:t>
-            </a:r>
-            <a:r>
-              <a:rPr lang="en-US" sz="2400" strike="noStrike" u="none">
-                <a:solidFill>
-                  <a:srgbClr val="000000"/>
-                </a:solidFill>
-                <a:latin typeface="Open Sauce"/>
-                <a:ea typeface="Open Sauce"/>
-                <a:cs typeface="Open Sauce"/>
-                <a:sym typeface="Open Sauce"/>
-              </a:rPr>
-              <a:t>.</a:t>
-            </a:r>
-          </a:p>
+          <a:p/>
         </p:txBody>
       </p:sp>
       <p:sp>
@@ -4555,25 +3953,7 @@
             <a:spAutoFit/>
           </a:bodyPr>
           <a:lstStyle/>
-          <a:p>
-            <a:pPr algn="l">
-              <a:lnSpc>
-                <a:spcPts val="3840"/>
-              </a:lnSpc>
-            </a:pPr>
-            <a:r>
-              <a:rPr lang="en-US" sz="2400" spc="240">
-                <a:solidFill>
-                  <a:srgbClr val="000000"/>
-                </a:solidFill>
-                <a:latin typeface="Open Sauce"/>
-                <a:ea typeface="Open Sauce"/>
-                <a:cs typeface="Open Sauce"/>
-                <a:sym typeface="Open Sauce"/>
-              </a:rPr>
-              <a:t>PHONE NUMBER</a:t>
-            </a:r>
-          </a:p>
+          <a:p/>
         </p:txBody>
       </p:sp>
       <p:sp>
@@ -4596,25 +3976,7 @@
             <a:spAutoFit/>
           </a:bodyPr>
           <a:lstStyle/>
-          <a:p>
-            <a:pPr algn="l">
-              <a:lnSpc>
-                <a:spcPts val="3840"/>
-              </a:lnSpc>
-            </a:pPr>
-            <a:r>
-              <a:rPr lang="en-US" b="true" sz="2400" spc="240">
-                <a:solidFill>
-                  <a:srgbClr val="000000"/>
-                </a:solidFill>
-                <a:latin typeface="Open Sauce Bold"/>
-                <a:ea typeface="Open Sauce Bold"/>
-                <a:cs typeface="Open Sauce Bold"/>
-                <a:sym typeface="Open Sauce Bold"/>
-              </a:rPr>
-              <a:t>+123-456-7890</a:t>
-            </a:r>
-          </a:p>
+          <a:p/>
         </p:txBody>
       </p:sp>
       <p:sp>
@@ -4637,37 +3999,7 @@
             <a:spAutoFit/>
           </a:bodyPr>
           <a:lstStyle/>
-          <a:p>
-            <a:pPr algn="l">
-              <a:lnSpc>
-                <a:spcPts val="3840"/>
-              </a:lnSpc>
-            </a:pPr>
-            <a:r>
-              <a:rPr lang="en-US" sz="2400" spc="240">
-                <a:solidFill>
-                  <a:srgbClr val="000000"/>
-                </a:solidFill>
-                <a:latin typeface="Open Sauce"/>
-                <a:ea typeface="Open Sauce"/>
-                <a:cs typeface="Open Sauce"/>
-                <a:sym typeface="Open Sauce"/>
-              </a:rPr>
-              <a:t>W</a:t>
-            </a:r>
-            <a:r>
-              <a:rPr lang="en-US" sz="2400" spc="240">
-                <a:solidFill>
-                  <a:srgbClr val="000000"/>
-                </a:solidFill>
-                <a:latin typeface="Open Sauce"/>
-                <a:ea typeface="Open Sauce"/>
-                <a:cs typeface="Open Sauce"/>
-                <a:sym typeface="Open Sauce"/>
-              </a:rPr>
-              <a:t>EBSITE</a:t>
-            </a:r>
-          </a:p>
+          <a:p/>
         </p:txBody>
       </p:sp>
       <p:sp>
@@ -4690,37 +4022,7 @@
             <a:spAutoFit/>
           </a:bodyPr>
           <a:lstStyle/>
-          <a:p>
-            <a:pPr algn="l">
-              <a:lnSpc>
-                <a:spcPts val="3840"/>
-              </a:lnSpc>
-            </a:pPr>
-            <a:r>
-              <a:rPr lang="en-US" b="true" sz="2400" spc="240">
-                <a:solidFill>
-                  <a:srgbClr val="000000"/>
-                </a:solidFill>
-                <a:latin typeface="Open Sauce Bold"/>
-                <a:ea typeface="Open Sauce Bold"/>
-                <a:cs typeface="Open Sauce Bold"/>
-                <a:sym typeface="Open Sauce Bold"/>
-              </a:rPr>
-              <a:t>REALLYGREATSITE.C</a:t>
-            </a:r>
-            <a:r>
-              <a:rPr lang="en-US" b="true" sz="2400" spc="240">
-                <a:solidFill>
-                  <a:srgbClr val="000000"/>
-                </a:solidFill>
-                <a:latin typeface="Open Sauce Bold"/>
-                <a:ea typeface="Open Sauce Bold"/>
-                <a:cs typeface="Open Sauce Bold"/>
-                <a:sym typeface="Open Sauce Bold"/>
-              </a:rPr>
-              <a:t>OM</a:t>
-            </a:r>
-          </a:p>
+          <a:p/>
         </p:txBody>
       </p:sp>
       <p:sp>
@@ -4743,37 +4045,7 @@
             <a:spAutoFit/>
           </a:bodyPr>
           <a:lstStyle/>
-          <a:p>
-            <a:pPr algn="l">
-              <a:lnSpc>
-                <a:spcPts val="3840"/>
-              </a:lnSpc>
-            </a:pPr>
-            <a:r>
-              <a:rPr lang="en-US" sz="2400" spc="240">
-                <a:solidFill>
-                  <a:srgbClr val="000000"/>
-                </a:solidFill>
-                <a:latin typeface="Open Sauce"/>
-                <a:ea typeface="Open Sauce"/>
-                <a:cs typeface="Open Sauce"/>
-                <a:sym typeface="Open Sauce"/>
-              </a:rPr>
-              <a:t>E</a:t>
-            </a:r>
-            <a:r>
-              <a:rPr lang="en-US" sz="2400" spc="240">
-                <a:solidFill>
-                  <a:srgbClr val="000000"/>
-                </a:solidFill>
-                <a:latin typeface="Open Sauce"/>
-                <a:ea typeface="Open Sauce"/>
-                <a:cs typeface="Open Sauce"/>
-                <a:sym typeface="Open Sauce"/>
-              </a:rPr>
-              <a:t>MAIL</a:t>
-            </a:r>
-          </a:p>
+          <a:p/>
         </p:txBody>
       </p:sp>
       <p:sp>
@@ -4796,25 +4068,7 @@
             <a:spAutoFit/>
           </a:bodyPr>
           <a:lstStyle/>
-          <a:p>
-            <a:pPr algn="l">
-              <a:lnSpc>
-                <a:spcPts val="3840"/>
-              </a:lnSpc>
-            </a:pPr>
-            <a:r>
-              <a:rPr lang="en-US" b="true" sz="2400" spc="240">
-                <a:solidFill>
-                  <a:srgbClr val="000000"/>
-                </a:solidFill>
-                <a:latin typeface="Open Sauce Bold"/>
-                <a:ea typeface="Open Sauce Bold"/>
-                <a:cs typeface="Open Sauce Bold"/>
-                <a:sym typeface="Open Sauce Bold"/>
-              </a:rPr>
-              <a:t>HELLO@REALLYGREATSITE.COM</a:t>
-            </a:r>
-          </a:p>
+          <a:p/>
         </p:txBody>
       </p:sp>
       <p:sp>
@@ -4837,25 +4091,7 @@
             <a:spAutoFit/>
           </a:bodyPr>
           <a:lstStyle/>
-          <a:p>
-            <a:pPr algn="l">
-              <a:lnSpc>
-                <a:spcPts val="3840"/>
-              </a:lnSpc>
-            </a:pPr>
-            <a:r>
-              <a:rPr lang="en-US" sz="2400" spc="240">
-                <a:solidFill>
-                  <a:srgbClr val="000000"/>
-                </a:solidFill>
-                <a:latin typeface="Open Sauce"/>
-                <a:ea typeface="Open Sauce"/>
-                <a:cs typeface="Open Sauce"/>
-                <a:sym typeface="Open Sauce"/>
-              </a:rPr>
-              <a:t>SOCIAL MEDIA</a:t>
-            </a:r>
-          </a:p>
+          <a:p/>
         </p:txBody>
       </p:sp>
       <p:sp>
@@ -4878,37 +4114,7 @@
             <a:spAutoFit/>
           </a:bodyPr>
           <a:lstStyle/>
-          <a:p>
-            <a:pPr algn="l">
-              <a:lnSpc>
-                <a:spcPts val="3840"/>
-              </a:lnSpc>
-            </a:pPr>
-            <a:r>
-              <a:rPr lang="en-US" b="true" sz="2400" spc="240">
-                <a:solidFill>
-                  <a:srgbClr val="000000"/>
-                </a:solidFill>
-                <a:latin typeface="Open Sauce Bold"/>
-                <a:ea typeface="Open Sauce Bold"/>
-                <a:cs typeface="Open Sauce Bold"/>
-                <a:sym typeface="Open Sauce Bold"/>
-              </a:rPr>
-              <a:t>@R</a:t>
-            </a:r>
-            <a:r>
-              <a:rPr lang="en-US" b="true" sz="2400" spc="240">
-                <a:solidFill>
-                  <a:srgbClr val="000000"/>
-                </a:solidFill>
-                <a:latin typeface="Open Sauce Bold"/>
-                <a:ea typeface="Open Sauce Bold"/>
-                <a:cs typeface="Open Sauce Bold"/>
-                <a:sym typeface="Open Sauce Bold"/>
-              </a:rPr>
-              <a:t>EALLYGREATSITE</a:t>
-            </a:r>
-          </a:p>
+          <a:p/>
         </p:txBody>
       </p:sp>
     </p:spTree>
@@ -4983,6 +4189,10 @@
             </a:stretch>
           </a:blipFill>
         </p:spPr>
+        <p:txBody>
+          <a:bodyPr/>
+          <a:p/>
+        </p:txBody>
       </p:sp>
       <p:sp>
         <p:nvSpPr>
@@ -5004,25 +4214,7 @@
             <a:spAutoFit/>
           </a:bodyPr>
           <a:lstStyle/>
-          <a:p>
-            <a:pPr algn="ctr">
-              <a:lnSpc>
-                <a:spcPts val="20160"/>
-              </a:lnSpc>
-            </a:pPr>
-            <a:r>
-              <a:rPr lang="en-US" sz="14400">
-                <a:solidFill>
-                  <a:srgbClr val="000000"/>
-                </a:solidFill>
-                <a:latin typeface="DM Serif Display"/>
-                <a:ea typeface="DM Serif Display"/>
-                <a:cs typeface="DM Serif Display"/>
-                <a:sym typeface="DM Serif Display"/>
-              </a:rPr>
-              <a:t>The End</a:t>
-            </a:r>
-          </a:p>
+          <a:p/>
         </p:txBody>
       </p:sp>
       <p:sp>
@@ -5045,28 +4237,7 @@
             <a:spAutoFit/>
           </a:bodyPr>
           <a:lstStyle/>
-          <a:p>
-            <a:pPr algn="ctr">
-              <a:lnSpc>
-                <a:spcPts val="3359"/>
-              </a:lnSpc>
-              <a:spcBef>
-                <a:spcPct val="0"/>
-              </a:spcBef>
-            </a:pPr>
-            <a:r>
-              <a:rPr lang="en-US" sz="2400" spc="240">
-                <a:solidFill>
-                  <a:srgbClr val="000000"/>
-                </a:solidFill>
-                <a:latin typeface="Open Sauce"/>
-                <a:ea typeface="Open Sauce"/>
-                <a:cs typeface="Open Sauce"/>
-                <a:sym typeface="Open Sauce"/>
-              </a:rPr>
-              <a:t>THANK YOU FOR LISTENING</a:t>
-            </a:r>
-          </a:p>
+          <a:p/>
         </p:txBody>
       </p:sp>
       <p:sp>
@@ -5089,30 +4260,7 @@
             <a:spAutoFit/>
           </a:bodyPr>
           <a:lstStyle/>
-          <a:p>
-            <a:pPr algn="ctr">
-              <a:lnSpc>
-                <a:spcPts val="4480"/>
-              </a:lnSpc>
-              <a:spcBef>
-                <a:spcPct val="0"/>
-              </a:spcBef>
-            </a:pPr>
-            <a:r>
-              <a:rPr lang="en-US" sz="3200">
-                <a:solidFill>
-                  <a:srgbClr val="000000">
-                    <a:alpha val="49804"/>
-                  </a:srgbClr>
-                </a:solidFill>
-                <a:latin typeface="DM Serif Display"/>
-                <a:ea typeface="DM Serif Display"/>
-                <a:cs typeface="DM Serif Display"/>
-                <a:sym typeface="DM Serif Display"/>
-              </a:rPr>
-              <a:t>Taylor Alonso</a:t>
-            </a:r>
-          </a:p>
+          <a:p/>
         </p:txBody>
       </p:sp>
       <p:sp>
@@ -5135,30 +4283,7 @@
             <a:spAutoFit/>
           </a:bodyPr>
           <a:lstStyle/>
-          <a:p>
-            <a:pPr algn="ctr" marL="0" indent="0" lvl="0">
-              <a:lnSpc>
-                <a:spcPts val="2239"/>
-              </a:lnSpc>
-              <a:spcBef>
-                <a:spcPct val="0"/>
-              </a:spcBef>
-            </a:pPr>
-            <a:r>
-              <a:rPr lang="en-US" sz="1599" spc="159" strike="noStrike" u="none">
-                <a:solidFill>
-                  <a:srgbClr val="000000">
-                    <a:alpha val="49804"/>
-                  </a:srgbClr>
-                </a:solidFill>
-                <a:latin typeface="Open Sauce"/>
-                <a:ea typeface="Open Sauce"/>
-                <a:cs typeface="Open Sauce"/>
-                <a:sym typeface="Open Sauce"/>
-              </a:rPr>
-              <a:t>STUDIO SHODWE</a:t>
-            </a:r>
-          </a:p>
+          <a:p/>
         </p:txBody>
       </p:sp>
     </p:spTree>
@@ -5238,6 +4363,10 @@
             <a:miter/>
           </a:ln>
         </p:spPr>
+        <p:txBody>
+          <a:bodyPr/>
+          <a:p/>
+        </p:txBody>
       </p:sp>
       <p:sp>
         <p:nvSpPr>
@@ -5259,25 +4388,7 @@
             <a:spAutoFit/>
           </a:bodyPr>
           <a:lstStyle/>
-          <a:p>
-            <a:pPr algn="l">
-              <a:lnSpc>
-                <a:spcPts val="8959"/>
-              </a:lnSpc>
-            </a:pPr>
-            <a:r>
-              <a:rPr lang="en-US" sz="6399">
-                <a:solidFill>
-                  <a:srgbClr val="000000"/>
-                </a:solidFill>
-                <a:latin typeface="DM Serif Display"/>
-                <a:ea typeface="DM Serif Display"/>
-                <a:cs typeface="DM Serif Display"/>
-                <a:sym typeface="DM Serif Display"/>
-              </a:rPr>
-              <a:t>Table of Contents</a:t>
-            </a:r>
-          </a:p>
+          <a:p/>
         </p:txBody>
       </p:sp>
       <p:sp>
@@ -5300,30 +4411,7 @@
             <a:spAutoFit/>
           </a:bodyPr>
           <a:lstStyle/>
-          <a:p>
-            <a:pPr algn="l" marL="0" indent="0" lvl="0">
-              <a:lnSpc>
-                <a:spcPts val="2239"/>
-              </a:lnSpc>
-              <a:spcBef>
-                <a:spcPct val="0"/>
-              </a:spcBef>
-            </a:pPr>
-            <a:r>
-              <a:rPr lang="en-US" sz="1599" spc="159" strike="noStrike" u="none">
-                <a:solidFill>
-                  <a:srgbClr val="000000">
-                    <a:alpha val="49804"/>
-                  </a:srgbClr>
-                </a:solidFill>
-                <a:latin typeface="Open Sauce"/>
-                <a:ea typeface="Open Sauce"/>
-                <a:cs typeface="Open Sauce"/>
-                <a:sym typeface="Open Sauce"/>
-              </a:rPr>
-              <a:t>STUDIO SHODWE</a:t>
-            </a:r>
-          </a:p>
+          <a:p/>
         </p:txBody>
       </p:sp>
       <p:sp>
@@ -5349,6 +4437,10 @@
             <a:tailEnd type="none" len="sm" w="sm"/>
           </a:ln>
         </p:spPr>
+        <p:txBody>
+          <a:bodyPr/>
+          <a:p/>
+        </p:txBody>
       </p:sp>
       <p:sp>
         <p:nvSpPr>
@@ -5370,25 +4462,7 @@
             <a:spAutoFit/>
           </a:bodyPr>
           <a:lstStyle/>
-          <a:p>
-            <a:pPr algn="l">
-              <a:lnSpc>
-                <a:spcPts val="3840"/>
-              </a:lnSpc>
-            </a:pPr>
-            <a:r>
-              <a:rPr lang="en-US" sz="2400" b="true">
-                <a:solidFill>
-                  <a:srgbClr val="000000"/>
-                </a:solidFill>
-                <a:latin typeface="Open Sauce Bold"/>
-                <a:ea typeface="Open Sauce Bold"/>
-                <a:cs typeface="Open Sauce Bold"/>
-                <a:sym typeface="Open Sauce Bold"/>
-              </a:rPr>
-              <a:t>Problem</a:t>
-            </a:r>
-          </a:p>
+          <a:p/>
         </p:txBody>
       </p:sp>
       <p:sp>
@@ -5411,25 +4485,7 @@
             <a:spAutoFit/>
           </a:bodyPr>
           <a:lstStyle/>
-          <a:p>
-            <a:pPr algn="l">
-              <a:lnSpc>
-                <a:spcPts val="3840"/>
-              </a:lnSpc>
-            </a:pPr>
-            <a:r>
-              <a:rPr lang="en-US" sz="2400">
-                <a:solidFill>
-                  <a:srgbClr val="000000"/>
-                </a:solidFill>
-                <a:latin typeface="Open Sauce"/>
-                <a:ea typeface="Open Sauce"/>
-                <a:cs typeface="Open Sauce"/>
-                <a:sym typeface="Open Sauce"/>
-              </a:rPr>
-              <a:t>3</a:t>
-            </a:r>
-          </a:p>
+          <a:p/>
         </p:txBody>
       </p:sp>
       <p:sp>
@@ -5452,25 +4508,7 @@
             <a:spAutoFit/>
           </a:bodyPr>
           <a:lstStyle/>
-          <a:p>
-            <a:pPr algn="l">
-              <a:lnSpc>
-                <a:spcPts val="3840"/>
-              </a:lnSpc>
-            </a:pPr>
-            <a:r>
-              <a:rPr lang="en-US" sz="2400" b="true">
-                <a:solidFill>
-                  <a:srgbClr val="000000"/>
-                </a:solidFill>
-                <a:latin typeface="Open Sauce Bold"/>
-                <a:ea typeface="Open Sauce Bold"/>
-                <a:cs typeface="Open Sauce Bold"/>
-                <a:sym typeface="Open Sauce Bold"/>
-              </a:rPr>
-              <a:t>Solution</a:t>
-            </a:r>
-          </a:p>
+          <a:p/>
         </p:txBody>
       </p:sp>
       <p:sp>
@@ -5493,25 +4531,7 @@
             <a:spAutoFit/>
           </a:bodyPr>
           <a:lstStyle/>
-          <a:p>
-            <a:pPr algn="l">
-              <a:lnSpc>
-                <a:spcPts val="3840"/>
-              </a:lnSpc>
-            </a:pPr>
-            <a:r>
-              <a:rPr lang="en-US" sz="2400">
-                <a:solidFill>
-                  <a:srgbClr val="000000"/>
-                </a:solidFill>
-                <a:latin typeface="Open Sauce"/>
-                <a:ea typeface="Open Sauce"/>
-                <a:cs typeface="Open Sauce"/>
-                <a:sym typeface="Open Sauce"/>
-              </a:rPr>
-              <a:t>4</a:t>
-            </a:r>
-          </a:p>
+          <a:p/>
         </p:txBody>
       </p:sp>
       <p:sp>
@@ -5534,25 +4554,7 @@
             <a:spAutoFit/>
           </a:bodyPr>
           <a:lstStyle/>
-          <a:p>
-            <a:pPr algn="l">
-              <a:lnSpc>
-                <a:spcPts val="3840"/>
-              </a:lnSpc>
-            </a:pPr>
-            <a:r>
-              <a:rPr lang="en-US" sz="2400" b="true">
-                <a:solidFill>
-                  <a:srgbClr val="000000"/>
-                </a:solidFill>
-                <a:latin typeface="Open Sauce Bold"/>
-                <a:ea typeface="Open Sauce Bold"/>
-                <a:cs typeface="Open Sauce Bold"/>
-                <a:sym typeface="Open Sauce Bold"/>
-              </a:rPr>
-              <a:t>Why Now?</a:t>
-            </a:r>
-          </a:p>
+          <a:p/>
         </p:txBody>
       </p:sp>
       <p:sp>
@@ -5575,25 +4577,7 @@
             <a:spAutoFit/>
           </a:bodyPr>
           <a:lstStyle/>
-          <a:p>
-            <a:pPr algn="l">
-              <a:lnSpc>
-                <a:spcPts val="3840"/>
-              </a:lnSpc>
-            </a:pPr>
-            <a:r>
-              <a:rPr lang="en-US" sz="2400">
-                <a:solidFill>
-                  <a:srgbClr val="000000"/>
-                </a:solidFill>
-                <a:latin typeface="Open Sauce"/>
-                <a:ea typeface="Open Sauce"/>
-                <a:cs typeface="Open Sauce"/>
-                <a:sym typeface="Open Sauce"/>
-              </a:rPr>
-              <a:t>5</a:t>
-            </a:r>
-          </a:p>
+          <a:p/>
         </p:txBody>
       </p:sp>
       <p:sp>
@@ -5616,25 +4600,7 @@
             <a:spAutoFit/>
           </a:bodyPr>
           <a:lstStyle/>
-          <a:p>
-            <a:pPr algn="l">
-              <a:lnSpc>
-                <a:spcPts val="3840"/>
-              </a:lnSpc>
-            </a:pPr>
-            <a:r>
-              <a:rPr lang="en-US" sz="2400" b="true">
-                <a:solidFill>
-                  <a:srgbClr val="000000"/>
-                </a:solidFill>
-                <a:latin typeface="Open Sauce Bold"/>
-                <a:ea typeface="Open Sauce Bold"/>
-                <a:cs typeface="Open Sauce Bold"/>
-                <a:sym typeface="Open Sauce Bold"/>
-              </a:rPr>
-              <a:t>Services Overview</a:t>
-            </a:r>
-          </a:p>
+          <a:p/>
         </p:txBody>
       </p:sp>
       <p:sp>
@@ -5657,25 +4623,7 @@
             <a:spAutoFit/>
           </a:bodyPr>
           <a:lstStyle/>
-          <a:p>
-            <a:pPr algn="l">
-              <a:lnSpc>
-                <a:spcPts val="3840"/>
-              </a:lnSpc>
-            </a:pPr>
-            <a:r>
-              <a:rPr lang="en-US" sz="2400">
-                <a:solidFill>
-                  <a:srgbClr val="000000"/>
-                </a:solidFill>
-                <a:latin typeface="Open Sauce"/>
-                <a:ea typeface="Open Sauce"/>
-                <a:cs typeface="Open Sauce"/>
-                <a:sym typeface="Open Sauce"/>
-              </a:rPr>
-              <a:t>6</a:t>
-            </a:r>
-          </a:p>
+          <a:p/>
         </p:txBody>
       </p:sp>
       <p:sp>
@@ -5698,25 +4646,7 @@
             <a:spAutoFit/>
           </a:bodyPr>
           <a:lstStyle/>
-          <a:p>
-            <a:pPr algn="l">
-              <a:lnSpc>
-                <a:spcPts val="3840"/>
-              </a:lnSpc>
-            </a:pPr>
-            <a:r>
-              <a:rPr lang="en-US" sz="2400" b="true">
-                <a:solidFill>
-                  <a:srgbClr val="000000"/>
-                </a:solidFill>
-                <a:latin typeface="Open Sauce Bold"/>
-                <a:ea typeface="Open Sauce Bold"/>
-                <a:cs typeface="Open Sauce Bold"/>
-                <a:sym typeface="Open Sauce Bold"/>
-              </a:rPr>
-              <a:t>Business Model</a:t>
-            </a:r>
-          </a:p>
+          <a:p/>
         </p:txBody>
       </p:sp>
       <p:sp>
@@ -5739,25 +4669,7 @@
             <a:spAutoFit/>
           </a:bodyPr>
           <a:lstStyle/>
-          <a:p>
-            <a:pPr algn="l">
-              <a:lnSpc>
-                <a:spcPts val="3840"/>
-              </a:lnSpc>
-            </a:pPr>
-            <a:r>
-              <a:rPr lang="en-US" sz="2400">
-                <a:solidFill>
-                  <a:srgbClr val="000000"/>
-                </a:solidFill>
-                <a:latin typeface="Open Sauce"/>
-                <a:ea typeface="Open Sauce"/>
-                <a:cs typeface="Open Sauce"/>
-                <a:sym typeface="Open Sauce"/>
-              </a:rPr>
-              <a:t>7</a:t>
-            </a:r>
-          </a:p>
+          <a:p/>
         </p:txBody>
       </p:sp>
       <p:sp>
@@ -5780,25 +4692,7 @@
             <a:spAutoFit/>
           </a:bodyPr>
           <a:lstStyle/>
-          <a:p>
-            <a:pPr algn="l">
-              <a:lnSpc>
-                <a:spcPts val="3840"/>
-              </a:lnSpc>
-            </a:pPr>
-            <a:r>
-              <a:rPr lang="en-US" sz="2400" b="true">
-                <a:solidFill>
-                  <a:srgbClr val="000000"/>
-                </a:solidFill>
-                <a:latin typeface="Open Sauce Bold"/>
-                <a:ea typeface="Open Sauce Bold"/>
-                <a:cs typeface="Open Sauce Bold"/>
-                <a:sym typeface="Open Sauce Bold"/>
-              </a:rPr>
-              <a:t>Competitive Advantage</a:t>
-            </a:r>
-          </a:p>
+          <a:p/>
         </p:txBody>
       </p:sp>
       <p:sp>
@@ -5821,25 +4715,7 @@
             <a:spAutoFit/>
           </a:bodyPr>
           <a:lstStyle/>
-          <a:p>
-            <a:pPr algn="l">
-              <a:lnSpc>
-                <a:spcPts val="3840"/>
-              </a:lnSpc>
-            </a:pPr>
-            <a:r>
-              <a:rPr lang="en-US" sz="2400">
-                <a:solidFill>
-                  <a:srgbClr val="000000"/>
-                </a:solidFill>
-                <a:latin typeface="Open Sauce"/>
-                <a:ea typeface="Open Sauce"/>
-                <a:cs typeface="Open Sauce"/>
-                <a:sym typeface="Open Sauce"/>
-              </a:rPr>
-              <a:t>8</a:t>
-            </a:r>
-          </a:p>
+          <a:p/>
         </p:txBody>
       </p:sp>
       <p:sp>
@@ -5862,25 +4738,7 @@
             <a:spAutoFit/>
           </a:bodyPr>
           <a:lstStyle/>
-          <a:p>
-            <a:pPr algn="l">
-              <a:lnSpc>
-                <a:spcPts val="3840"/>
-              </a:lnSpc>
-            </a:pPr>
-            <a:r>
-              <a:rPr lang="en-US" sz="2400" b="true">
-                <a:solidFill>
-                  <a:srgbClr val="000000"/>
-                </a:solidFill>
-                <a:latin typeface="Open Sauce Bold"/>
-                <a:ea typeface="Open Sauce Bold"/>
-                <a:cs typeface="Open Sauce Bold"/>
-                <a:sym typeface="Open Sauce Bold"/>
-              </a:rPr>
-              <a:t>Team</a:t>
-            </a:r>
-          </a:p>
+          <a:p/>
         </p:txBody>
       </p:sp>
       <p:sp>
@@ -5903,25 +4761,7 @@
             <a:spAutoFit/>
           </a:bodyPr>
           <a:lstStyle/>
-          <a:p>
-            <a:pPr algn="l">
-              <a:lnSpc>
-                <a:spcPts val="3840"/>
-              </a:lnSpc>
-            </a:pPr>
-            <a:r>
-              <a:rPr lang="en-US" sz="2400">
-                <a:solidFill>
-                  <a:srgbClr val="000000"/>
-                </a:solidFill>
-                <a:latin typeface="Open Sauce"/>
-                <a:ea typeface="Open Sauce"/>
-                <a:cs typeface="Open Sauce"/>
-                <a:sym typeface="Open Sauce"/>
-              </a:rPr>
-              <a:t>9</a:t>
-            </a:r>
-          </a:p>
+          <a:p/>
         </p:txBody>
       </p:sp>
       <p:sp>
@@ -5944,25 +4784,7 @@
             <a:spAutoFit/>
           </a:bodyPr>
           <a:lstStyle/>
-          <a:p>
-            <a:pPr algn="l">
-              <a:lnSpc>
-                <a:spcPts val="3840"/>
-              </a:lnSpc>
-            </a:pPr>
-            <a:r>
-              <a:rPr lang="en-US" sz="2400" b="true">
-                <a:solidFill>
-                  <a:srgbClr val="000000"/>
-                </a:solidFill>
-                <a:latin typeface="Open Sauce Bold"/>
-                <a:ea typeface="Open Sauce Bold"/>
-                <a:cs typeface="Open Sauce Bold"/>
-                <a:sym typeface="Open Sauce Bold"/>
-              </a:rPr>
-              <a:t>Roadmap</a:t>
-            </a:r>
-          </a:p>
+          <a:p/>
         </p:txBody>
       </p:sp>
       <p:sp>
@@ -5985,25 +4807,7 @@
             <a:spAutoFit/>
           </a:bodyPr>
           <a:lstStyle/>
-          <a:p>
-            <a:pPr algn="l">
-              <a:lnSpc>
-                <a:spcPts val="3840"/>
-              </a:lnSpc>
-            </a:pPr>
-            <a:r>
-              <a:rPr lang="en-US" sz="2400">
-                <a:solidFill>
-                  <a:srgbClr val="000000"/>
-                </a:solidFill>
-                <a:latin typeface="Open Sauce"/>
-                <a:ea typeface="Open Sauce"/>
-                <a:cs typeface="Open Sauce"/>
-                <a:sym typeface="Open Sauce"/>
-              </a:rPr>
-              <a:t>10</a:t>
-            </a:r>
-          </a:p>
+          <a:p/>
         </p:txBody>
       </p:sp>
       <p:sp>
@@ -6026,25 +4830,7 @@
             <a:spAutoFit/>
           </a:bodyPr>
           <a:lstStyle/>
-          <a:p>
-            <a:pPr algn="l">
-              <a:lnSpc>
-                <a:spcPts val="3840"/>
-              </a:lnSpc>
-            </a:pPr>
-            <a:r>
-              <a:rPr lang="en-US" sz="2400" b="true">
-                <a:solidFill>
-                  <a:srgbClr val="000000"/>
-                </a:solidFill>
-                <a:latin typeface="Open Sauce Bold"/>
-                <a:ea typeface="Open Sauce Bold"/>
-                <a:cs typeface="Open Sauce Bold"/>
-                <a:sym typeface="Open Sauce Bold"/>
-              </a:rPr>
-              <a:t>Contect Info</a:t>
-            </a:r>
-          </a:p>
+          <a:p/>
         </p:txBody>
       </p:sp>
       <p:sp>
@@ -6067,25 +4853,7 @@
             <a:spAutoFit/>
           </a:bodyPr>
           <a:lstStyle/>
-          <a:p>
-            <a:pPr algn="l">
-              <a:lnSpc>
-                <a:spcPts val="3840"/>
-              </a:lnSpc>
-            </a:pPr>
-            <a:r>
-              <a:rPr lang="en-US" sz="2400">
-                <a:solidFill>
-                  <a:srgbClr val="000000"/>
-                </a:solidFill>
-                <a:latin typeface="Open Sauce"/>
-                <a:ea typeface="Open Sauce"/>
-                <a:cs typeface="Open Sauce"/>
-                <a:sym typeface="Open Sauce"/>
-              </a:rPr>
-              <a:t>11</a:t>
-            </a:r>
-          </a:p>
+          <a:p/>
         </p:txBody>
       </p:sp>
     </p:spTree>
@@ -6165,6 +4933,10 @@
             <a:miter/>
           </a:ln>
         </p:spPr>
+        <p:txBody>
+          <a:bodyPr/>
+          <a:p/>
+        </p:txBody>
       </p:sp>
       <p:sp>
         <p:nvSpPr>
@@ -6186,25 +4958,7 @@
             <a:spAutoFit/>
           </a:bodyPr>
           <a:lstStyle/>
-          <a:p>
-            <a:pPr algn="l" marL="0" indent="0" lvl="0">
-              <a:lnSpc>
-                <a:spcPts val="4479"/>
-              </a:lnSpc>
-            </a:pPr>
-            <a:r>
-              <a:rPr lang="en-US" sz="2799" strike="noStrike" u="none">
-                <a:solidFill>
-                  <a:srgbClr val="000000"/>
-                </a:solidFill>
-                <a:latin typeface="Open Sauce"/>
-                <a:ea typeface="Open Sauce"/>
-                <a:cs typeface="Open Sauce"/>
-                <a:sym typeface="Open Sauce"/>
-              </a:rPr>
-              <a:t>Many small and growing businesses struggle to reach the right audience</a:t>
-            </a:r>
-          </a:p>
+          <a:p/>
         </p:txBody>
       </p:sp>
       <p:grpSp>
@@ -6329,25 +5083,7 @@
             <a:spAutoFit/>
           </a:bodyPr>
           <a:lstStyle/>
-          <a:p>
-            <a:pPr algn="ctr" marL="0" indent="0" lvl="0">
-              <a:lnSpc>
-                <a:spcPts val="5120"/>
-              </a:lnSpc>
-            </a:pPr>
-            <a:r>
-              <a:rPr lang="en-US" b="true" sz="3200">
-                <a:solidFill>
-                  <a:srgbClr val="000000"/>
-                </a:solidFill>
-                <a:latin typeface="Open Sauce Bold"/>
-                <a:ea typeface="Open Sauce Bold"/>
-                <a:cs typeface="Open Sauce Bold"/>
-                <a:sym typeface="Open Sauce Bold"/>
-              </a:rPr>
-              <a:t>1</a:t>
-            </a:r>
-          </a:p>
+          <a:p/>
         </p:txBody>
       </p:sp>
       <p:sp>
@@ -6370,421 +5106,7 @@
             <a:spAutoFit/>
           </a:bodyPr>
           <a:lstStyle/>
-          <a:p>
-            <a:pPr algn="l" marL="0" indent="0" lvl="0">
-              <a:lnSpc>
-                <a:spcPts val="4479"/>
-              </a:lnSpc>
-            </a:pPr>
-            <a:r>
-              <a:rPr lang="en-US" sz="2799" strike="noStrike" u="none">
-                <a:solidFill>
-                  <a:srgbClr val="000000"/>
-                </a:solidFill>
-                <a:latin typeface="Open Sauce"/>
-                <a:ea typeface="Open Sauce"/>
-                <a:cs typeface="Open Sauce"/>
-                <a:sym typeface="Open Sauce"/>
-              </a:rPr>
-              <a:t>Ma</a:t>
-            </a:r>
-            <a:r>
-              <a:rPr lang="en-US" sz="2799" strike="noStrike" u="none">
-                <a:solidFill>
-                  <a:srgbClr val="000000"/>
-                </a:solidFill>
-                <a:latin typeface="Open Sauce"/>
-                <a:ea typeface="Open Sauce"/>
-                <a:cs typeface="Open Sauce"/>
-                <a:sym typeface="Open Sauce"/>
-              </a:rPr>
-              <a:t>rketi</a:t>
-            </a:r>
-            <a:r>
-              <a:rPr lang="en-US" sz="2799" strike="noStrike" u="none">
-                <a:solidFill>
-                  <a:srgbClr val="000000"/>
-                </a:solidFill>
-                <a:latin typeface="Open Sauce"/>
-                <a:ea typeface="Open Sauce"/>
-                <a:cs typeface="Open Sauce"/>
-                <a:sym typeface="Open Sauce"/>
-              </a:rPr>
-              <a:t>n</a:t>
-            </a:r>
-            <a:r>
-              <a:rPr lang="en-US" sz="2799" strike="noStrike" u="none">
-                <a:solidFill>
-                  <a:srgbClr val="000000"/>
-                </a:solidFill>
-                <a:latin typeface="Open Sauce"/>
-                <a:ea typeface="Open Sauce"/>
-                <a:cs typeface="Open Sauce"/>
-                <a:sym typeface="Open Sauce"/>
-              </a:rPr>
-              <a:t>g</a:t>
-            </a:r>
-            <a:r>
-              <a:rPr lang="en-US" sz="2799" strike="noStrike" u="none">
-                <a:solidFill>
-                  <a:srgbClr val="000000"/>
-                </a:solidFill>
-                <a:latin typeface="Open Sauce"/>
-                <a:ea typeface="Open Sauce"/>
-                <a:cs typeface="Open Sauce"/>
-                <a:sym typeface="Open Sauce"/>
-              </a:rPr>
-              <a:t> </a:t>
-            </a:r>
-            <a:r>
-              <a:rPr lang="en-US" sz="2799" strike="noStrike" u="none">
-                <a:solidFill>
-                  <a:srgbClr val="000000"/>
-                </a:solidFill>
-                <a:latin typeface="Open Sauce"/>
-                <a:ea typeface="Open Sauce"/>
-                <a:cs typeface="Open Sauce"/>
-                <a:sym typeface="Open Sauce"/>
-              </a:rPr>
-              <a:t>i</a:t>
-            </a:r>
-            <a:r>
-              <a:rPr lang="en-US" sz="2799" strike="noStrike" u="none">
-                <a:solidFill>
-                  <a:srgbClr val="000000"/>
-                </a:solidFill>
-                <a:latin typeface="Open Sauce"/>
-                <a:ea typeface="Open Sauce"/>
-                <a:cs typeface="Open Sauce"/>
-                <a:sym typeface="Open Sauce"/>
-              </a:rPr>
-              <a:t>s o</a:t>
-            </a:r>
-            <a:r>
-              <a:rPr lang="en-US" sz="2799" strike="noStrike" u="none">
-                <a:solidFill>
-                  <a:srgbClr val="000000"/>
-                </a:solidFill>
-                <a:latin typeface="Open Sauce"/>
-                <a:ea typeface="Open Sauce"/>
-                <a:cs typeface="Open Sauce"/>
-                <a:sym typeface="Open Sauce"/>
-              </a:rPr>
-              <a:t>fte</a:t>
-            </a:r>
-            <a:r>
-              <a:rPr lang="en-US" sz="2799" strike="noStrike" u="none">
-                <a:solidFill>
-                  <a:srgbClr val="000000"/>
-                </a:solidFill>
-                <a:latin typeface="Open Sauce"/>
-                <a:ea typeface="Open Sauce"/>
-                <a:cs typeface="Open Sauce"/>
-                <a:sym typeface="Open Sauce"/>
-              </a:rPr>
-              <a:t>n in</a:t>
-            </a:r>
-            <a:r>
-              <a:rPr lang="en-US" sz="2799" strike="noStrike" u="none">
-                <a:solidFill>
-                  <a:srgbClr val="000000"/>
-                </a:solidFill>
-                <a:latin typeface="Open Sauce"/>
-                <a:ea typeface="Open Sauce"/>
-                <a:cs typeface="Open Sauce"/>
-                <a:sym typeface="Open Sauce"/>
-              </a:rPr>
-              <a:t>con</a:t>
-            </a:r>
-            <a:r>
-              <a:rPr lang="en-US" sz="2799" strike="noStrike" u="none">
-                <a:solidFill>
-                  <a:srgbClr val="000000"/>
-                </a:solidFill>
-                <a:latin typeface="Open Sauce"/>
-                <a:ea typeface="Open Sauce"/>
-                <a:cs typeface="Open Sauce"/>
-                <a:sym typeface="Open Sauce"/>
-              </a:rPr>
-              <a:t>s</a:t>
-            </a:r>
-            <a:r>
-              <a:rPr lang="en-US" sz="2799" strike="noStrike" u="none">
-                <a:solidFill>
-                  <a:srgbClr val="000000"/>
-                </a:solidFill>
-                <a:latin typeface="Open Sauce"/>
-                <a:ea typeface="Open Sauce"/>
-                <a:cs typeface="Open Sauce"/>
-                <a:sym typeface="Open Sauce"/>
-              </a:rPr>
-              <a:t>i</a:t>
-            </a:r>
-            <a:r>
-              <a:rPr lang="en-US" sz="2799" strike="noStrike" u="none">
-                <a:solidFill>
-                  <a:srgbClr val="000000"/>
-                </a:solidFill>
-                <a:latin typeface="Open Sauce"/>
-                <a:ea typeface="Open Sauce"/>
-                <a:cs typeface="Open Sauce"/>
-                <a:sym typeface="Open Sauce"/>
-              </a:rPr>
-              <a:t>s</a:t>
-            </a:r>
-            <a:r>
-              <a:rPr lang="en-US" sz="2799" strike="noStrike" u="none">
-                <a:solidFill>
-                  <a:srgbClr val="000000"/>
-                </a:solidFill>
-                <a:latin typeface="Open Sauce"/>
-                <a:ea typeface="Open Sauce"/>
-                <a:cs typeface="Open Sauce"/>
-                <a:sym typeface="Open Sauce"/>
-              </a:rPr>
-              <a:t>t</a:t>
-            </a:r>
-            <a:r>
-              <a:rPr lang="en-US" sz="2799" strike="noStrike" u="none">
-                <a:solidFill>
-                  <a:srgbClr val="000000"/>
-                </a:solidFill>
-                <a:latin typeface="Open Sauce"/>
-                <a:ea typeface="Open Sauce"/>
-                <a:cs typeface="Open Sauce"/>
-                <a:sym typeface="Open Sauce"/>
-              </a:rPr>
-              <a:t>e</a:t>
-            </a:r>
-            <a:r>
-              <a:rPr lang="en-US" sz="2799" strike="noStrike" u="none">
-                <a:solidFill>
-                  <a:srgbClr val="000000"/>
-                </a:solidFill>
-                <a:latin typeface="Open Sauce"/>
-                <a:ea typeface="Open Sauce"/>
-                <a:cs typeface="Open Sauce"/>
-                <a:sym typeface="Open Sauce"/>
-              </a:rPr>
-              <a:t>n</a:t>
-            </a:r>
-            <a:r>
-              <a:rPr lang="en-US" sz="2799" strike="noStrike" u="none">
-                <a:solidFill>
-                  <a:srgbClr val="000000"/>
-                </a:solidFill>
-                <a:latin typeface="Open Sauce"/>
-                <a:ea typeface="Open Sauce"/>
-                <a:cs typeface="Open Sauce"/>
-                <a:sym typeface="Open Sauce"/>
-              </a:rPr>
-              <a:t>t</a:t>
-            </a:r>
-            <a:r>
-              <a:rPr lang="en-US" sz="2799" strike="noStrike" u="none">
-                <a:solidFill>
-                  <a:srgbClr val="000000"/>
-                </a:solidFill>
-                <a:latin typeface="Open Sauce"/>
-                <a:ea typeface="Open Sauce"/>
-                <a:cs typeface="Open Sauce"/>
-                <a:sym typeface="Open Sauce"/>
-              </a:rPr>
-              <a:t>, o</a:t>
-            </a:r>
-            <a:r>
-              <a:rPr lang="en-US" sz="2799" strike="noStrike" u="none">
-                <a:solidFill>
-                  <a:srgbClr val="000000"/>
-                </a:solidFill>
-                <a:latin typeface="Open Sauce"/>
-                <a:ea typeface="Open Sauce"/>
-                <a:cs typeface="Open Sauce"/>
-                <a:sym typeface="Open Sauce"/>
-              </a:rPr>
-              <a:t>u</a:t>
-            </a:r>
-            <a:r>
-              <a:rPr lang="en-US" sz="2799" strike="noStrike" u="none">
-                <a:solidFill>
-                  <a:srgbClr val="000000"/>
-                </a:solidFill>
-                <a:latin typeface="Open Sauce"/>
-                <a:ea typeface="Open Sauce"/>
-                <a:cs typeface="Open Sauce"/>
-                <a:sym typeface="Open Sauce"/>
-              </a:rPr>
-              <a:t>tdat</a:t>
-            </a:r>
-            <a:r>
-              <a:rPr lang="en-US" sz="2799" strike="noStrike" u="none">
-                <a:solidFill>
-                  <a:srgbClr val="000000"/>
-                </a:solidFill>
-                <a:latin typeface="Open Sauce"/>
-                <a:ea typeface="Open Sauce"/>
-                <a:cs typeface="Open Sauce"/>
-                <a:sym typeface="Open Sauce"/>
-              </a:rPr>
-              <a:t>e</a:t>
-            </a:r>
-            <a:r>
-              <a:rPr lang="en-US" sz="2799" strike="noStrike" u="none">
-                <a:solidFill>
-                  <a:srgbClr val="000000"/>
-                </a:solidFill>
-                <a:latin typeface="Open Sauce"/>
-                <a:ea typeface="Open Sauce"/>
-                <a:cs typeface="Open Sauce"/>
-                <a:sym typeface="Open Sauce"/>
-              </a:rPr>
-              <a:t>d,</a:t>
-            </a:r>
-            <a:r>
-              <a:rPr lang="en-US" sz="2799" strike="noStrike" u="none">
-                <a:solidFill>
-                  <a:srgbClr val="000000"/>
-                </a:solidFill>
-                <a:latin typeface="Open Sauce"/>
-                <a:ea typeface="Open Sauce"/>
-                <a:cs typeface="Open Sauce"/>
-                <a:sym typeface="Open Sauce"/>
-              </a:rPr>
-              <a:t> o</a:t>
-            </a:r>
-            <a:r>
-              <a:rPr lang="en-US" sz="2799" strike="noStrike" u="none">
-                <a:solidFill>
-                  <a:srgbClr val="000000"/>
-                </a:solidFill>
-                <a:latin typeface="Open Sauce"/>
-                <a:ea typeface="Open Sauce"/>
-                <a:cs typeface="Open Sauce"/>
-                <a:sym typeface="Open Sauce"/>
-              </a:rPr>
-              <a:t>r</a:t>
-            </a:r>
-            <a:r>
-              <a:rPr lang="en-US" sz="2799" strike="noStrike" u="none">
-                <a:solidFill>
-                  <a:srgbClr val="000000"/>
-                </a:solidFill>
-                <a:latin typeface="Open Sauce"/>
-                <a:ea typeface="Open Sauce"/>
-                <a:cs typeface="Open Sauce"/>
-                <a:sym typeface="Open Sauce"/>
-              </a:rPr>
-              <a:t> </a:t>
-            </a:r>
-            <a:r>
-              <a:rPr lang="en-US" sz="2799" strike="noStrike" u="none">
-                <a:solidFill>
-                  <a:srgbClr val="000000"/>
-                </a:solidFill>
-                <a:latin typeface="Open Sauce"/>
-                <a:ea typeface="Open Sauce"/>
-                <a:cs typeface="Open Sauce"/>
-                <a:sym typeface="Open Sauce"/>
-              </a:rPr>
-              <a:t>l</a:t>
-            </a:r>
-            <a:r>
-              <a:rPr lang="en-US" sz="2799" strike="noStrike" u="none">
-                <a:solidFill>
-                  <a:srgbClr val="000000"/>
-                </a:solidFill>
-                <a:latin typeface="Open Sauce"/>
-                <a:ea typeface="Open Sauce"/>
-                <a:cs typeface="Open Sauce"/>
-                <a:sym typeface="Open Sauce"/>
-              </a:rPr>
-              <a:t>ac</a:t>
-            </a:r>
-            <a:r>
-              <a:rPr lang="en-US" sz="2799" strike="noStrike" u="none">
-                <a:solidFill>
-                  <a:srgbClr val="000000"/>
-                </a:solidFill>
-                <a:latin typeface="Open Sauce"/>
-                <a:ea typeface="Open Sauce"/>
-                <a:cs typeface="Open Sauce"/>
-                <a:sym typeface="Open Sauce"/>
-              </a:rPr>
-              <a:t>ks</a:t>
-            </a:r>
-            <a:r>
-              <a:rPr lang="en-US" sz="2799" strike="noStrike" u="none">
-                <a:solidFill>
-                  <a:srgbClr val="000000"/>
-                </a:solidFill>
-                <a:latin typeface="Open Sauce"/>
-                <a:ea typeface="Open Sauce"/>
-                <a:cs typeface="Open Sauce"/>
-                <a:sym typeface="Open Sauce"/>
-              </a:rPr>
-              <a:t> </a:t>
-            </a:r>
-            <a:r>
-              <a:rPr lang="en-US" sz="2799" strike="noStrike" u="none">
-                <a:solidFill>
-                  <a:srgbClr val="000000"/>
-                </a:solidFill>
-                <a:latin typeface="Open Sauce"/>
-                <a:ea typeface="Open Sauce"/>
-                <a:cs typeface="Open Sauce"/>
-                <a:sym typeface="Open Sauce"/>
-              </a:rPr>
-              <a:t>s</a:t>
-            </a:r>
-            <a:r>
-              <a:rPr lang="en-US" sz="2799" strike="noStrike" u="none">
-                <a:solidFill>
-                  <a:srgbClr val="000000"/>
-                </a:solidFill>
-                <a:latin typeface="Open Sauce"/>
-                <a:ea typeface="Open Sauce"/>
-                <a:cs typeface="Open Sauce"/>
-                <a:sym typeface="Open Sauce"/>
-              </a:rPr>
-              <a:t>tr</a:t>
-            </a:r>
-            <a:r>
-              <a:rPr lang="en-US" sz="2799" strike="noStrike" u="none">
-                <a:solidFill>
-                  <a:srgbClr val="000000"/>
-                </a:solidFill>
-                <a:latin typeface="Open Sauce"/>
-                <a:ea typeface="Open Sauce"/>
-                <a:cs typeface="Open Sauce"/>
-                <a:sym typeface="Open Sauce"/>
-              </a:rPr>
-              <a:t>a</a:t>
-            </a:r>
-            <a:r>
-              <a:rPr lang="en-US" sz="2799" strike="noStrike" u="none">
-                <a:solidFill>
-                  <a:srgbClr val="000000"/>
-                </a:solidFill>
-                <a:latin typeface="Open Sauce"/>
-                <a:ea typeface="Open Sauce"/>
-                <a:cs typeface="Open Sauce"/>
-                <a:sym typeface="Open Sauce"/>
-              </a:rPr>
-              <a:t>te</a:t>
-            </a:r>
-            <a:r>
-              <a:rPr lang="en-US" sz="2799" strike="noStrike" u="none">
-                <a:solidFill>
-                  <a:srgbClr val="000000"/>
-                </a:solidFill>
-                <a:latin typeface="Open Sauce"/>
-                <a:ea typeface="Open Sauce"/>
-                <a:cs typeface="Open Sauce"/>
-                <a:sym typeface="Open Sauce"/>
-              </a:rPr>
-              <a:t>gy</a:t>
-            </a:r>
-          </a:p>
+          <a:p/>
         </p:txBody>
       </p:sp>
       <p:grpSp>
@@ -6909,25 +5231,7 @@
             <a:spAutoFit/>
           </a:bodyPr>
           <a:lstStyle/>
-          <a:p>
-            <a:pPr algn="ctr" marL="0" indent="0" lvl="0">
-              <a:lnSpc>
-                <a:spcPts val="5120"/>
-              </a:lnSpc>
-            </a:pPr>
-            <a:r>
-              <a:rPr lang="en-US" b="true" sz="3200">
-                <a:solidFill>
-                  <a:srgbClr val="000000"/>
-                </a:solidFill>
-                <a:latin typeface="Open Sauce Bold"/>
-                <a:ea typeface="Open Sauce Bold"/>
-                <a:cs typeface="Open Sauce Bold"/>
-                <a:sym typeface="Open Sauce Bold"/>
-              </a:rPr>
-              <a:t>2</a:t>
-            </a:r>
-          </a:p>
+          <a:p/>
         </p:txBody>
       </p:sp>
       <p:sp>
@@ -6950,301 +5254,7 @@
             <a:spAutoFit/>
           </a:bodyPr>
           <a:lstStyle/>
-          <a:p>
-            <a:pPr algn="l" marL="0" indent="0" lvl="0">
-              <a:lnSpc>
-                <a:spcPts val="4479"/>
-              </a:lnSpc>
-            </a:pPr>
-            <a:r>
-              <a:rPr lang="en-US" sz="2799">
-                <a:solidFill>
-                  <a:srgbClr val="000000"/>
-                </a:solidFill>
-                <a:latin typeface="Open Sauce"/>
-                <a:ea typeface="Open Sauce"/>
-                <a:cs typeface="Open Sauce"/>
-                <a:sym typeface="Open Sauce"/>
-              </a:rPr>
-              <a:t>I</a:t>
-            </a:r>
-            <a:r>
-              <a:rPr lang="en-US" sz="2799" strike="noStrike" u="none">
-                <a:solidFill>
-                  <a:srgbClr val="000000"/>
-                </a:solidFill>
-                <a:latin typeface="Open Sauce"/>
-                <a:ea typeface="Open Sauce"/>
-                <a:cs typeface="Open Sauce"/>
-                <a:sym typeface="Open Sauce"/>
-              </a:rPr>
-              <a:t>n</a:t>
-            </a:r>
-            <a:r>
-              <a:rPr lang="en-US" sz="2799" strike="noStrike" u="none">
-                <a:solidFill>
-                  <a:srgbClr val="000000"/>
-                </a:solidFill>
-                <a:latin typeface="Open Sauce"/>
-                <a:ea typeface="Open Sauce"/>
-                <a:cs typeface="Open Sauce"/>
-                <a:sym typeface="Open Sauce"/>
-              </a:rPr>
-              <a:t>tern</a:t>
-            </a:r>
-            <a:r>
-              <a:rPr lang="en-US" sz="2799" strike="noStrike" u="none">
-                <a:solidFill>
-                  <a:srgbClr val="000000"/>
-                </a:solidFill>
-                <a:latin typeface="Open Sauce"/>
-                <a:ea typeface="Open Sauce"/>
-                <a:cs typeface="Open Sauce"/>
-                <a:sym typeface="Open Sauce"/>
-              </a:rPr>
-              <a:t>al </a:t>
-            </a:r>
-            <a:r>
-              <a:rPr lang="en-US" sz="2799" strike="noStrike" u="none">
-                <a:solidFill>
-                  <a:srgbClr val="000000"/>
-                </a:solidFill>
-                <a:latin typeface="Open Sauce"/>
-                <a:ea typeface="Open Sauce"/>
-                <a:cs typeface="Open Sauce"/>
-                <a:sym typeface="Open Sauce"/>
-              </a:rPr>
-              <a:t>te</a:t>
-            </a:r>
-            <a:r>
-              <a:rPr lang="en-US" sz="2799" strike="noStrike" u="none">
-                <a:solidFill>
-                  <a:srgbClr val="000000"/>
-                </a:solidFill>
-                <a:latin typeface="Open Sauce"/>
-                <a:ea typeface="Open Sauce"/>
-                <a:cs typeface="Open Sauce"/>
-                <a:sym typeface="Open Sauce"/>
-              </a:rPr>
-              <a:t>a</a:t>
-            </a:r>
-            <a:r>
-              <a:rPr lang="en-US" sz="2799" strike="noStrike" u="none">
-                <a:solidFill>
-                  <a:srgbClr val="000000"/>
-                </a:solidFill>
-                <a:latin typeface="Open Sauce"/>
-                <a:ea typeface="Open Sauce"/>
-                <a:cs typeface="Open Sauce"/>
-                <a:sym typeface="Open Sauce"/>
-              </a:rPr>
-              <a:t>ms</a:t>
-            </a:r>
-            <a:r>
-              <a:rPr lang="en-US" sz="2799" strike="noStrike" u="none">
-                <a:solidFill>
-                  <a:srgbClr val="000000"/>
-                </a:solidFill>
-                <a:latin typeface="Open Sauce"/>
-                <a:ea typeface="Open Sauce"/>
-                <a:cs typeface="Open Sauce"/>
-                <a:sym typeface="Open Sauce"/>
-              </a:rPr>
-              <a:t> </a:t>
-            </a:r>
-            <a:r>
-              <a:rPr lang="en-US" sz="2799" strike="noStrike" u="none">
-                <a:solidFill>
-                  <a:srgbClr val="000000"/>
-                </a:solidFill>
-                <a:latin typeface="Open Sauce"/>
-                <a:ea typeface="Open Sauce"/>
-                <a:cs typeface="Open Sauce"/>
-                <a:sym typeface="Open Sauce"/>
-              </a:rPr>
-              <a:t>a</a:t>
-            </a:r>
-            <a:r>
-              <a:rPr lang="en-US" sz="2799" strike="noStrike" u="none">
-                <a:solidFill>
-                  <a:srgbClr val="000000"/>
-                </a:solidFill>
-                <a:latin typeface="Open Sauce"/>
-                <a:ea typeface="Open Sauce"/>
-                <a:cs typeface="Open Sauce"/>
-                <a:sym typeface="Open Sauce"/>
-              </a:rPr>
-              <a:t>re stretch</a:t>
-            </a:r>
-            <a:r>
-              <a:rPr lang="en-US" sz="2799" strike="noStrike" u="none">
-                <a:solidFill>
-                  <a:srgbClr val="000000"/>
-                </a:solidFill>
-                <a:latin typeface="Open Sauce"/>
-                <a:ea typeface="Open Sauce"/>
-                <a:cs typeface="Open Sauce"/>
-                <a:sym typeface="Open Sauce"/>
-              </a:rPr>
-              <a:t>ed</a:t>
-            </a:r>
-            <a:r>
-              <a:rPr lang="en-US" sz="2799" strike="noStrike" u="none">
-                <a:solidFill>
-                  <a:srgbClr val="000000"/>
-                </a:solidFill>
-                <a:latin typeface="Open Sauce"/>
-                <a:ea typeface="Open Sauce"/>
-                <a:cs typeface="Open Sauce"/>
-                <a:sym typeface="Open Sauce"/>
-              </a:rPr>
-              <a:t> th</a:t>
-            </a:r>
-            <a:r>
-              <a:rPr lang="en-US" sz="2799" strike="noStrike" u="none">
-                <a:solidFill>
-                  <a:srgbClr val="000000"/>
-                </a:solidFill>
-                <a:latin typeface="Open Sauce"/>
-                <a:ea typeface="Open Sauce"/>
-                <a:cs typeface="Open Sauce"/>
-                <a:sym typeface="Open Sauce"/>
-              </a:rPr>
-              <a:t>in</a:t>
-            </a:r>
-            <a:r>
-              <a:rPr lang="en-US" sz="2799" strike="noStrike" u="none">
-                <a:solidFill>
-                  <a:srgbClr val="000000"/>
-                </a:solidFill>
-                <a:latin typeface="Open Sauce"/>
-                <a:ea typeface="Open Sauce"/>
-                <a:cs typeface="Open Sauce"/>
-                <a:sym typeface="Open Sauce"/>
-              </a:rPr>
-              <a:t> </a:t>
-            </a:r>
-            <a:r>
-              <a:rPr lang="en-US" sz="2799" strike="noStrike" u="none">
-                <a:solidFill>
-                  <a:srgbClr val="000000"/>
-                </a:solidFill>
-                <a:latin typeface="Open Sauce"/>
-                <a:ea typeface="Open Sauce"/>
-                <a:cs typeface="Open Sauce"/>
-                <a:sym typeface="Open Sauce"/>
-              </a:rPr>
-              <a:t>o</a:t>
-            </a:r>
-            <a:r>
-              <a:rPr lang="en-US" sz="2799" strike="noStrike" u="none">
-                <a:solidFill>
-                  <a:srgbClr val="000000"/>
-                </a:solidFill>
-                <a:latin typeface="Open Sauce"/>
-                <a:ea typeface="Open Sauce"/>
-                <a:cs typeface="Open Sauce"/>
-                <a:sym typeface="Open Sauce"/>
-              </a:rPr>
-              <a:t>r</a:t>
-            </a:r>
-            <a:r>
-              <a:rPr lang="en-US" sz="2799" strike="noStrike" u="none">
-                <a:solidFill>
-                  <a:srgbClr val="000000"/>
-                </a:solidFill>
-                <a:latin typeface="Open Sauce"/>
-                <a:ea typeface="Open Sauce"/>
-                <a:cs typeface="Open Sauce"/>
-                <a:sym typeface="Open Sauce"/>
-              </a:rPr>
-              <a:t> lack d</a:t>
-            </a:r>
-            <a:r>
-              <a:rPr lang="en-US" sz="2799" strike="noStrike" u="none">
-                <a:solidFill>
-                  <a:srgbClr val="000000"/>
-                </a:solidFill>
-                <a:latin typeface="Open Sauce"/>
-                <a:ea typeface="Open Sauce"/>
-                <a:cs typeface="Open Sauce"/>
-                <a:sym typeface="Open Sauce"/>
-              </a:rPr>
-              <a:t>ig</a:t>
-            </a:r>
-            <a:r>
-              <a:rPr lang="en-US" sz="2799" strike="noStrike" u="none">
-                <a:solidFill>
-                  <a:srgbClr val="000000"/>
-                </a:solidFill>
-                <a:latin typeface="Open Sauce"/>
-                <a:ea typeface="Open Sauce"/>
-                <a:cs typeface="Open Sauce"/>
-                <a:sym typeface="Open Sauce"/>
-              </a:rPr>
-              <a:t>i</a:t>
-            </a:r>
-            <a:r>
-              <a:rPr lang="en-US" sz="2799" strike="noStrike" u="none">
-                <a:solidFill>
-                  <a:srgbClr val="000000"/>
-                </a:solidFill>
-                <a:latin typeface="Open Sauce"/>
-                <a:ea typeface="Open Sauce"/>
-                <a:cs typeface="Open Sauce"/>
-                <a:sym typeface="Open Sauce"/>
-              </a:rPr>
-              <a:t>t</a:t>
-            </a:r>
-            <a:r>
-              <a:rPr lang="en-US" sz="2799" strike="noStrike" u="none">
-                <a:solidFill>
-                  <a:srgbClr val="000000"/>
-                </a:solidFill>
-                <a:latin typeface="Open Sauce"/>
-                <a:ea typeface="Open Sauce"/>
-                <a:cs typeface="Open Sauce"/>
-                <a:sym typeface="Open Sauce"/>
-              </a:rPr>
-              <a:t>al</a:t>
-            </a:r>
-            <a:r>
-              <a:rPr lang="en-US" sz="2799" strike="noStrike" u="none">
-                <a:solidFill>
-                  <a:srgbClr val="000000"/>
-                </a:solidFill>
-                <a:latin typeface="Open Sauce"/>
-                <a:ea typeface="Open Sauce"/>
-                <a:cs typeface="Open Sauce"/>
-                <a:sym typeface="Open Sauce"/>
-              </a:rPr>
-              <a:t> e</a:t>
-            </a:r>
-            <a:r>
-              <a:rPr lang="en-US" sz="2799" strike="noStrike" u="none">
-                <a:solidFill>
-                  <a:srgbClr val="000000"/>
-                </a:solidFill>
-                <a:latin typeface="Open Sauce"/>
-                <a:ea typeface="Open Sauce"/>
-                <a:cs typeface="Open Sauce"/>
-                <a:sym typeface="Open Sauce"/>
-              </a:rPr>
-              <a:t>xpertis</a:t>
-            </a:r>
-            <a:r>
-              <a:rPr lang="en-US" sz="2799" strike="noStrike" u="none">
-                <a:solidFill>
-                  <a:srgbClr val="000000"/>
-                </a:solidFill>
-                <a:latin typeface="Open Sauce"/>
-                <a:ea typeface="Open Sauce"/>
-                <a:cs typeface="Open Sauce"/>
-                <a:sym typeface="Open Sauce"/>
-              </a:rPr>
-              <a:t>e</a:t>
-            </a:r>
-          </a:p>
+          <a:p/>
         </p:txBody>
       </p:sp>
       <p:grpSp>
@@ -7369,25 +5379,7 @@
             <a:spAutoFit/>
           </a:bodyPr>
           <a:lstStyle/>
-          <a:p>
-            <a:pPr algn="ctr" marL="0" indent="0" lvl="0">
-              <a:lnSpc>
-                <a:spcPts val="5120"/>
-              </a:lnSpc>
-            </a:pPr>
-            <a:r>
-              <a:rPr lang="en-US" b="true" sz="3200">
-                <a:solidFill>
-                  <a:srgbClr val="000000"/>
-                </a:solidFill>
-                <a:latin typeface="Open Sauce Bold"/>
-                <a:ea typeface="Open Sauce Bold"/>
-                <a:cs typeface="Open Sauce Bold"/>
-                <a:sym typeface="Open Sauce Bold"/>
-              </a:rPr>
-              <a:t>3</a:t>
-            </a:r>
-          </a:p>
+          <a:p/>
         </p:txBody>
       </p:sp>
       <p:sp>
@@ -7410,25 +5402,7 @@
             <a:spAutoFit/>
           </a:bodyPr>
           <a:lstStyle/>
-          <a:p>
-            <a:pPr algn="l">
-              <a:lnSpc>
-                <a:spcPts val="8959"/>
-              </a:lnSpc>
-            </a:pPr>
-            <a:r>
-              <a:rPr lang="en-US" sz="6399">
-                <a:solidFill>
-                  <a:srgbClr val="000000"/>
-                </a:solidFill>
-                <a:latin typeface="DM Serif Display"/>
-                <a:ea typeface="DM Serif Display"/>
-                <a:cs typeface="DM Serif Display"/>
-                <a:sym typeface="DM Serif Display"/>
-              </a:rPr>
-              <a:t>Problem</a:t>
-            </a:r>
-          </a:p>
+          <a:p/>
         </p:txBody>
       </p:sp>
       <p:sp>
@@ -7451,30 +5425,7 @@
             <a:spAutoFit/>
           </a:bodyPr>
           <a:lstStyle/>
-          <a:p>
-            <a:pPr algn="l" marL="0" indent="0" lvl="0">
-              <a:lnSpc>
-                <a:spcPts val="2239"/>
-              </a:lnSpc>
-              <a:spcBef>
-                <a:spcPct val="0"/>
-              </a:spcBef>
-            </a:pPr>
-            <a:r>
-              <a:rPr lang="en-US" sz="1599" spc="159" strike="noStrike" u="none">
-                <a:solidFill>
-                  <a:srgbClr val="000000">
-                    <a:alpha val="49804"/>
-                  </a:srgbClr>
-                </a:solidFill>
-                <a:latin typeface="Open Sauce"/>
-                <a:ea typeface="Open Sauce"/>
-                <a:cs typeface="Open Sauce"/>
-                <a:sym typeface="Open Sauce"/>
-              </a:rPr>
-              <a:t>STUDIO SHODWE</a:t>
-            </a:r>
-          </a:p>
+          <a:p/>
         </p:txBody>
       </p:sp>
       <p:sp>
@@ -7497,30 +5448,7 @@
             <a:spAutoFit/>
           </a:bodyPr>
           <a:lstStyle/>
-          <a:p>
-            <a:pPr algn="r" marL="0" indent="0" lvl="0">
-              <a:lnSpc>
-                <a:spcPts val="2239"/>
-              </a:lnSpc>
-              <a:spcBef>
-                <a:spcPct val="0"/>
-              </a:spcBef>
-            </a:pPr>
-            <a:r>
-              <a:rPr lang="en-US" sz="1599" spc="159">
-                <a:solidFill>
-                  <a:srgbClr val="000000">
-                    <a:alpha val="49804"/>
-                  </a:srgbClr>
-                </a:solidFill>
-                <a:latin typeface="Open Sauce"/>
-                <a:ea typeface="Open Sauce"/>
-                <a:cs typeface="Open Sauce"/>
-                <a:sym typeface="Open Sauce"/>
-              </a:rPr>
-              <a:t>3</a:t>
-            </a:r>
-          </a:p>
+          <a:p/>
         </p:txBody>
       </p:sp>
       <p:sp>
@@ -7546,6 +5474,10 @@
             <a:tailEnd type="none" len="sm" w="sm"/>
           </a:ln>
         </p:spPr>
+        <p:txBody>
+          <a:bodyPr/>
+          <a:p/>
+        </p:txBody>
       </p:sp>
     </p:spTree>
   </p:cSld>
@@ -7624,6 +5556,10 @@
             <a:miter/>
           </a:ln>
         </p:spPr>
+        <p:txBody>
+          <a:bodyPr/>
+          <a:p/>
+        </p:txBody>
       </p:sp>
       <p:grpSp>
         <p:nvGrpSpPr>
@@ -7764,6 +5700,10 @@
             <a:tailEnd type="none" len="sm" w="sm"/>
           </a:ln>
         </p:spPr>
+        <p:txBody>
+          <a:bodyPr/>
+          <a:p/>
+        </p:txBody>
       </p:sp>
       <p:grpSp>
         <p:nvGrpSpPr>
@@ -8048,6 +5988,10 @@
             </a:stretch>
           </a:blipFill>
         </p:spPr>
+        <p:txBody>
+          <a:bodyPr/>
+          <a:p/>
+        </p:txBody>
       </p:sp>
       <p:sp>
         <p:nvSpPr>
@@ -8100,6 +6044,10 @@
             </a:stretch>
           </a:blipFill>
         </p:spPr>
+        <p:txBody>
+          <a:bodyPr/>
+          <a:p/>
+        </p:txBody>
       </p:sp>
       <p:sp>
         <p:nvSpPr>
@@ -8121,25 +6069,7 @@
             <a:spAutoFit/>
           </a:bodyPr>
           <a:lstStyle/>
-          <a:p>
-            <a:pPr algn="l">
-              <a:lnSpc>
-                <a:spcPts val="8959"/>
-              </a:lnSpc>
-            </a:pPr>
-            <a:r>
-              <a:rPr lang="en-US" sz="6399">
-                <a:solidFill>
-                  <a:srgbClr val="000000"/>
-                </a:solidFill>
-                <a:latin typeface="DM Serif Display"/>
-                <a:ea typeface="DM Serif Display"/>
-                <a:cs typeface="DM Serif Display"/>
-                <a:sym typeface="DM Serif Display"/>
-              </a:rPr>
-              <a:t>Solution</a:t>
-            </a:r>
-          </a:p>
+          <a:p/>
         </p:txBody>
       </p:sp>
       <p:sp>
@@ -8162,205 +6092,7 @@
             <a:spAutoFit/>
           </a:bodyPr>
           <a:lstStyle/>
-          <a:p>
-            <a:pPr algn="ctr" marL="0" indent="0" lvl="0">
-              <a:lnSpc>
-                <a:spcPts val="4479"/>
-              </a:lnSpc>
-            </a:pPr>
-            <a:r>
-              <a:rPr lang="en-US" sz="2799">
-                <a:solidFill>
-                  <a:srgbClr val="000000"/>
-                </a:solidFill>
-                <a:latin typeface="Open Sauce"/>
-                <a:ea typeface="Open Sauce"/>
-                <a:cs typeface="Open Sauce"/>
-                <a:sym typeface="Open Sauce"/>
-              </a:rPr>
-              <a:t>A</a:t>
-            </a:r>
-            <a:r>
-              <a:rPr lang="en-US" sz="2799" strike="noStrike" u="none">
-                <a:solidFill>
-                  <a:srgbClr val="000000"/>
-                </a:solidFill>
-                <a:latin typeface="Open Sauce"/>
-                <a:ea typeface="Open Sauce"/>
-                <a:cs typeface="Open Sauce"/>
-                <a:sym typeface="Open Sauce"/>
-              </a:rPr>
-              <a:t> </a:t>
-            </a:r>
-            <a:r>
-              <a:rPr lang="en-US" sz="2799" strike="noStrike" u="none">
-                <a:solidFill>
-                  <a:srgbClr val="000000"/>
-                </a:solidFill>
-                <a:latin typeface="Open Sauce"/>
-                <a:ea typeface="Open Sauce"/>
-                <a:cs typeface="Open Sauce"/>
-                <a:sym typeface="Open Sauce"/>
-              </a:rPr>
-              <a:t>f</a:t>
-            </a:r>
-            <a:r>
-              <a:rPr lang="en-US" sz="2799" strike="noStrike" u="none">
-                <a:solidFill>
-                  <a:srgbClr val="000000"/>
-                </a:solidFill>
-                <a:latin typeface="Open Sauce"/>
-                <a:ea typeface="Open Sauce"/>
-                <a:cs typeface="Open Sauce"/>
-                <a:sym typeface="Open Sauce"/>
-              </a:rPr>
-              <a:t>l</a:t>
-            </a:r>
-            <a:r>
-              <a:rPr lang="en-US" sz="2799" strike="noStrike" u="none">
-                <a:solidFill>
-                  <a:srgbClr val="000000"/>
-                </a:solidFill>
-                <a:latin typeface="Open Sauce"/>
-                <a:ea typeface="Open Sauce"/>
-                <a:cs typeface="Open Sauce"/>
-                <a:sym typeface="Open Sauce"/>
-              </a:rPr>
-              <a:t>exib</a:t>
-            </a:r>
-            <a:r>
-              <a:rPr lang="en-US" sz="2799" strike="noStrike" u="none">
-                <a:solidFill>
-                  <a:srgbClr val="000000"/>
-                </a:solidFill>
-                <a:latin typeface="Open Sauce"/>
-                <a:ea typeface="Open Sauce"/>
-                <a:cs typeface="Open Sauce"/>
-                <a:sym typeface="Open Sauce"/>
-              </a:rPr>
-              <a:t>l</a:t>
-            </a:r>
-            <a:r>
-              <a:rPr lang="en-US" sz="2799" strike="noStrike" u="none">
-                <a:solidFill>
-                  <a:srgbClr val="000000"/>
-                </a:solidFill>
-                <a:latin typeface="Open Sauce"/>
-                <a:ea typeface="Open Sauce"/>
-                <a:cs typeface="Open Sauce"/>
-                <a:sym typeface="Open Sauce"/>
-              </a:rPr>
-              <a:t>e,</a:t>
-            </a:r>
-            <a:r>
-              <a:rPr lang="en-US" sz="2799" strike="noStrike" u="none">
-                <a:solidFill>
-                  <a:srgbClr val="000000"/>
-                </a:solidFill>
-                <a:latin typeface="Open Sauce"/>
-                <a:ea typeface="Open Sauce"/>
-                <a:cs typeface="Open Sauce"/>
-                <a:sym typeface="Open Sauce"/>
-              </a:rPr>
-              <a:t> </a:t>
-            </a:r>
-            <a:r>
-              <a:rPr lang="en-US" sz="2799" strike="noStrike" u="none">
-                <a:solidFill>
-                  <a:srgbClr val="000000"/>
-                </a:solidFill>
-                <a:latin typeface="Open Sauce"/>
-                <a:ea typeface="Open Sauce"/>
-                <a:cs typeface="Open Sauce"/>
-                <a:sym typeface="Open Sauce"/>
-              </a:rPr>
-              <a:t>end-to-e</a:t>
-            </a:r>
-            <a:r>
-              <a:rPr lang="en-US" sz="2799" strike="noStrike" u="none">
-                <a:solidFill>
-                  <a:srgbClr val="000000"/>
-                </a:solidFill>
-                <a:latin typeface="Open Sauce"/>
-                <a:ea typeface="Open Sauce"/>
-                <a:cs typeface="Open Sauce"/>
-                <a:sym typeface="Open Sauce"/>
-              </a:rPr>
-              <a:t>nd </a:t>
-            </a:r>
-            <a:r>
-              <a:rPr lang="en-US" sz="2799" strike="noStrike" u="none">
-                <a:solidFill>
-                  <a:srgbClr val="000000"/>
-                </a:solidFill>
-                <a:latin typeface="Open Sauce"/>
-                <a:ea typeface="Open Sauce"/>
-                <a:cs typeface="Open Sauce"/>
-                <a:sym typeface="Open Sauce"/>
-              </a:rPr>
-              <a:t>ma</a:t>
-            </a:r>
-            <a:r>
-              <a:rPr lang="en-US" sz="2799" strike="noStrike" u="none">
-                <a:solidFill>
-                  <a:srgbClr val="000000"/>
-                </a:solidFill>
-                <a:latin typeface="Open Sauce"/>
-                <a:ea typeface="Open Sauce"/>
-                <a:cs typeface="Open Sauce"/>
-                <a:sym typeface="Open Sauce"/>
-              </a:rPr>
-              <a:t>r</a:t>
-            </a:r>
-            <a:r>
-              <a:rPr lang="en-US" sz="2799" strike="noStrike" u="none">
-                <a:solidFill>
-                  <a:srgbClr val="000000"/>
-                </a:solidFill>
-                <a:latin typeface="Open Sauce"/>
-                <a:ea typeface="Open Sauce"/>
-                <a:cs typeface="Open Sauce"/>
-                <a:sym typeface="Open Sauce"/>
-              </a:rPr>
-              <a:t>ket</a:t>
-            </a:r>
-            <a:r>
-              <a:rPr lang="en-US" sz="2799" strike="noStrike" u="none">
-                <a:solidFill>
-                  <a:srgbClr val="000000"/>
-                </a:solidFill>
-                <a:latin typeface="Open Sauce"/>
-                <a:ea typeface="Open Sauce"/>
-                <a:cs typeface="Open Sauce"/>
-                <a:sym typeface="Open Sauce"/>
-              </a:rPr>
-              <a:t>ing </a:t>
-            </a:r>
-            <a:r>
-              <a:rPr lang="en-US" sz="2799" strike="noStrike" u="none">
-                <a:solidFill>
-                  <a:srgbClr val="000000"/>
-                </a:solidFill>
-                <a:latin typeface="Open Sauce"/>
-                <a:ea typeface="Open Sauce"/>
-                <a:cs typeface="Open Sauce"/>
-                <a:sym typeface="Open Sauce"/>
-              </a:rPr>
-              <a:t>part</a:t>
-            </a:r>
-            <a:r>
-              <a:rPr lang="en-US" sz="2799" strike="noStrike" u="none">
-                <a:solidFill>
-                  <a:srgbClr val="000000"/>
-                </a:solidFill>
-                <a:latin typeface="Open Sauce"/>
-                <a:ea typeface="Open Sauce"/>
-                <a:cs typeface="Open Sauce"/>
-                <a:sym typeface="Open Sauce"/>
-              </a:rPr>
-              <a:t>ner</a:t>
-            </a:r>
-          </a:p>
+          <a:p/>
         </p:txBody>
       </p:sp>
       <p:sp>
@@ -8383,30 +6115,7 @@
             <a:spAutoFit/>
           </a:bodyPr>
           <a:lstStyle/>
-          <a:p>
-            <a:pPr algn="l" marL="0" indent="0" lvl="0">
-              <a:lnSpc>
-                <a:spcPts val="2239"/>
-              </a:lnSpc>
-              <a:spcBef>
-                <a:spcPct val="0"/>
-              </a:spcBef>
-            </a:pPr>
-            <a:r>
-              <a:rPr lang="en-US" sz="1599" spc="159" strike="noStrike" u="none">
-                <a:solidFill>
-                  <a:srgbClr val="000000">
-                    <a:alpha val="49804"/>
-                  </a:srgbClr>
-                </a:solidFill>
-                <a:latin typeface="Open Sauce"/>
-                <a:ea typeface="Open Sauce"/>
-                <a:cs typeface="Open Sauce"/>
-                <a:sym typeface="Open Sauce"/>
-              </a:rPr>
-              <a:t>STUDIO SHODWE</a:t>
-            </a:r>
-          </a:p>
+          <a:p/>
         </p:txBody>
       </p:sp>
       <p:sp>
@@ -8429,30 +6138,7 @@
             <a:spAutoFit/>
           </a:bodyPr>
           <a:lstStyle/>
-          <a:p>
-            <a:pPr algn="r" marL="0" indent="0" lvl="0">
-              <a:lnSpc>
-                <a:spcPts val="2239"/>
-              </a:lnSpc>
-              <a:spcBef>
-                <a:spcPct val="0"/>
-              </a:spcBef>
-            </a:pPr>
-            <a:r>
-              <a:rPr lang="en-US" sz="1599" spc="159">
-                <a:solidFill>
-                  <a:srgbClr val="000000">
-                    <a:alpha val="49804"/>
-                  </a:srgbClr>
-                </a:solidFill>
-                <a:latin typeface="Open Sauce"/>
-                <a:ea typeface="Open Sauce"/>
-                <a:cs typeface="Open Sauce"/>
-                <a:sym typeface="Open Sauce"/>
-              </a:rPr>
-              <a:t>4</a:t>
-            </a:r>
-          </a:p>
+          <a:p/>
         </p:txBody>
       </p:sp>
       <p:sp>
@@ -8475,205 +6161,7 @@
             <a:spAutoFit/>
           </a:bodyPr>
           <a:lstStyle/>
-          <a:p>
-            <a:pPr algn="ctr" marL="0" indent="0" lvl="0">
-              <a:lnSpc>
-                <a:spcPts val="4479"/>
-              </a:lnSpc>
-            </a:pPr>
-            <a:r>
-              <a:rPr lang="en-US" sz="2799">
-                <a:solidFill>
-                  <a:srgbClr val="000000"/>
-                </a:solidFill>
-                <a:latin typeface="Open Sauce"/>
-                <a:ea typeface="Open Sauce"/>
-                <a:cs typeface="Open Sauce"/>
-                <a:sym typeface="Open Sauce"/>
-              </a:rPr>
-              <a:t>We</a:t>
-            </a:r>
-            <a:r>
-              <a:rPr lang="en-US" sz="2799" strike="noStrike" u="none">
-                <a:solidFill>
-                  <a:srgbClr val="000000"/>
-                </a:solidFill>
-                <a:latin typeface="Open Sauce"/>
-                <a:ea typeface="Open Sauce"/>
-                <a:cs typeface="Open Sauce"/>
-                <a:sym typeface="Open Sauce"/>
-              </a:rPr>
-              <a:t> combine</a:t>
-            </a:r>
-            <a:r>
-              <a:rPr lang="en-US" sz="2799" strike="noStrike" u="none">
-                <a:solidFill>
-                  <a:srgbClr val="000000"/>
-                </a:solidFill>
-                <a:latin typeface="Open Sauce"/>
-                <a:ea typeface="Open Sauce"/>
-                <a:cs typeface="Open Sauce"/>
-                <a:sym typeface="Open Sauce"/>
-              </a:rPr>
-              <a:t> strat</a:t>
-            </a:r>
-            <a:r>
-              <a:rPr lang="en-US" sz="2799" strike="noStrike" u="none">
-                <a:solidFill>
-                  <a:srgbClr val="000000"/>
-                </a:solidFill>
-                <a:latin typeface="Open Sauce"/>
-                <a:ea typeface="Open Sauce"/>
-                <a:cs typeface="Open Sauce"/>
-                <a:sym typeface="Open Sauce"/>
-              </a:rPr>
-              <a:t>e</a:t>
-            </a:r>
-            <a:r>
-              <a:rPr lang="en-US" sz="2799" strike="noStrike" u="none">
-                <a:solidFill>
-                  <a:srgbClr val="000000"/>
-                </a:solidFill>
-                <a:latin typeface="Open Sauce"/>
-                <a:ea typeface="Open Sauce"/>
-                <a:cs typeface="Open Sauce"/>
-                <a:sym typeface="Open Sauce"/>
-              </a:rPr>
-              <a:t>gy</a:t>
-            </a:r>
-            <a:r>
-              <a:rPr lang="en-US" sz="2799" strike="noStrike" u="none">
-                <a:solidFill>
-                  <a:srgbClr val="000000"/>
-                </a:solidFill>
-                <a:latin typeface="Open Sauce"/>
-                <a:ea typeface="Open Sauce"/>
-                <a:cs typeface="Open Sauce"/>
-                <a:sym typeface="Open Sauce"/>
-              </a:rPr>
-              <a:t>, cre</a:t>
-            </a:r>
-            <a:r>
-              <a:rPr lang="en-US" sz="2799" strike="noStrike" u="none">
-                <a:solidFill>
-                  <a:srgbClr val="000000"/>
-                </a:solidFill>
-                <a:latin typeface="Open Sauce"/>
-                <a:ea typeface="Open Sauce"/>
-                <a:cs typeface="Open Sauce"/>
-                <a:sym typeface="Open Sauce"/>
-              </a:rPr>
-              <a:t>a</a:t>
-            </a:r>
-            <a:r>
-              <a:rPr lang="en-US" sz="2799" strike="noStrike" u="none">
-                <a:solidFill>
-                  <a:srgbClr val="000000"/>
-                </a:solidFill>
-                <a:latin typeface="Open Sauce"/>
-                <a:ea typeface="Open Sauce"/>
-                <a:cs typeface="Open Sauce"/>
-                <a:sym typeface="Open Sauce"/>
-              </a:rPr>
-              <a:t>t</a:t>
-            </a:r>
-            <a:r>
-              <a:rPr lang="en-US" sz="2799" strike="noStrike" u="none">
-                <a:solidFill>
-                  <a:srgbClr val="000000"/>
-                </a:solidFill>
-                <a:latin typeface="Open Sauce"/>
-                <a:ea typeface="Open Sauce"/>
-                <a:cs typeface="Open Sauce"/>
-                <a:sym typeface="Open Sauce"/>
-              </a:rPr>
-              <a:t>iv</a:t>
-            </a:r>
-            <a:r>
-              <a:rPr lang="en-US" sz="2799" strike="noStrike" u="none">
-                <a:solidFill>
-                  <a:srgbClr val="000000"/>
-                </a:solidFill>
-                <a:latin typeface="Open Sauce"/>
-                <a:ea typeface="Open Sauce"/>
-                <a:cs typeface="Open Sauce"/>
-                <a:sym typeface="Open Sauce"/>
-              </a:rPr>
-              <a:t>e</a:t>
-            </a:r>
-            <a:r>
-              <a:rPr lang="en-US" sz="2799" strike="noStrike" u="none">
-                <a:solidFill>
-                  <a:srgbClr val="000000"/>
-                </a:solidFill>
-                <a:latin typeface="Open Sauce"/>
-                <a:ea typeface="Open Sauce"/>
-                <a:cs typeface="Open Sauce"/>
-                <a:sym typeface="Open Sauce"/>
-              </a:rPr>
-              <a:t>, a</a:t>
-            </a:r>
-            <a:r>
-              <a:rPr lang="en-US" sz="2799" strike="noStrike" u="none">
-                <a:solidFill>
-                  <a:srgbClr val="000000"/>
-                </a:solidFill>
-                <a:latin typeface="Open Sauce"/>
-                <a:ea typeface="Open Sauce"/>
-                <a:cs typeface="Open Sauce"/>
-                <a:sym typeface="Open Sauce"/>
-              </a:rPr>
-              <a:t>nd ana</a:t>
-            </a:r>
-            <a:r>
-              <a:rPr lang="en-US" sz="2799" strike="noStrike" u="none">
-                <a:solidFill>
-                  <a:srgbClr val="000000"/>
-                </a:solidFill>
-                <a:latin typeface="Open Sauce"/>
-                <a:ea typeface="Open Sauce"/>
-                <a:cs typeface="Open Sauce"/>
-                <a:sym typeface="Open Sauce"/>
-              </a:rPr>
-              <a:t>ly</a:t>
-            </a:r>
-            <a:r>
-              <a:rPr lang="en-US" sz="2799" strike="noStrike" u="none">
-                <a:solidFill>
-                  <a:srgbClr val="000000"/>
-                </a:solidFill>
-                <a:latin typeface="Open Sauce"/>
-                <a:ea typeface="Open Sauce"/>
-                <a:cs typeface="Open Sauce"/>
-                <a:sym typeface="Open Sauce"/>
-              </a:rPr>
-              <a:t>tics t</a:t>
-            </a:r>
-            <a:r>
-              <a:rPr lang="en-US" sz="2799" strike="noStrike" u="none">
-                <a:solidFill>
-                  <a:srgbClr val="000000"/>
-                </a:solidFill>
-                <a:latin typeface="Open Sauce"/>
-                <a:ea typeface="Open Sauce"/>
-                <a:cs typeface="Open Sauce"/>
-                <a:sym typeface="Open Sauce"/>
-              </a:rPr>
-              <a:t>o driv</a:t>
-            </a:r>
-            <a:r>
-              <a:rPr lang="en-US" sz="2799" strike="noStrike" u="none">
-                <a:solidFill>
-                  <a:srgbClr val="000000"/>
-                </a:solidFill>
-                <a:latin typeface="Open Sauce"/>
-                <a:ea typeface="Open Sauce"/>
-                <a:cs typeface="Open Sauce"/>
-                <a:sym typeface="Open Sauce"/>
-              </a:rPr>
-              <a:t>e real growth</a:t>
-            </a:r>
-          </a:p>
+          <a:p/>
         </p:txBody>
       </p:sp>
       <p:sp>
@@ -8696,109 +6184,7 @@
             <a:spAutoFit/>
           </a:bodyPr>
           <a:lstStyle/>
-          <a:p>
-            <a:pPr algn="ctr" marL="0" indent="0" lvl="0">
-              <a:lnSpc>
-                <a:spcPts val="4479"/>
-              </a:lnSpc>
-            </a:pPr>
-            <a:r>
-              <a:rPr lang="en-US" sz="2799">
-                <a:solidFill>
-                  <a:srgbClr val="000000"/>
-                </a:solidFill>
-                <a:latin typeface="Open Sauce"/>
-                <a:ea typeface="Open Sauce"/>
-                <a:cs typeface="Open Sauce"/>
-                <a:sym typeface="Open Sauce"/>
-              </a:rPr>
-              <a:t>Fu</a:t>
-            </a:r>
-            <a:r>
-              <a:rPr lang="en-US" sz="2799" strike="noStrike" u="none">
-                <a:solidFill>
-                  <a:srgbClr val="000000"/>
-                </a:solidFill>
-                <a:latin typeface="Open Sauce"/>
-                <a:ea typeface="Open Sauce"/>
-                <a:cs typeface="Open Sauce"/>
-                <a:sym typeface="Open Sauce"/>
-              </a:rPr>
-              <a:t>lly man</a:t>
-            </a:r>
-            <a:r>
-              <a:rPr lang="en-US" sz="2799" strike="noStrike" u="none">
-                <a:solidFill>
-                  <a:srgbClr val="000000"/>
-                </a:solidFill>
-                <a:latin typeface="Open Sauce"/>
-                <a:ea typeface="Open Sauce"/>
-                <a:cs typeface="Open Sauce"/>
-                <a:sym typeface="Open Sauce"/>
-              </a:rPr>
-              <a:t>ag</a:t>
-            </a:r>
-            <a:r>
-              <a:rPr lang="en-US" sz="2799" strike="noStrike" u="none">
-                <a:solidFill>
-                  <a:srgbClr val="000000"/>
-                </a:solidFill>
-                <a:latin typeface="Open Sauce"/>
-                <a:ea typeface="Open Sauce"/>
-                <a:cs typeface="Open Sauce"/>
-                <a:sym typeface="Open Sauce"/>
-              </a:rPr>
-              <a:t>ed services or sup</a:t>
-            </a:r>
-            <a:r>
-              <a:rPr lang="en-US" sz="2799" strike="noStrike" u="none">
-                <a:solidFill>
-                  <a:srgbClr val="000000"/>
-                </a:solidFill>
-                <a:latin typeface="Open Sauce"/>
-                <a:ea typeface="Open Sauce"/>
-                <a:cs typeface="Open Sauce"/>
-                <a:sym typeface="Open Sauce"/>
-              </a:rPr>
-              <a:t>po</a:t>
-            </a:r>
-            <a:r>
-              <a:rPr lang="en-US" sz="2799" strike="noStrike" u="none">
-                <a:solidFill>
-                  <a:srgbClr val="000000"/>
-                </a:solidFill>
-                <a:latin typeface="Open Sauce"/>
-                <a:ea typeface="Open Sauce"/>
-                <a:cs typeface="Open Sauce"/>
-                <a:sym typeface="Open Sauce"/>
-              </a:rPr>
-              <a:t>rt</a:t>
-            </a:r>
-            <a:r>
-              <a:rPr lang="en-US" sz="2799" strike="noStrike" u="none">
-                <a:solidFill>
-                  <a:srgbClr val="000000"/>
-                </a:solidFill>
-                <a:latin typeface="Open Sauce"/>
-                <a:ea typeface="Open Sauce"/>
-                <a:cs typeface="Open Sauce"/>
-                <a:sym typeface="Open Sauce"/>
-              </a:rPr>
-              <a:t> for i</a:t>
-            </a:r>
-            <a:r>
-              <a:rPr lang="en-US" sz="2799" strike="noStrike" u="none">
-                <a:solidFill>
-                  <a:srgbClr val="000000"/>
-                </a:solidFill>
-                <a:latin typeface="Open Sauce"/>
-                <a:ea typeface="Open Sauce"/>
-                <a:cs typeface="Open Sauce"/>
-                <a:sym typeface="Open Sauce"/>
-              </a:rPr>
-              <a:t>n-house teams</a:t>
-            </a:r>
-          </a:p>
+          <a:p/>
         </p:txBody>
       </p:sp>
       <p:sp>
@@ -8852,6 +6238,10 @@
             </a:stretch>
           </a:blipFill>
         </p:spPr>
+        <p:txBody>
+          <a:bodyPr/>
+          <a:p/>
+        </p:txBody>
       </p:sp>
     </p:spTree>
   </p:cSld>
@@ -8930,6 +6320,10 @@
             <a:miter/>
           </a:ln>
         </p:spPr>
+        <p:txBody>
+          <a:bodyPr/>
+          <a:p/>
+        </p:txBody>
       </p:sp>
       <p:sp>
         <p:nvSpPr>
@@ -8954,6 +6348,10 @@
             <a:tailEnd type="none" len="sm" w="sm"/>
           </a:ln>
         </p:spPr>
+        <p:txBody>
+          <a:bodyPr/>
+          <a:p/>
+        </p:txBody>
       </p:sp>
       <p:sp>
         <p:nvSpPr>
@@ -9000,6 +6398,10 @@
             </a:stretch>
           </a:blipFill>
         </p:spPr>
+        <p:txBody>
+          <a:bodyPr/>
+          <a:p/>
+        </p:txBody>
       </p:sp>
       <p:sp>
         <p:nvSpPr>
@@ -9021,25 +6423,7 @@
             <a:spAutoFit/>
           </a:bodyPr>
           <a:lstStyle/>
-          <a:p>
-            <a:pPr algn="l">
-              <a:lnSpc>
-                <a:spcPts val="8959"/>
-              </a:lnSpc>
-            </a:pPr>
-            <a:r>
-              <a:rPr lang="en-US" sz="6399">
-                <a:solidFill>
-                  <a:srgbClr val="000000"/>
-                </a:solidFill>
-                <a:latin typeface="DM Serif Display"/>
-                <a:ea typeface="DM Serif Display"/>
-                <a:cs typeface="DM Serif Display"/>
-                <a:sym typeface="DM Serif Display"/>
-              </a:rPr>
-              <a:t>Why Now?</a:t>
-            </a:r>
-          </a:p>
+          <a:p/>
         </p:txBody>
       </p:sp>
       <p:sp>
@@ -9062,30 +6446,7 @@
             <a:spAutoFit/>
           </a:bodyPr>
           <a:lstStyle/>
-          <a:p>
-            <a:pPr algn="l" marL="0" indent="0" lvl="0">
-              <a:lnSpc>
-                <a:spcPts val="2239"/>
-              </a:lnSpc>
-              <a:spcBef>
-                <a:spcPct val="0"/>
-              </a:spcBef>
-            </a:pPr>
-            <a:r>
-              <a:rPr lang="en-US" sz="1599" spc="159" strike="noStrike" u="none">
-                <a:solidFill>
-                  <a:srgbClr val="000000">
-                    <a:alpha val="49804"/>
-                  </a:srgbClr>
-                </a:solidFill>
-                <a:latin typeface="Open Sauce"/>
-                <a:ea typeface="Open Sauce"/>
-                <a:cs typeface="Open Sauce"/>
-                <a:sym typeface="Open Sauce"/>
-              </a:rPr>
-              <a:t>STUDIO SHODWE</a:t>
-            </a:r>
-          </a:p>
+          <a:p/>
         </p:txBody>
       </p:sp>
       <p:sp>
@@ -9108,30 +6469,7 @@
             <a:spAutoFit/>
           </a:bodyPr>
           <a:lstStyle/>
-          <a:p>
-            <a:pPr algn="r" marL="0" indent="0" lvl="0">
-              <a:lnSpc>
-                <a:spcPts val="2239"/>
-              </a:lnSpc>
-              <a:spcBef>
-                <a:spcPct val="0"/>
-              </a:spcBef>
-            </a:pPr>
-            <a:r>
-              <a:rPr lang="en-US" sz="1599" spc="159">
-                <a:solidFill>
-                  <a:srgbClr val="000000">
-                    <a:alpha val="49804"/>
-                  </a:srgbClr>
-                </a:solidFill>
-                <a:latin typeface="Open Sauce"/>
-                <a:ea typeface="Open Sauce"/>
-                <a:cs typeface="Open Sauce"/>
-                <a:sym typeface="Open Sauce"/>
-              </a:rPr>
-              <a:t>5</a:t>
-            </a:r>
-          </a:p>
+          <a:p/>
         </p:txBody>
       </p:sp>
       <p:sp>
@@ -9154,393 +6492,7 @@
             <a:spAutoFit/>
           </a:bodyPr>
           <a:lstStyle/>
-          <a:p>
-            <a:pPr algn="l" marL="604519" indent="-302260" lvl="1">
-              <a:lnSpc>
-                <a:spcPts val="4479"/>
-              </a:lnSpc>
-              <a:buFont typeface="Arial"/>
-              <a:buChar char="•"/>
-            </a:pPr>
-            <a:r>
-              <a:rPr lang="en-US" sz="2799">
-                <a:solidFill>
-                  <a:srgbClr val="000000"/>
-                </a:solidFill>
-                <a:latin typeface="Open Sauce"/>
-                <a:ea typeface="Open Sauce"/>
-                <a:cs typeface="Open Sauce"/>
-                <a:sym typeface="Open Sauce"/>
-              </a:rPr>
-              <a:t>Ris</a:t>
-            </a:r>
-            <a:r>
-              <a:rPr lang="en-US" sz="2799" strike="noStrike" u="none">
-                <a:solidFill>
-                  <a:srgbClr val="000000"/>
-                </a:solidFill>
-                <a:latin typeface="Open Sauce"/>
-                <a:ea typeface="Open Sauce"/>
-                <a:cs typeface="Open Sauce"/>
-                <a:sym typeface="Open Sauce"/>
-              </a:rPr>
-              <a:t>ing cost of</a:t>
-            </a:r>
-            <a:r>
-              <a:rPr lang="en-US" sz="2799" strike="noStrike" u="none">
-                <a:solidFill>
-                  <a:srgbClr val="000000"/>
-                </a:solidFill>
-                <a:latin typeface="Open Sauce"/>
-                <a:ea typeface="Open Sauce"/>
-                <a:cs typeface="Open Sauce"/>
-                <a:sym typeface="Open Sauce"/>
-              </a:rPr>
-              <a:t> digi</a:t>
-            </a:r>
-            <a:r>
-              <a:rPr lang="en-US" sz="2799" strike="noStrike" u="none">
-                <a:solidFill>
-                  <a:srgbClr val="000000"/>
-                </a:solidFill>
-                <a:latin typeface="Open Sauce"/>
-                <a:ea typeface="Open Sauce"/>
-                <a:cs typeface="Open Sauce"/>
-                <a:sym typeface="Open Sauce"/>
-              </a:rPr>
-              <a:t>t</a:t>
-            </a:r>
-            <a:r>
-              <a:rPr lang="en-US" sz="2799" strike="noStrike" u="none">
-                <a:solidFill>
-                  <a:srgbClr val="000000"/>
-                </a:solidFill>
-                <a:latin typeface="Open Sauce"/>
-                <a:ea typeface="Open Sauce"/>
-                <a:cs typeface="Open Sauce"/>
-                <a:sym typeface="Open Sauce"/>
-              </a:rPr>
-              <a:t>al ads and comp</a:t>
-            </a:r>
-            <a:r>
-              <a:rPr lang="en-US" sz="2799" strike="noStrike" u="none">
-                <a:solidFill>
-                  <a:srgbClr val="000000"/>
-                </a:solidFill>
-                <a:latin typeface="Open Sauce"/>
-                <a:ea typeface="Open Sauce"/>
-                <a:cs typeface="Open Sauce"/>
-                <a:sym typeface="Open Sauce"/>
-              </a:rPr>
-              <a:t>e</a:t>
-            </a:r>
-            <a:r>
-              <a:rPr lang="en-US" sz="2799" strike="noStrike" u="none">
-                <a:solidFill>
-                  <a:srgbClr val="000000"/>
-                </a:solidFill>
-                <a:latin typeface="Open Sauce"/>
-                <a:ea typeface="Open Sauce"/>
-                <a:cs typeface="Open Sauce"/>
-                <a:sym typeface="Open Sauce"/>
-              </a:rPr>
-              <a:t>titio</a:t>
-            </a:r>
-            <a:r>
-              <a:rPr lang="en-US" sz="2799" strike="noStrike" u="none">
-                <a:solidFill>
-                  <a:srgbClr val="000000"/>
-                </a:solidFill>
-                <a:latin typeface="Open Sauce"/>
-                <a:ea typeface="Open Sauce"/>
-                <a:cs typeface="Open Sauce"/>
-                <a:sym typeface="Open Sauce"/>
-              </a:rPr>
-              <a:t>n</a:t>
-            </a:r>
-          </a:p>
-          <a:p>
-            <a:pPr algn="l" marL="604519" indent="-302260" lvl="1">
-              <a:lnSpc>
-                <a:spcPts val="4479"/>
-              </a:lnSpc>
-              <a:buFont typeface="Arial"/>
-              <a:buChar char="•"/>
-            </a:pPr>
-            <a:r>
-              <a:rPr lang="en-US" sz="2799" strike="noStrike" u="none">
-                <a:solidFill>
-                  <a:srgbClr val="000000"/>
-                </a:solidFill>
-                <a:latin typeface="Open Sauce"/>
-                <a:ea typeface="Open Sauce"/>
-                <a:cs typeface="Open Sauce"/>
-                <a:sym typeface="Open Sauce"/>
-              </a:rPr>
-              <a:t>Algorithm and platform c</a:t>
-            </a:r>
-            <a:r>
-              <a:rPr lang="en-US" sz="2799" strike="noStrike" u="none">
-                <a:solidFill>
-                  <a:srgbClr val="000000"/>
-                </a:solidFill>
-                <a:latin typeface="Open Sauce"/>
-                <a:ea typeface="Open Sauce"/>
-                <a:cs typeface="Open Sauce"/>
-                <a:sym typeface="Open Sauce"/>
-              </a:rPr>
-              <a:t>ha</a:t>
-            </a:r>
-            <a:r>
-              <a:rPr lang="en-US" sz="2799" strike="noStrike" u="none">
-                <a:solidFill>
-                  <a:srgbClr val="000000"/>
-                </a:solidFill>
-                <a:latin typeface="Open Sauce"/>
-                <a:ea typeface="Open Sauce"/>
-                <a:cs typeface="Open Sauce"/>
-                <a:sym typeface="Open Sauce"/>
-              </a:rPr>
-              <a:t>n</a:t>
-            </a:r>
-            <a:r>
-              <a:rPr lang="en-US" sz="2799" strike="noStrike" u="none">
-                <a:solidFill>
-                  <a:srgbClr val="000000"/>
-                </a:solidFill>
-                <a:latin typeface="Open Sauce"/>
-                <a:ea typeface="Open Sauce"/>
-                <a:cs typeface="Open Sauce"/>
-                <a:sym typeface="Open Sauce"/>
-              </a:rPr>
-              <a:t>ge</a:t>
-            </a:r>
-            <a:r>
-              <a:rPr lang="en-US" sz="2799" strike="noStrike" u="none">
-                <a:solidFill>
-                  <a:srgbClr val="000000"/>
-                </a:solidFill>
-                <a:latin typeface="Open Sauce"/>
-                <a:ea typeface="Open Sauce"/>
-                <a:cs typeface="Open Sauce"/>
-                <a:sym typeface="Open Sauce"/>
-              </a:rPr>
-              <a:t>s requi</a:t>
-            </a:r>
-            <a:r>
-              <a:rPr lang="en-US" sz="2799" strike="noStrike" u="none">
-                <a:solidFill>
-                  <a:srgbClr val="000000"/>
-                </a:solidFill>
-                <a:latin typeface="Open Sauce"/>
-                <a:ea typeface="Open Sauce"/>
-                <a:cs typeface="Open Sauce"/>
-                <a:sym typeface="Open Sauce"/>
-              </a:rPr>
-              <a:t>re con</a:t>
-            </a:r>
-            <a:r>
-              <a:rPr lang="en-US" sz="2799" strike="noStrike" u="none">
-                <a:solidFill>
-                  <a:srgbClr val="000000"/>
-                </a:solidFill>
-                <a:latin typeface="Open Sauce"/>
-                <a:ea typeface="Open Sauce"/>
-                <a:cs typeface="Open Sauce"/>
-                <a:sym typeface="Open Sauce"/>
-              </a:rPr>
-              <a:t>st</a:t>
-            </a:r>
-            <a:r>
-              <a:rPr lang="en-US" sz="2799" strike="noStrike" u="none">
-                <a:solidFill>
-                  <a:srgbClr val="000000"/>
-                </a:solidFill>
-                <a:latin typeface="Open Sauce"/>
-                <a:ea typeface="Open Sauce"/>
-                <a:cs typeface="Open Sauce"/>
-                <a:sym typeface="Open Sauce"/>
-              </a:rPr>
-              <a:t>a</a:t>
-            </a:r>
-            <a:r>
-              <a:rPr lang="en-US" sz="2799" strike="noStrike" u="none">
-                <a:solidFill>
-                  <a:srgbClr val="000000"/>
-                </a:solidFill>
-                <a:latin typeface="Open Sauce"/>
-                <a:ea typeface="Open Sauce"/>
-                <a:cs typeface="Open Sauce"/>
-                <a:sym typeface="Open Sauce"/>
-              </a:rPr>
-              <a:t>nt </a:t>
-            </a:r>
-            <a:r>
-              <a:rPr lang="en-US" sz="2799" strike="noStrike" u="none">
-                <a:solidFill>
-                  <a:srgbClr val="000000"/>
-                </a:solidFill>
-                <a:latin typeface="Open Sauce"/>
-                <a:ea typeface="Open Sauce"/>
-                <a:cs typeface="Open Sauce"/>
-                <a:sym typeface="Open Sauce"/>
-              </a:rPr>
-              <a:t>adaptati</a:t>
-            </a:r>
-            <a:r>
-              <a:rPr lang="en-US" sz="2799" strike="noStrike" u="none">
-                <a:solidFill>
-                  <a:srgbClr val="000000"/>
-                </a:solidFill>
-                <a:latin typeface="Open Sauce"/>
-                <a:ea typeface="Open Sauce"/>
-                <a:cs typeface="Open Sauce"/>
-                <a:sym typeface="Open Sauce"/>
-              </a:rPr>
-              <a:t>o</a:t>
-            </a:r>
-            <a:r>
-              <a:rPr lang="en-US" sz="2799" strike="noStrike" u="none">
-                <a:solidFill>
-                  <a:srgbClr val="000000"/>
-                </a:solidFill>
-                <a:latin typeface="Open Sauce"/>
-                <a:ea typeface="Open Sauce"/>
-                <a:cs typeface="Open Sauce"/>
-                <a:sym typeface="Open Sauce"/>
-              </a:rPr>
-              <a:t>n</a:t>
-            </a:r>
-          </a:p>
-          <a:p>
-            <a:pPr algn="l" marL="604519" indent="-302260" lvl="1">
-              <a:lnSpc>
-                <a:spcPts val="4479"/>
-              </a:lnSpc>
-              <a:buFont typeface="Arial"/>
-              <a:buChar char="•"/>
-            </a:pPr>
-            <a:r>
-              <a:rPr lang="en-US" sz="2799" strike="noStrike" u="none">
-                <a:solidFill>
-                  <a:srgbClr val="000000"/>
-                </a:solidFill>
-                <a:latin typeface="Open Sauce"/>
-                <a:ea typeface="Open Sauce"/>
-                <a:cs typeface="Open Sauce"/>
-                <a:sym typeface="Open Sauce"/>
-              </a:rPr>
-              <a:t>B</a:t>
-            </a:r>
-            <a:r>
-              <a:rPr lang="en-US" sz="2799" strike="noStrike" u="none">
-                <a:solidFill>
-                  <a:srgbClr val="000000"/>
-                </a:solidFill>
-                <a:latin typeface="Open Sauce"/>
-                <a:ea typeface="Open Sauce"/>
-                <a:cs typeface="Open Sauce"/>
-                <a:sym typeface="Open Sauce"/>
-              </a:rPr>
-              <a:t>uyers expect</a:t>
-            </a:r>
-            <a:r>
-              <a:rPr lang="en-US" sz="2799" strike="noStrike" u="none">
-                <a:solidFill>
-                  <a:srgbClr val="000000"/>
-                </a:solidFill>
-                <a:latin typeface="Open Sauce"/>
-                <a:ea typeface="Open Sauce"/>
-                <a:cs typeface="Open Sauce"/>
-                <a:sym typeface="Open Sauce"/>
-              </a:rPr>
-              <a:t> </a:t>
-            </a:r>
-            <a:r>
-              <a:rPr lang="en-US" sz="2799" strike="noStrike" u="none">
-                <a:solidFill>
-                  <a:srgbClr val="000000"/>
-                </a:solidFill>
-                <a:latin typeface="Open Sauce"/>
-                <a:ea typeface="Open Sauce"/>
-                <a:cs typeface="Open Sauce"/>
-                <a:sym typeface="Open Sauce"/>
-              </a:rPr>
-              <a:t>a</a:t>
-            </a:r>
-            <a:r>
-              <a:rPr lang="en-US" sz="2799" strike="noStrike" u="none">
-                <a:solidFill>
-                  <a:srgbClr val="000000"/>
-                </a:solidFill>
-                <a:latin typeface="Open Sauce"/>
-                <a:ea typeface="Open Sauce"/>
-                <a:cs typeface="Open Sauce"/>
-                <a:sym typeface="Open Sauce"/>
-              </a:rPr>
-              <a:t>u</a:t>
-            </a:r>
-            <a:r>
-              <a:rPr lang="en-US" sz="2799" strike="noStrike" u="none">
-                <a:solidFill>
-                  <a:srgbClr val="000000"/>
-                </a:solidFill>
-                <a:latin typeface="Open Sauce"/>
-                <a:ea typeface="Open Sauce"/>
-                <a:cs typeface="Open Sauce"/>
-                <a:sym typeface="Open Sauce"/>
-              </a:rPr>
-              <a:t>t</a:t>
-            </a:r>
-            <a:r>
-              <a:rPr lang="en-US" sz="2799" strike="noStrike" u="none">
-                <a:solidFill>
-                  <a:srgbClr val="000000"/>
-                </a:solidFill>
-                <a:latin typeface="Open Sauce"/>
-                <a:ea typeface="Open Sauce"/>
-                <a:cs typeface="Open Sauce"/>
-                <a:sym typeface="Open Sauce"/>
-              </a:rPr>
-              <a:t>h</a:t>
-            </a:r>
-            <a:r>
-              <a:rPr lang="en-US" sz="2799" strike="noStrike" u="none">
-                <a:solidFill>
-                  <a:srgbClr val="000000"/>
-                </a:solidFill>
-                <a:latin typeface="Open Sauce"/>
-                <a:ea typeface="Open Sauce"/>
-                <a:cs typeface="Open Sauce"/>
-                <a:sym typeface="Open Sauce"/>
-              </a:rPr>
-              <a:t>entic, consistent content across a</a:t>
-            </a:r>
-            <a:r>
-              <a:rPr lang="en-US" sz="2799" strike="noStrike" u="none">
-                <a:solidFill>
-                  <a:srgbClr val="000000"/>
-                </a:solidFill>
-                <a:latin typeface="Open Sauce"/>
-                <a:ea typeface="Open Sauce"/>
-                <a:cs typeface="Open Sauce"/>
-                <a:sym typeface="Open Sauce"/>
-              </a:rPr>
-              <a:t>ll chann</a:t>
-            </a:r>
-            <a:r>
-              <a:rPr lang="en-US" sz="2799" strike="noStrike" u="none">
-                <a:solidFill>
-                  <a:srgbClr val="000000"/>
-                </a:solidFill>
-                <a:latin typeface="Open Sauce"/>
-                <a:ea typeface="Open Sauce"/>
-                <a:cs typeface="Open Sauce"/>
-                <a:sym typeface="Open Sauce"/>
-              </a:rPr>
-              <a:t>els</a:t>
-            </a:r>
-          </a:p>
+          <a:p/>
         </p:txBody>
       </p:sp>
     </p:spTree>
@@ -9620,6 +6572,10 @@
             <a:miter/>
           </a:ln>
         </p:spPr>
+        <p:txBody>
+          <a:bodyPr/>
+          <a:p/>
+        </p:txBody>
       </p:sp>
       <p:sp>
         <p:nvSpPr>
@@ -9644,6 +6600,10 @@
             <a:tailEnd type="none" len="sm" w="sm"/>
           </a:ln>
         </p:spPr>
+        <p:txBody>
+          <a:bodyPr/>
+          <a:p/>
+        </p:txBody>
       </p:sp>
       <p:sp>
         <p:nvSpPr>
@@ -9665,25 +6625,7 @@
             <a:spAutoFit/>
           </a:bodyPr>
           <a:lstStyle/>
-          <a:p>
-            <a:pPr algn="l">
-              <a:lnSpc>
-                <a:spcPts val="8959"/>
-              </a:lnSpc>
-            </a:pPr>
-            <a:r>
-              <a:rPr lang="en-US" sz="6399">
-                <a:solidFill>
-                  <a:srgbClr val="000000"/>
-                </a:solidFill>
-                <a:latin typeface="DM Serif Display"/>
-                <a:ea typeface="DM Serif Display"/>
-                <a:cs typeface="DM Serif Display"/>
-                <a:sym typeface="DM Serif Display"/>
-              </a:rPr>
-              <a:t>Services Overview</a:t>
-            </a:r>
-          </a:p>
+          <a:p/>
         </p:txBody>
       </p:sp>
       <p:sp>
@@ -9706,30 +6648,7 @@
             <a:spAutoFit/>
           </a:bodyPr>
           <a:lstStyle/>
-          <a:p>
-            <a:pPr algn="l" marL="0" indent="0" lvl="0">
-              <a:lnSpc>
-                <a:spcPts val="2239"/>
-              </a:lnSpc>
-              <a:spcBef>
-                <a:spcPct val="0"/>
-              </a:spcBef>
-            </a:pPr>
-            <a:r>
-              <a:rPr lang="en-US" sz="1599" spc="159" strike="noStrike" u="none">
-                <a:solidFill>
-                  <a:srgbClr val="000000">
-                    <a:alpha val="49804"/>
-                  </a:srgbClr>
-                </a:solidFill>
-                <a:latin typeface="Open Sauce"/>
-                <a:ea typeface="Open Sauce"/>
-                <a:cs typeface="Open Sauce"/>
-                <a:sym typeface="Open Sauce"/>
-              </a:rPr>
-              <a:t>STUDIO SHODWE</a:t>
-            </a:r>
-          </a:p>
+          <a:p/>
         </p:txBody>
       </p:sp>
       <p:sp>
@@ -9752,30 +6671,7 @@
             <a:spAutoFit/>
           </a:bodyPr>
           <a:lstStyle/>
-          <a:p>
-            <a:pPr algn="r" marL="0" indent="0" lvl="0">
-              <a:lnSpc>
-                <a:spcPts val="2239"/>
-              </a:lnSpc>
-              <a:spcBef>
-                <a:spcPct val="0"/>
-              </a:spcBef>
-            </a:pPr>
-            <a:r>
-              <a:rPr lang="en-US" sz="1599" spc="159">
-                <a:solidFill>
-                  <a:srgbClr val="000000">
-                    <a:alpha val="49804"/>
-                  </a:srgbClr>
-                </a:solidFill>
-                <a:latin typeface="Open Sauce"/>
-                <a:ea typeface="Open Sauce"/>
-                <a:cs typeface="Open Sauce"/>
-                <a:sym typeface="Open Sauce"/>
-              </a:rPr>
-              <a:t>6</a:t>
-            </a:r>
-          </a:p>
+          <a:p/>
         </p:txBody>
       </p:sp>
       <p:grpSp>
@@ -9914,28 +6810,7 @@
             <a:spAutoFit/>
           </a:bodyPr>
           <a:lstStyle/>
-          <a:p>
-            <a:pPr algn="ctr" marL="0" indent="0" lvl="0">
-              <a:lnSpc>
-                <a:spcPts val="4479"/>
-              </a:lnSpc>
-              <a:spcBef>
-                <a:spcPct val="0"/>
-              </a:spcBef>
-            </a:pPr>
-            <a:r>
-              <a:rPr lang="en-US" sz="2799" strike="noStrike" u="none">
-                <a:solidFill>
-                  <a:srgbClr val="000000"/>
-                </a:solidFill>
-                <a:latin typeface="Open Sauce"/>
-                <a:ea typeface="Open Sauce"/>
-                <a:cs typeface="Open Sauce"/>
-                <a:sym typeface="Open Sauce"/>
-              </a:rPr>
-              <a:t>Marketing Strategy &amp; Planning</a:t>
-            </a:r>
-          </a:p>
+          <a:p/>
         </p:txBody>
       </p:sp>
       <p:grpSp>
@@ -10074,160 +6949,7 @@
             <a:spAutoFit/>
           </a:bodyPr>
           <a:lstStyle/>
-          <a:p>
-            <a:pPr algn="ctr" marL="0" indent="0" lvl="0">
-              <a:lnSpc>
-                <a:spcPts val="4479"/>
-              </a:lnSpc>
-              <a:spcBef>
-                <a:spcPct val="0"/>
-              </a:spcBef>
-            </a:pPr>
-            <a:r>
-              <a:rPr lang="en-US" sz="2799">
-                <a:solidFill>
-                  <a:srgbClr val="000000"/>
-                </a:solidFill>
-                <a:latin typeface="Open Sauce"/>
-                <a:ea typeface="Open Sauce"/>
-                <a:cs typeface="Open Sauce"/>
-                <a:sym typeface="Open Sauce"/>
-              </a:rPr>
-              <a:t>An</a:t>
-            </a:r>
-            <a:r>
-              <a:rPr lang="en-US" sz="2799" strike="noStrike" u="none">
-                <a:solidFill>
-                  <a:srgbClr val="000000"/>
-                </a:solidFill>
-                <a:latin typeface="Open Sauce"/>
-                <a:ea typeface="Open Sauce"/>
-                <a:cs typeface="Open Sauce"/>
-                <a:sym typeface="Open Sauce"/>
-              </a:rPr>
-              <a:t>al</a:t>
-            </a:r>
-            <a:r>
-              <a:rPr lang="en-US" sz="2799" strike="noStrike" u="none">
-                <a:solidFill>
-                  <a:srgbClr val="000000"/>
-                </a:solidFill>
-                <a:latin typeface="Open Sauce"/>
-                <a:ea typeface="Open Sauce"/>
-                <a:cs typeface="Open Sauce"/>
-                <a:sym typeface="Open Sauce"/>
-              </a:rPr>
-              <a:t>yt</a:t>
-            </a:r>
-            <a:r>
-              <a:rPr lang="en-US" sz="2799" strike="noStrike" u="none">
-                <a:solidFill>
-                  <a:srgbClr val="000000"/>
-                </a:solidFill>
-                <a:latin typeface="Open Sauce"/>
-                <a:ea typeface="Open Sauce"/>
-                <a:cs typeface="Open Sauce"/>
-                <a:sym typeface="Open Sauce"/>
-              </a:rPr>
-              <a:t>i</a:t>
-            </a:r>
-            <a:r>
-              <a:rPr lang="en-US" sz="2799" strike="noStrike" u="none">
-                <a:solidFill>
-                  <a:srgbClr val="000000"/>
-                </a:solidFill>
-                <a:latin typeface="Open Sauce"/>
-                <a:ea typeface="Open Sauce"/>
-                <a:cs typeface="Open Sauce"/>
-                <a:sym typeface="Open Sauce"/>
-              </a:rPr>
-              <a:t>cs</a:t>
-            </a:r>
-            <a:r>
-              <a:rPr lang="en-US" sz="2799" strike="noStrike" u="none">
-                <a:solidFill>
-                  <a:srgbClr val="000000"/>
-                </a:solidFill>
-                <a:latin typeface="Open Sauce"/>
-                <a:ea typeface="Open Sauce"/>
-                <a:cs typeface="Open Sauce"/>
-                <a:sym typeface="Open Sauce"/>
-              </a:rPr>
-              <a:t> </a:t>
-            </a:r>
-            <a:r>
-              <a:rPr lang="en-US" sz="2799" strike="noStrike" u="none">
-                <a:solidFill>
-                  <a:srgbClr val="000000"/>
-                </a:solidFill>
-                <a:latin typeface="Open Sauce"/>
-                <a:ea typeface="Open Sauce"/>
-                <a:cs typeface="Open Sauce"/>
-                <a:sym typeface="Open Sauce"/>
-              </a:rPr>
-              <a:t>&amp; Opti</a:t>
-            </a:r>
-            <a:r>
-              <a:rPr lang="en-US" sz="2799" strike="noStrike" u="none">
-                <a:solidFill>
-                  <a:srgbClr val="000000"/>
-                </a:solidFill>
-                <a:latin typeface="Open Sauce"/>
-                <a:ea typeface="Open Sauce"/>
-                <a:cs typeface="Open Sauce"/>
-                <a:sym typeface="Open Sauce"/>
-              </a:rPr>
-              <a:t>m</a:t>
-            </a:r>
-            <a:r>
-              <a:rPr lang="en-US" sz="2799" strike="noStrike" u="none">
-                <a:solidFill>
-                  <a:srgbClr val="000000"/>
-                </a:solidFill>
-                <a:latin typeface="Open Sauce"/>
-                <a:ea typeface="Open Sauce"/>
-                <a:cs typeface="Open Sauce"/>
-                <a:sym typeface="Open Sauce"/>
-              </a:rPr>
-              <a:t>iz</a:t>
-            </a:r>
-            <a:r>
-              <a:rPr lang="en-US" sz="2799" strike="noStrike" u="none">
-                <a:solidFill>
-                  <a:srgbClr val="000000"/>
-                </a:solidFill>
-                <a:latin typeface="Open Sauce"/>
-                <a:ea typeface="Open Sauce"/>
-                <a:cs typeface="Open Sauce"/>
-                <a:sym typeface="Open Sauce"/>
-              </a:rPr>
-              <a:t>ati</a:t>
-            </a:r>
-            <a:r>
-              <a:rPr lang="en-US" sz="2799" strike="noStrike" u="none">
-                <a:solidFill>
-                  <a:srgbClr val="000000"/>
-                </a:solidFill>
-                <a:latin typeface="Open Sauce"/>
-                <a:ea typeface="Open Sauce"/>
-                <a:cs typeface="Open Sauce"/>
-                <a:sym typeface="Open Sauce"/>
-              </a:rPr>
-              <a:t>o</a:t>
-            </a:r>
-            <a:r>
-              <a:rPr lang="en-US" sz="2799" strike="noStrike" u="none">
-                <a:solidFill>
-                  <a:srgbClr val="000000"/>
-                </a:solidFill>
-                <a:latin typeface="Open Sauce"/>
-                <a:ea typeface="Open Sauce"/>
-                <a:cs typeface="Open Sauce"/>
-                <a:sym typeface="Open Sauce"/>
-              </a:rPr>
-              <a:t>n</a:t>
-            </a:r>
-          </a:p>
+          <a:p/>
         </p:txBody>
       </p:sp>
       <p:grpSp>
@@ -10366,28 +7088,7 @@
             <a:spAutoFit/>
           </a:bodyPr>
           <a:lstStyle/>
-          <a:p>
-            <a:pPr algn="ctr" marL="0" indent="0" lvl="0">
-              <a:lnSpc>
-                <a:spcPts val="4479"/>
-              </a:lnSpc>
-              <a:spcBef>
-                <a:spcPct val="0"/>
-              </a:spcBef>
-            </a:pPr>
-            <a:r>
-              <a:rPr lang="en-US" sz="2799" strike="noStrike" u="none">
-                <a:solidFill>
-                  <a:srgbClr val="000000"/>
-                </a:solidFill>
-                <a:latin typeface="Open Sauce"/>
-                <a:ea typeface="Open Sauce"/>
-                <a:cs typeface="Open Sauce"/>
-                <a:sym typeface="Open Sauce"/>
-              </a:rPr>
-              <a:t>Social Media &amp; Content Creation</a:t>
-            </a:r>
-          </a:p>
+          <a:p/>
         </p:txBody>
       </p:sp>
       <p:grpSp>
@@ -10526,184 +7227,7 @@
             <a:spAutoFit/>
           </a:bodyPr>
           <a:lstStyle/>
-          <a:p>
-            <a:pPr algn="ctr" marL="0" indent="0" lvl="0">
-              <a:lnSpc>
-                <a:spcPts val="4479"/>
-              </a:lnSpc>
-              <a:spcBef>
-                <a:spcPct val="0"/>
-              </a:spcBef>
-            </a:pPr>
-            <a:r>
-              <a:rPr lang="en-US" sz="2799">
-                <a:solidFill>
-                  <a:srgbClr val="000000"/>
-                </a:solidFill>
-                <a:latin typeface="Open Sauce"/>
-                <a:ea typeface="Open Sauce"/>
-                <a:cs typeface="Open Sauce"/>
-                <a:sym typeface="Open Sauce"/>
-              </a:rPr>
-              <a:t>Em</a:t>
-            </a:r>
-            <a:r>
-              <a:rPr lang="en-US" sz="2799" strike="noStrike" u="none">
-                <a:solidFill>
-                  <a:srgbClr val="000000"/>
-                </a:solidFill>
-                <a:latin typeface="Open Sauce"/>
-                <a:ea typeface="Open Sauce"/>
-                <a:cs typeface="Open Sauce"/>
-                <a:sym typeface="Open Sauce"/>
-              </a:rPr>
-              <a:t>a</a:t>
-            </a:r>
-            <a:r>
-              <a:rPr lang="en-US" sz="2799" strike="noStrike" u="none">
-                <a:solidFill>
-                  <a:srgbClr val="000000"/>
-                </a:solidFill>
-                <a:latin typeface="Open Sauce"/>
-                <a:ea typeface="Open Sauce"/>
-                <a:cs typeface="Open Sauce"/>
-                <a:sym typeface="Open Sauce"/>
-              </a:rPr>
-              <a:t>i</a:t>
-            </a:r>
-            <a:r>
-              <a:rPr lang="en-US" sz="2799" strike="noStrike" u="none">
-                <a:solidFill>
-                  <a:srgbClr val="000000"/>
-                </a:solidFill>
-                <a:latin typeface="Open Sauce"/>
-                <a:ea typeface="Open Sauce"/>
-                <a:cs typeface="Open Sauce"/>
-                <a:sym typeface="Open Sauce"/>
-              </a:rPr>
-              <a:t>l</a:t>
-            </a:r>
-            <a:r>
-              <a:rPr lang="en-US" sz="2799" strike="noStrike" u="none">
-                <a:solidFill>
-                  <a:srgbClr val="000000"/>
-                </a:solidFill>
-                <a:latin typeface="Open Sauce"/>
-                <a:ea typeface="Open Sauce"/>
-                <a:cs typeface="Open Sauce"/>
-                <a:sym typeface="Open Sauce"/>
-              </a:rPr>
-              <a:t>,</a:t>
-            </a:r>
-            <a:r>
-              <a:rPr lang="en-US" sz="2799" strike="noStrike" u="none">
-                <a:solidFill>
-                  <a:srgbClr val="000000"/>
-                </a:solidFill>
-                <a:latin typeface="Open Sauce"/>
-                <a:ea typeface="Open Sauce"/>
-                <a:cs typeface="Open Sauce"/>
-                <a:sym typeface="Open Sauce"/>
-              </a:rPr>
-              <a:t> </a:t>
-            </a:r>
-            <a:r>
-              <a:rPr lang="en-US" sz="2799" strike="noStrike" u="none">
-                <a:solidFill>
-                  <a:srgbClr val="000000"/>
-                </a:solidFill>
-                <a:latin typeface="Open Sauce"/>
-                <a:ea typeface="Open Sauce"/>
-                <a:cs typeface="Open Sauce"/>
-                <a:sym typeface="Open Sauce"/>
-              </a:rPr>
-              <a:t>SEO, B</a:t>
-            </a:r>
-            <a:r>
-              <a:rPr lang="en-US" sz="2799" strike="noStrike" u="none">
-                <a:solidFill>
-                  <a:srgbClr val="000000"/>
-                </a:solidFill>
-                <a:latin typeface="Open Sauce"/>
-                <a:ea typeface="Open Sauce"/>
-                <a:cs typeface="Open Sauce"/>
-                <a:sym typeface="Open Sauce"/>
-              </a:rPr>
-              <a:t>l</a:t>
-            </a:r>
-            <a:r>
-              <a:rPr lang="en-US" sz="2799" strike="noStrike" u="none">
-                <a:solidFill>
-                  <a:srgbClr val="000000"/>
-                </a:solidFill>
-                <a:latin typeface="Open Sauce"/>
-                <a:ea typeface="Open Sauce"/>
-                <a:cs typeface="Open Sauce"/>
-                <a:sym typeface="Open Sauce"/>
-              </a:rPr>
-              <a:t>og</a:t>
-            </a:r>
-            <a:r>
-              <a:rPr lang="en-US" sz="2799" strike="noStrike" u="none">
-                <a:solidFill>
-                  <a:srgbClr val="000000"/>
-                </a:solidFill>
-                <a:latin typeface="Open Sauce"/>
-                <a:ea typeface="Open Sauce"/>
-                <a:cs typeface="Open Sauce"/>
-                <a:sym typeface="Open Sauce"/>
-              </a:rPr>
-              <a:t> </a:t>
-            </a:r>
-            <a:r>
-              <a:rPr lang="en-US" sz="2799" strike="noStrike" u="none">
-                <a:solidFill>
-                  <a:srgbClr val="000000"/>
-                </a:solidFill>
-                <a:latin typeface="Open Sauce"/>
-                <a:ea typeface="Open Sauce"/>
-                <a:cs typeface="Open Sauce"/>
-                <a:sym typeface="Open Sauce"/>
-              </a:rPr>
-              <a:t>&amp; Copyw</a:t>
-            </a:r>
-            <a:r>
-              <a:rPr lang="en-US" sz="2799" strike="noStrike" u="none">
-                <a:solidFill>
-                  <a:srgbClr val="000000"/>
-                </a:solidFill>
-                <a:latin typeface="Open Sauce"/>
-                <a:ea typeface="Open Sauce"/>
-                <a:cs typeface="Open Sauce"/>
-                <a:sym typeface="Open Sauce"/>
-              </a:rPr>
-              <a:t>r</a:t>
-            </a:r>
-            <a:r>
-              <a:rPr lang="en-US" sz="2799" strike="noStrike" u="none">
-                <a:solidFill>
-                  <a:srgbClr val="000000"/>
-                </a:solidFill>
-                <a:latin typeface="Open Sauce"/>
-                <a:ea typeface="Open Sauce"/>
-                <a:cs typeface="Open Sauce"/>
-                <a:sym typeface="Open Sauce"/>
-              </a:rPr>
-              <a:t>i</a:t>
-            </a:r>
-            <a:r>
-              <a:rPr lang="en-US" sz="2799" strike="noStrike" u="none">
-                <a:solidFill>
-                  <a:srgbClr val="000000"/>
-                </a:solidFill>
-                <a:latin typeface="Open Sauce"/>
-                <a:ea typeface="Open Sauce"/>
-                <a:cs typeface="Open Sauce"/>
-                <a:sym typeface="Open Sauce"/>
-              </a:rPr>
-              <a:t>ting</a:t>
-            </a:r>
-          </a:p>
+          <a:p/>
         </p:txBody>
       </p:sp>
       <p:grpSp>
@@ -10842,37 +7366,7 @@
             <a:spAutoFit/>
           </a:bodyPr>
           <a:lstStyle/>
-          <a:p>
-            <a:pPr algn="ctr" marL="0" indent="0" lvl="0">
-              <a:lnSpc>
-                <a:spcPts val="4479"/>
-              </a:lnSpc>
-            </a:pPr>
-            <a:r>
-              <a:rPr lang="en-US" sz="2799">
-                <a:solidFill>
-                  <a:srgbClr val="000000"/>
-                </a:solidFill>
-                <a:latin typeface="Open Sauce"/>
-                <a:ea typeface="Open Sauce"/>
-                <a:cs typeface="Open Sauce"/>
-                <a:sym typeface="Open Sauce"/>
-              </a:rPr>
-              <a:t>C</a:t>
-            </a:r>
-            <a:r>
-              <a:rPr lang="en-US" sz="2799" strike="noStrike" u="none">
-                <a:solidFill>
-                  <a:srgbClr val="000000"/>
-                </a:solidFill>
-                <a:latin typeface="Open Sauce"/>
-                <a:ea typeface="Open Sauce"/>
-                <a:cs typeface="Open Sauce"/>
-                <a:sym typeface="Open Sauce"/>
-              </a:rPr>
-              <a:t>ampaigns &amp; Paid Ads</a:t>
-            </a:r>
-          </a:p>
+          <a:p/>
         </p:txBody>
       </p:sp>
       <p:grpSp>
@@ -11011,28 +7505,7 @@
             <a:spAutoFit/>
           </a:bodyPr>
           <a:lstStyle/>
-          <a:p>
-            <a:pPr algn="ctr" marL="0" indent="0" lvl="0">
-              <a:lnSpc>
-                <a:spcPts val="4479"/>
-              </a:lnSpc>
-              <a:spcBef>
-                <a:spcPct val="0"/>
-              </a:spcBef>
-            </a:pPr>
-            <a:r>
-              <a:rPr lang="en-US" sz="2799">
-                <a:solidFill>
-                  <a:srgbClr val="000000"/>
-                </a:solidFill>
-                <a:latin typeface="Open Sauce"/>
-                <a:ea typeface="Open Sauce"/>
-                <a:cs typeface="Open Sauce"/>
-                <a:sym typeface="Open Sauce"/>
-              </a:rPr>
-              <a:t>More</a:t>
-            </a:r>
-          </a:p>
+          <a:p/>
         </p:txBody>
       </p:sp>
     </p:spTree>
@@ -11112,6 +7585,10 @@
             <a:miter/>
           </a:ln>
         </p:spPr>
+        <p:txBody>
+          <a:bodyPr/>
+          <a:p/>
+        </p:txBody>
       </p:sp>
       <p:sp>
         <p:nvSpPr>
@@ -11136,6 +7613,10 @@
             <a:tailEnd type="none" len="sm" w="sm"/>
           </a:ln>
         </p:spPr>
+        <p:txBody>
+          <a:bodyPr/>
+          <a:p/>
+        </p:txBody>
       </p:sp>
       <p:sp>
         <p:nvSpPr>
@@ -11157,25 +7638,7 @@
             <a:spAutoFit/>
           </a:bodyPr>
           <a:lstStyle/>
-          <a:p>
-            <a:pPr algn="l">
-              <a:lnSpc>
-                <a:spcPts val="8959"/>
-              </a:lnSpc>
-            </a:pPr>
-            <a:r>
-              <a:rPr lang="en-US" sz="6399">
-                <a:solidFill>
-                  <a:srgbClr val="000000"/>
-                </a:solidFill>
-                <a:latin typeface="DM Serif Display"/>
-                <a:ea typeface="DM Serif Display"/>
-                <a:cs typeface="DM Serif Display"/>
-                <a:sym typeface="DM Serif Display"/>
-              </a:rPr>
-              <a:t>Business Model</a:t>
-            </a:r>
-          </a:p>
+          <a:p/>
         </p:txBody>
       </p:sp>
       <p:sp>
@@ -11198,30 +7661,7 @@
             <a:spAutoFit/>
           </a:bodyPr>
           <a:lstStyle/>
-          <a:p>
-            <a:pPr algn="l" marL="0" indent="0" lvl="0">
-              <a:lnSpc>
-                <a:spcPts val="2239"/>
-              </a:lnSpc>
-              <a:spcBef>
-                <a:spcPct val="0"/>
-              </a:spcBef>
-            </a:pPr>
-            <a:r>
-              <a:rPr lang="en-US" sz="1599" spc="159" strike="noStrike" u="none">
-                <a:solidFill>
-                  <a:srgbClr val="000000">
-                    <a:alpha val="49804"/>
-                  </a:srgbClr>
-                </a:solidFill>
-                <a:latin typeface="Open Sauce"/>
-                <a:ea typeface="Open Sauce"/>
-                <a:cs typeface="Open Sauce"/>
-                <a:sym typeface="Open Sauce"/>
-              </a:rPr>
-              <a:t>STUDIO SHODWE</a:t>
-            </a:r>
-          </a:p>
+          <a:p/>
         </p:txBody>
       </p:sp>
       <p:sp>
@@ -11244,30 +7684,7 @@
             <a:spAutoFit/>
           </a:bodyPr>
           <a:lstStyle/>
-          <a:p>
-            <a:pPr algn="r" marL="0" indent="0" lvl="0">
-              <a:lnSpc>
-                <a:spcPts val="2239"/>
-              </a:lnSpc>
-              <a:spcBef>
-                <a:spcPct val="0"/>
-              </a:spcBef>
-            </a:pPr>
-            <a:r>
-              <a:rPr lang="en-US" sz="1599" spc="159">
-                <a:solidFill>
-                  <a:srgbClr val="000000">
-                    <a:alpha val="49804"/>
-                  </a:srgbClr>
-                </a:solidFill>
-                <a:latin typeface="Open Sauce"/>
-                <a:ea typeface="Open Sauce"/>
-                <a:cs typeface="Open Sauce"/>
-                <a:sym typeface="Open Sauce"/>
-              </a:rPr>
-              <a:t>7</a:t>
-            </a:r>
-          </a:p>
+          <a:p/>
         </p:txBody>
       </p:sp>
       <p:sp>
@@ -11290,28 +7707,7 @@
             <a:spAutoFit/>
           </a:bodyPr>
           <a:lstStyle/>
-          <a:p>
-            <a:pPr algn="l" marL="0" indent="0" lvl="0">
-              <a:lnSpc>
-                <a:spcPts val="3840"/>
-              </a:lnSpc>
-              <a:spcBef>
-                <a:spcPct val="0"/>
-              </a:spcBef>
-            </a:pPr>
-            <a:r>
-              <a:rPr lang="en-US" sz="2400" strike="noStrike" u="none">
-                <a:solidFill>
-                  <a:srgbClr val="000000"/>
-                </a:solidFill>
-                <a:latin typeface="Open Sauce"/>
-                <a:ea typeface="Open Sauce"/>
-                <a:cs typeface="Open Sauce"/>
-                <a:sym typeface="Open Sauce"/>
-              </a:rPr>
-              <a:t>We offer flexible, scalable services for businesses of all sizes.</a:t>
-            </a:r>
-          </a:p>
+          <a:p/>
         </p:txBody>
       </p:sp>
       <p:sp>
@@ -11334,50 +7730,7 @@
             <a:spAutoFit/>
           </a:bodyPr>
           <a:lstStyle/>
-          <a:p>
-            <a:pPr algn="l" marL="0" indent="0" lvl="0">
-              <a:lnSpc>
-                <a:spcPts val="3840"/>
-              </a:lnSpc>
-              <a:spcBef>
-                <a:spcPct val="0"/>
-              </a:spcBef>
-            </a:pPr>
-            <a:r>
-              <a:rPr lang="en-US" b="true" sz="2400" strike="noStrike" u="none">
-                <a:solidFill>
-                  <a:srgbClr val="000000"/>
-                </a:solidFill>
-                <a:latin typeface="Open Sauce Bold"/>
-                <a:ea typeface="Open Sauce Bold"/>
-                <a:cs typeface="Open Sauce Bold"/>
-                <a:sym typeface="Open Sauce Bold"/>
-              </a:rPr>
-              <a:t>Monthly Retainer</a:t>
-            </a:r>
-          </a:p>
-          <a:p>
-            <a:pPr algn="l" marL="0" indent="0" lvl="0">
-              <a:lnSpc>
-                <a:spcPts val="3840"/>
-              </a:lnSpc>
-              <a:spcBef>
-                <a:spcPct val="0"/>
-              </a:spcBef>
-            </a:pPr>
-            <a:r>
-              <a:rPr lang="en-US" b="true" sz="2400" strike="noStrike" u="none">
-                <a:solidFill>
-                  <a:srgbClr val="000000"/>
-                </a:solidFill>
-                <a:latin typeface="Open Sauce Bold"/>
-                <a:ea typeface="Open Sauce Bold"/>
-                <a:cs typeface="Open Sauce Bold"/>
-                <a:sym typeface="Open Sauce Bold"/>
-              </a:rPr>
-              <a:t>Packages</a:t>
-            </a:r>
-          </a:p>
+          <a:p/>
         </p:txBody>
       </p:sp>
       <p:sp>
@@ -11400,438 +7753,7 @@
             <a:spAutoFit/>
           </a:bodyPr>
           <a:lstStyle/>
-          <a:p>
-            <a:pPr algn="l" marL="388620" indent="-194310" lvl="1">
-              <a:lnSpc>
-                <a:spcPts val="2880"/>
-              </a:lnSpc>
-              <a:buFont typeface="Arial"/>
-              <a:buChar char="•"/>
-            </a:pPr>
-            <a:r>
-              <a:rPr lang="en-US" sz="1800">
-                <a:solidFill>
-                  <a:srgbClr val="000000"/>
-                </a:solidFill>
-                <a:latin typeface="Open Sauce"/>
-                <a:ea typeface="Open Sauce"/>
-                <a:cs typeface="Open Sauce"/>
-                <a:sym typeface="Open Sauce"/>
-              </a:rPr>
-              <a:t>Tiered pricing (Starter / Growth / Premium)</a:t>
-            </a:r>
-          </a:p>
-          <a:p>
-            <a:pPr algn="l" marL="388620" indent="-194310" lvl="1">
-              <a:lnSpc>
-                <a:spcPts val="2880"/>
-              </a:lnSpc>
-              <a:buFont typeface="Arial"/>
-              <a:buChar char="•"/>
-            </a:pPr>
-            <a:r>
-              <a:rPr lang="en-US" sz="1800">
-                <a:solidFill>
-                  <a:srgbClr val="000000"/>
-                </a:solidFill>
-                <a:latin typeface="Open Sauce"/>
-                <a:ea typeface="Open Sauce"/>
-                <a:cs typeface="Open Sauce"/>
-                <a:sym typeface="Open Sauce"/>
-              </a:rPr>
-              <a:t>Includes a set number</a:t>
-            </a:r>
-            <a:r>
-              <a:rPr lang="en-US" sz="1800" strike="noStrike" u="none">
-                <a:solidFill>
-                  <a:srgbClr val="000000"/>
-                </a:solidFill>
-                <a:latin typeface="Open Sauce"/>
-                <a:ea typeface="Open Sauce"/>
-                <a:cs typeface="Open Sauce"/>
-                <a:sym typeface="Open Sauce"/>
-              </a:rPr>
-              <a:t> of</a:t>
-            </a:r>
-            <a:r>
-              <a:rPr lang="en-US" sz="1800" strike="noStrike" u="none">
-                <a:solidFill>
-                  <a:srgbClr val="000000"/>
-                </a:solidFill>
-                <a:latin typeface="Open Sauce"/>
-                <a:ea typeface="Open Sauce"/>
-                <a:cs typeface="Open Sauce"/>
-                <a:sym typeface="Open Sauce"/>
-              </a:rPr>
-              <a:t> s</a:t>
-            </a:r>
-            <a:r>
-              <a:rPr lang="en-US" sz="1800" strike="noStrike" u="none">
-                <a:solidFill>
-                  <a:srgbClr val="000000"/>
-                </a:solidFill>
-                <a:latin typeface="Open Sauce"/>
-                <a:ea typeface="Open Sauce"/>
-                <a:cs typeface="Open Sauce"/>
-                <a:sym typeface="Open Sauce"/>
-              </a:rPr>
-              <a:t>e</a:t>
-            </a:r>
-            <a:r>
-              <a:rPr lang="en-US" sz="1800" strike="noStrike" u="none">
-                <a:solidFill>
-                  <a:srgbClr val="000000"/>
-                </a:solidFill>
-                <a:latin typeface="Open Sauce"/>
-                <a:ea typeface="Open Sauce"/>
-                <a:cs typeface="Open Sauce"/>
-                <a:sym typeface="Open Sauce"/>
-              </a:rPr>
-              <a:t>rv</a:t>
-            </a:r>
-            <a:r>
-              <a:rPr lang="en-US" sz="1800" strike="noStrike" u="none">
-                <a:solidFill>
-                  <a:srgbClr val="000000"/>
-                </a:solidFill>
-                <a:latin typeface="Open Sauce"/>
-                <a:ea typeface="Open Sauce"/>
-                <a:cs typeface="Open Sauce"/>
-                <a:sym typeface="Open Sauce"/>
-              </a:rPr>
-              <a:t>i</a:t>
-            </a:r>
-            <a:r>
-              <a:rPr lang="en-US" sz="1800" strike="noStrike" u="none">
-                <a:solidFill>
-                  <a:srgbClr val="000000"/>
-                </a:solidFill>
-                <a:latin typeface="Open Sauce"/>
-                <a:ea typeface="Open Sauce"/>
-                <a:cs typeface="Open Sauce"/>
-                <a:sym typeface="Open Sauce"/>
-              </a:rPr>
-              <a:t>ces: strat</a:t>
-            </a:r>
-            <a:r>
-              <a:rPr lang="en-US" sz="1800" strike="noStrike" u="none">
-                <a:solidFill>
-                  <a:srgbClr val="000000"/>
-                </a:solidFill>
-                <a:latin typeface="Open Sauce"/>
-                <a:ea typeface="Open Sauce"/>
-                <a:cs typeface="Open Sauce"/>
-                <a:sym typeface="Open Sauce"/>
-              </a:rPr>
-              <a:t>e</a:t>
-            </a:r>
-            <a:r>
-              <a:rPr lang="en-US" sz="1800" strike="noStrike" u="none">
-                <a:solidFill>
-                  <a:srgbClr val="000000"/>
-                </a:solidFill>
-                <a:latin typeface="Open Sauce"/>
-                <a:ea typeface="Open Sauce"/>
-                <a:cs typeface="Open Sauce"/>
-                <a:sym typeface="Open Sauce"/>
-              </a:rPr>
-              <a:t>gy sessions</a:t>
-            </a:r>
-            <a:r>
-              <a:rPr lang="en-US" sz="1800" strike="noStrike" u="none">
-                <a:solidFill>
-                  <a:srgbClr val="000000"/>
-                </a:solidFill>
-                <a:latin typeface="Open Sauce"/>
-                <a:ea typeface="Open Sauce"/>
-                <a:cs typeface="Open Sauce"/>
-                <a:sym typeface="Open Sauce"/>
-              </a:rPr>
-              <a:t>, content</a:t>
-            </a:r>
-            <a:r>
-              <a:rPr lang="en-US" sz="1800" strike="noStrike" u="none">
-                <a:solidFill>
-                  <a:srgbClr val="000000"/>
-                </a:solidFill>
-                <a:latin typeface="Open Sauce"/>
-                <a:ea typeface="Open Sauce"/>
-                <a:cs typeface="Open Sauce"/>
-                <a:sym typeface="Open Sauce"/>
-              </a:rPr>
-              <a:t> cr</a:t>
-            </a:r>
-            <a:r>
-              <a:rPr lang="en-US" sz="1800" strike="noStrike" u="none">
-                <a:solidFill>
-                  <a:srgbClr val="000000"/>
-                </a:solidFill>
-                <a:latin typeface="Open Sauce"/>
-                <a:ea typeface="Open Sauce"/>
-                <a:cs typeface="Open Sauce"/>
-                <a:sym typeface="Open Sauce"/>
-              </a:rPr>
-              <a:t>e</a:t>
-            </a:r>
-            <a:r>
-              <a:rPr lang="en-US" sz="1800" strike="noStrike" u="none">
-                <a:solidFill>
-                  <a:srgbClr val="000000"/>
-                </a:solidFill>
-                <a:latin typeface="Open Sauce"/>
-                <a:ea typeface="Open Sauce"/>
-                <a:cs typeface="Open Sauce"/>
-                <a:sym typeface="Open Sauce"/>
-              </a:rPr>
-              <a:t>atio</a:t>
-            </a:r>
-            <a:r>
-              <a:rPr lang="en-US" sz="1800" strike="noStrike" u="none">
-                <a:solidFill>
-                  <a:srgbClr val="000000"/>
-                </a:solidFill>
-                <a:latin typeface="Open Sauce"/>
-                <a:ea typeface="Open Sauce"/>
-                <a:cs typeface="Open Sauce"/>
-                <a:sym typeface="Open Sauce"/>
-              </a:rPr>
-              <a:t>n, cam</a:t>
-            </a:r>
-            <a:r>
-              <a:rPr lang="en-US" sz="1800" strike="noStrike" u="none">
-                <a:solidFill>
-                  <a:srgbClr val="000000"/>
-                </a:solidFill>
-                <a:latin typeface="Open Sauce"/>
-                <a:ea typeface="Open Sauce"/>
-                <a:cs typeface="Open Sauce"/>
-                <a:sym typeface="Open Sauce"/>
-              </a:rPr>
-              <a:t>p</a:t>
-            </a:r>
-            <a:r>
-              <a:rPr lang="en-US" sz="1800" strike="noStrike" u="none">
-                <a:solidFill>
-                  <a:srgbClr val="000000"/>
-                </a:solidFill>
-                <a:latin typeface="Open Sauce"/>
-                <a:ea typeface="Open Sauce"/>
-                <a:cs typeface="Open Sauce"/>
-                <a:sym typeface="Open Sauce"/>
-              </a:rPr>
-              <a:t>a</a:t>
-            </a:r>
-            <a:r>
-              <a:rPr lang="en-US" sz="1800" strike="noStrike" u="none">
-                <a:solidFill>
-                  <a:srgbClr val="000000"/>
-                </a:solidFill>
-                <a:latin typeface="Open Sauce"/>
-                <a:ea typeface="Open Sauce"/>
-                <a:cs typeface="Open Sauce"/>
-                <a:sym typeface="Open Sauce"/>
-              </a:rPr>
-              <a:t>ign manag</a:t>
-            </a:r>
-            <a:r>
-              <a:rPr lang="en-US" sz="1800" strike="noStrike" u="none">
-                <a:solidFill>
-                  <a:srgbClr val="000000"/>
-                </a:solidFill>
-                <a:latin typeface="Open Sauce"/>
-                <a:ea typeface="Open Sauce"/>
-                <a:cs typeface="Open Sauce"/>
-                <a:sym typeface="Open Sauce"/>
-              </a:rPr>
-              <a:t>e</a:t>
-            </a:r>
-            <a:r>
-              <a:rPr lang="en-US" sz="1800" strike="noStrike" u="none">
-                <a:solidFill>
-                  <a:srgbClr val="000000"/>
-                </a:solidFill>
-                <a:latin typeface="Open Sauce"/>
-                <a:ea typeface="Open Sauce"/>
-                <a:cs typeface="Open Sauce"/>
-                <a:sym typeface="Open Sauce"/>
-              </a:rPr>
-              <a:t>men</a:t>
-            </a:r>
-            <a:r>
-              <a:rPr lang="en-US" sz="1800" strike="noStrike" u="none">
-                <a:solidFill>
-                  <a:srgbClr val="000000"/>
-                </a:solidFill>
-                <a:latin typeface="Open Sauce"/>
-                <a:ea typeface="Open Sauce"/>
-                <a:cs typeface="Open Sauce"/>
-                <a:sym typeface="Open Sauce"/>
-              </a:rPr>
-              <a:t>t</a:t>
-            </a:r>
-            <a:r>
-              <a:rPr lang="en-US" sz="1800" strike="noStrike" u="none">
-                <a:solidFill>
-                  <a:srgbClr val="000000"/>
-                </a:solidFill>
-                <a:latin typeface="Open Sauce"/>
-                <a:ea typeface="Open Sauce"/>
-                <a:cs typeface="Open Sauce"/>
-                <a:sym typeface="Open Sauce"/>
-              </a:rPr>
-              <a:t>, etc.</a:t>
-            </a:r>
-          </a:p>
-          <a:p>
-            <a:pPr algn="l" marL="388620" indent="-194310" lvl="1">
-              <a:lnSpc>
-                <a:spcPts val="2880"/>
-              </a:lnSpc>
-              <a:buFont typeface="Arial"/>
-              <a:buChar char="•"/>
-            </a:pPr>
-            <a:r>
-              <a:rPr lang="en-US" sz="1800" strike="noStrike" u="none">
-                <a:solidFill>
-                  <a:srgbClr val="000000"/>
-                </a:solidFill>
-                <a:latin typeface="Open Sauce"/>
-                <a:ea typeface="Open Sauce"/>
-                <a:cs typeface="Open Sauce"/>
-                <a:sym typeface="Open Sauce"/>
-              </a:rPr>
-              <a:t>Ideal for businesses need</a:t>
-            </a:r>
-            <a:r>
-              <a:rPr lang="en-US" sz="1800" strike="noStrike" u="none">
-                <a:solidFill>
-                  <a:srgbClr val="000000"/>
-                </a:solidFill>
-                <a:latin typeface="Open Sauce"/>
-                <a:ea typeface="Open Sauce"/>
-                <a:cs typeface="Open Sauce"/>
-                <a:sym typeface="Open Sauce"/>
-              </a:rPr>
-              <a:t>ing consistent sup</a:t>
-            </a:r>
-            <a:r>
-              <a:rPr lang="en-US" sz="1800" strike="noStrike" u="none">
-                <a:solidFill>
-                  <a:srgbClr val="000000"/>
-                </a:solidFill>
-                <a:latin typeface="Open Sauce"/>
-                <a:ea typeface="Open Sauce"/>
-                <a:cs typeface="Open Sauce"/>
-                <a:sym typeface="Open Sauce"/>
-              </a:rPr>
-              <a:t>port </a:t>
-            </a:r>
-            <a:r>
-              <a:rPr lang="en-US" sz="1800" strike="noStrike" u="none">
-                <a:solidFill>
-                  <a:srgbClr val="000000"/>
-                </a:solidFill>
-                <a:latin typeface="Open Sauce"/>
-                <a:ea typeface="Open Sauce"/>
-                <a:cs typeface="Open Sauce"/>
-                <a:sym typeface="Open Sauce"/>
-              </a:rPr>
-              <a:t>a</a:t>
-            </a:r>
-            <a:r>
-              <a:rPr lang="en-US" sz="1800" strike="noStrike" u="none">
-                <a:solidFill>
-                  <a:srgbClr val="000000"/>
-                </a:solidFill>
-                <a:latin typeface="Open Sauce"/>
-                <a:ea typeface="Open Sauce"/>
-                <a:cs typeface="Open Sauce"/>
-                <a:sym typeface="Open Sauce"/>
-              </a:rPr>
-              <a:t>nd measu</a:t>
-            </a:r>
-            <a:r>
-              <a:rPr lang="en-US" sz="1800" strike="noStrike" u="none">
-                <a:solidFill>
-                  <a:srgbClr val="000000"/>
-                </a:solidFill>
-                <a:latin typeface="Open Sauce"/>
-                <a:ea typeface="Open Sauce"/>
-                <a:cs typeface="Open Sauce"/>
-                <a:sym typeface="Open Sauce"/>
-              </a:rPr>
-              <a:t>r</a:t>
-            </a:r>
-            <a:r>
-              <a:rPr lang="en-US" sz="1800" strike="noStrike" u="none">
-                <a:solidFill>
-                  <a:srgbClr val="000000"/>
-                </a:solidFill>
-                <a:latin typeface="Open Sauce"/>
-                <a:ea typeface="Open Sauce"/>
-                <a:cs typeface="Open Sauce"/>
-                <a:sym typeface="Open Sauce"/>
-              </a:rPr>
-              <a:t>able resul</a:t>
-            </a:r>
-            <a:r>
-              <a:rPr lang="en-US" sz="1800" strike="noStrike" u="none">
-                <a:solidFill>
-                  <a:srgbClr val="000000"/>
-                </a:solidFill>
-                <a:latin typeface="Open Sauce"/>
-                <a:ea typeface="Open Sauce"/>
-                <a:cs typeface="Open Sauce"/>
-                <a:sym typeface="Open Sauce"/>
-              </a:rPr>
-              <a:t>t</a:t>
-            </a:r>
-            <a:r>
-              <a:rPr lang="en-US" sz="1800" strike="noStrike" u="none">
-                <a:solidFill>
-                  <a:srgbClr val="000000"/>
-                </a:solidFill>
-                <a:latin typeface="Open Sauce"/>
-                <a:ea typeface="Open Sauce"/>
-                <a:cs typeface="Open Sauce"/>
-                <a:sym typeface="Open Sauce"/>
-              </a:rPr>
-              <a:t>s over time</a:t>
-            </a:r>
-          </a:p>
-          <a:p>
-            <a:pPr algn="l" marL="388620" indent="-194310" lvl="1">
-              <a:lnSpc>
-                <a:spcPts val="2880"/>
-              </a:lnSpc>
-              <a:buFont typeface="Arial"/>
-              <a:buChar char="•"/>
-            </a:pPr>
-            <a:r>
-              <a:rPr lang="en-US" sz="1800" strike="noStrike" u="none">
-                <a:solidFill>
-                  <a:srgbClr val="000000"/>
-                </a:solidFill>
-                <a:latin typeface="Open Sauce"/>
-                <a:ea typeface="Open Sauce"/>
-                <a:cs typeface="Open Sauce"/>
-                <a:sym typeface="Open Sauce"/>
-              </a:rPr>
-              <a:t>Predictable reve</a:t>
-            </a:r>
-            <a:r>
-              <a:rPr lang="en-US" sz="1800" strike="noStrike" u="none">
-                <a:solidFill>
-                  <a:srgbClr val="000000"/>
-                </a:solidFill>
-                <a:latin typeface="Open Sauce"/>
-                <a:ea typeface="Open Sauce"/>
-                <a:cs typeface="Open Sauce"/>
-                <a:sym typeface="Open Sauce"/>
-              </a:rPr>
-              <a:t>nue and long-term client relationships</a:t>
-            </a:r>
-          </a:p>
+          <a:p/>
         </p:txBody>
       </p:sp>
       <p:sp>
@@ -11854,64 +7776,7 @@
             <a:spAutoFit/>
           </a:bodyPr>
           <a:lstStyle/>
-          <a:p>
-            <a:pPr algn="l" marL="0" indent="0" lvl="0">
-              <a:lnSpc>
-                <a:spcPts val="3840"/>
-              </a:lnSpc>
-              <a:spcBef>
-                <a:spcPct val="0"/>
-              </a:spcBef>
-            </a:pPr>
-            <a:r>
-              <a:rPr lang="en-US" b="true" sz="2400">
-                <a:solidFill>
-                  <a:srgbClr val="000000"/>
-                </a:solidFill>
-                <a:latin typeface="Open Sauce Bold"/>
-                <a:ea typeface="Open Sauce Bold"/>
-                <a:cs typeface="Open Sauce Bold"/>
-                <a:sym typeface="Open Sauce Bold"/>
-              </a:rPr>
-              <a:t>One-Off Campaigns &amp; C</a:t>
-            </a:r>
-            <a:r>
-              <a:rPr lang="en-US" b="true" sz="2400" strike="noStrike" u="none">
-                <a:solidFill>
-                  <a:srgbClr val="000000"/>
-                </a:solidFill>
-                <a:latin typeface="Open Sauce Bold"/>
-                <a:ea typeface="Open Sauce Bold"/>
-                <a:cs typeface="Open Sauce Bold"/>
-                <a:sym typeface="Open Sauce Bold"/>
-              </a:rPr>
-              <a:t>on</a:t>
-            </a:r>
-            <a:r>
-              <a:rPr lang="en-US" b="true" sz="2400" strike="noStrike" u="none">
-                <a:solidFill>
-                  <a:srgbClr val="000000"/>
-                </a:solidFill>
-                <a:latin typeface="Open Sauce Bold"/>
-                <a:ea typeface="Open Sauce Bold"/>
-                <a:cs typeface="Open Sauce Bold"/>
-                <a:sym typeface="Open Sauce Bold"/>
-              </a:rPr>
-              <a:t>su</a:t>
-            </a:r>
-            <a:r>
-              <a:rPr lang="en-US" b="true" sz="2400" strike="noStrike" u="none">
-                <a:solidFill>
-                  <a:srgbClr val="000000"/>
-                </a:solidFill>
-                <a:latin typeface="Open Sauce Bold"/>
-                <a:ea typeface="Open Sauce Bold"/>
-                <a:cs typeface="Open Sauce Bold"/>
-                <a:sym typeface="Open Sauce Bold"/>
-              </a:rPr>
-              <a:t>lting</a:t>
-            </a:r>
-          </a:p>
+          <a:p/>
         </p:txBody>
       </p:sp>
       <p:sp>
@@ -11934,393 +7799,7 @@
             <a:spAutoFit/>
           </a:bodyPr>
           <a:lstStyle/>
-          <a:p>
-            <a:pPr algn="l" marL="388620" indent="-194310" lvl="1">
-              <a:lnSpc>
-                <a:spcPts val="2880"/>
-              </a:lnSpc>
-              <a:buFont typeface="Arial"/>
-              <a:buChar char="•"/>
-            </a:pPr>
-            <a:r>
-              <a:rPr lang="en-US" sz="1800">
-                <a:solidFill>
-                  <a:srgbClr val="000000"/>
-                </a:solidFill>
-                <a:latin typeface="Open Sauce"/>
-                <a:ea typeface="Open Sauce"/>
-                <a:cs typeface="Open Sauce"/>
-                <a:sym typeface="Open Sauce"/>
-              </a:rPr>
-              <a:t>Project-based pricing for seasonal or special campaigns</a:t>
-            </a:r>
-          </a:p>
-          <a:p>
-            <a:pPr algn="l" marL="388620" indent="-194310" lvl="1">
-              <a:lnSpc>
-                <a:spcPts val="2880"/>
-              </a:lnSpc>
-              <a:buFont typeface="Arial"/>
-              <a:buChar char="•"/>
-            </a:pPr>
-            <a:r>
-              <a:rPr lang="en-US" sz="1800">
-                <a:solidFill>
-                  <a:srgbClr val="000000"/>
-                </a:solidFill>
-                <a:latin typeface="Open Sauce"/>
-                <a:ea typeface="Open Sauce"/>
-                <a:cs typeface="Open Sauce"/>
-                <a:sym typeface="Open Sauce"/>
-              </a:rPr>
-              <a:t>Includes short-term</a:t>
-            </a:r>
-            <a:r>
-              <a:rPr lang="en-US" sz="1800" strike="noStrike" u="none">
-                <a:solidFill>
-                  <a:srgbClr val="000000"/>
-                </a:solidFill>
-                <a:latin typeface="Open Sauce"/>
-                <a:ea typeface="Open Sauce"/>
-                <a:cs typeface="Open Sauce"/>
-                <a:sym typeface="Open Sauce"/>
-              </a:rPr>
-              <a:t> social </a:t>
-            </a:r>
-            <a:r>
-              <a:rPr lang="en-US" sz="1800" strike="noStrike" u="none">
-                <a:solidFill>
-                  <a:srgbClr val="000000"/>
-                </a:solidFill>
-                <a:latin typeface="Open Sauce"/>
-                <a:ea typeface="Open Sauce"/>
-                <a:cs typeface="Open Sauce"/>
-                <a:sym typeface="Open Sauce"/>
-              </a:rPr>
-              <a:t>m</a:t>
-            </a:r>
-            <a:r>
-              <a:rPr lang="en-US" sz="1800" strike="noStrike" u="none">
-                <a:solidFill>
-                  <a:srgbClr val="000000"/>
-                </a:solidFill>
-                <a:latin typeface="Open Sauce"/>
-                <a:ea typeface="Open Sauce"/>
-                <a:cs typeface="Open Sauce"/>
-                <a:sym typeface="Open Sauce"/>
-              </a:rPr>
-              <a:t>edia </a:t>
-            </a:r>
-            <a:r>
-              <a:rPr lang="en-US" sz="1800" strike="noStrike" u="none">
-                <a:solidFill>
-                  <a:srgbClr val="000000"/>
-                </a:solidFill>
-                <a:latin typeface="Open Sauce"/>
-                <a:ea typeface="Open Sauce"/>
-                <a:cs typeface="Open Sauce"/>
-                <a:sym typeface="Open Sauce"/>
-              </a:rPr>
-              <a:t>pu</a:t>
-            </a:r>
-            <a:r>
-              <a:rPr lang="en-US" sz="1800" strike="noStrike" u="none">
-                <a:solidFill>
-                  <a:srgbClr val="000000"/>
-                </a:solidFill>
-                <a:latin typeface="Open Sauce"/>
-                <a:ea typeface="Open Sauce"/>
-                <a:cs typeface="Open Sauce"/>
-                <a:sym typeface="Open Sauce"/>
-              </a:rPr>
-              <a:t>s</a:t>
-            </a:r>
-            <a:r>
-              <a:rPr lang="en-US" sz="1800" strike="noStrike" u="none">
-                <a:solidFill>
-                  <a:srgbClr val="000000"/>
-                </a:solidFill>
-                <a:latin typeface="Open Sauce"/>
-                <a:ea typeface="Open Sauce"/>
-                <a:cs typeface="Open Sauce"/>
-                <a:sym typeface="Open Sauce"/>
-              </a:rPr>
-              <a:t>h</a:t>
-            </a:r>
-            <a:r>
-              <a:rPr lang="en-US" sz="1800" strike="noStrike" u="none">
-                <a:solidFill>
-                  <a:srgbClr val="000000"/>
-                </a:solidFill>
-                <a:latin typeface="Open Sauce"/>
-                <a:ea typeface="Open Sauce"/>
-                <a:cs typeface="Open Sauce"/>
-                <a:sym typeface="Open Sauce"/>
-              </a:rPr>
-              <a:t>es, product </a:t>
-            </a:r>
-            <a:r>
-              <a:rPr lang="en-US" sz="1800" strike="noStrike" u="none">
-                <a:solidFill>
-                  <a:srgbClr val="000000"/>
-                </a:solidFill>
-                <a:latin typeface="Open Sauce"/>
-                <a:ea typeface="Open Sauce"/>
-                <a:cs typeface="Open Sauce"/>
-                <a:sym typeface="Open Sauce"/>
-              </a:rPr>
-              <a:t>laun</a:t>
-            </a:r>
-            <a:r>
-              <a:rPr lang="en-US" sz="1800" strike="noStrike" u="none">
-                <a:solidFill>
-                  <a:srgbClr val="000000"/>
-                </a:solidFill>
-                <a:latin typeface="Open Sauce"/>
-                <a:ea typeface="Open Sauce"/>
-                <a:cs typeface="Open Sauce"/>
-                <a:sym typeface="Open Sauce"/>
-              </a:rPr>
-              <a:t>c</a:t>
-            </a:r>
-            <a:r>
-              <a:rPr lang="en-US" sz="1800" strike="noStrike" u="none">
-                <a:solidFill>
-                  <a:srgbClr val="000000"/>
-                </a:solidFill>
-                <a:latin typeface="Open Sauce"/>
-                <a:ea typeface="Open Sauce"/>
-                <a:cs typeface="Open Sauce"/>
-                <a:sym typeface="Open Sauce"/>
-              </a:rPr>
-              <a:t>hes, </a:t>
-            </a:r>
-            <a:r>
-              <a:rPr lang="en-US" sz="1800" strike="noStrike" u="none">
-                <a:solidFill>
-                  <a:srgbClr val="000000"/>
-                </a:solidFill>
-                <a:latin typeface="Open Sauce"/>
-                <a:ea typeface="Open Sauce"/>
-                <a:cs typeface="Open Sauce"/>
-                <a:sym typeface="Open Sauce"/>
-              </a:rPr>
-              <a:t>rebra</a:t>
-            </a:r>
-            <a:r>
-              <a:rPr lang="en-US" sz="1800" strike="noStrike" u="none">
-                <a:solidFill>
-                  <a:srgbClr val="000000"/>
-                </a:solidFill>
-                <a:latin typeface="Open Sauce"/>
-                <a:ea typeface="Open Sauce"/>
-                <a:cs typeface="Open Sauce"/>
-                <a:sym typeface="Open Sauce"/>
-              </a:rPr>
-              <a:t>nd</a:t>
-            </a:r>
-            <a:r>
-              <a:rPr lang="en-US" sz="1800" strike="noStrike" u="none">
-                <a:solidFill>
-                  <a:srgbClr val="000000"/>
-                </a:solidFill>
-                <a:latin typeface="Open Sauce"/>
-                <a:ea typeface="Open Sauce"/>
-                <a:cs typeface="Open Sauce"/>
-                <a:sym typeface="Open Sauce"/>
-              </a:rPr>
-              <a:t>ing, or dig</a:t>
-            </a:r>
-            <a:r>
-              <a:rPr lang="en-US" sz="1800" strike="noStrike" u="none">
-                <a:solidFill>
-                  <a:srgbClr val="000000"/>
-                </a:solidFill>
-                <a:latin typeface="Open Sauce"/>
-                <a:ea typeface="Open Sauce"/>
-                <a:cs typeface="Open Sauce"/>
-                <a:sym typeface="Open Sauce"/>
-              </a:rPr>
-              <a:t>ital</a:t>
-            </a:r>
-            <a:r>
-              <a:rPr lang="en-US" sz="1800" strike="noStrike" u="none">
-                <a:solidFill>
-                  <a:srgbClr val="000000"/>
-                </a:solidFill>
-                <a:latin typeface="Open Sauce"/>
-                <a:ea typeface="Open Sauce"/>
-                <a:cs typeface="Open Sauce"/>
-                <a:sym typeface="Open Sauce"/>
-              </a:rPr>
-              <a:t> a</a:t>
-            </a:r>
-            <a:r>
-              <a:rPr lang="en-US" sz="1800" strike="noStrike" u="none">
-                <a:solidFill>
-                  <a:srgbClr val="000000"/>
-                </a:solidFill>
-                <a:latin typeface="Open Sauce"/>
-                <a:ea typeface="Open Sauce"/>
-                <a:cs typeface="Open Sauce"/>
-                <a:sym typeface="Open Sauce"/>
-              </a:rPr>
-              <a:t>udi</a:t>
-            </a:r>
-            <a:r>
-              <a:rPr lang="en-US" sz="1800" strike="noStrike" u="none">
-                <a:solidFill>
-                  <a:srgbClr val="000000"/>
-                </a:solidFill>
-                <a:latin typeface="Open Sauce"/>
-                <a:ea typeface="Open Sauce"/>
-                <a:cs typeface="Open Sauce"/>
-                <a:sym typeface="Open Sauce"/>
-              </a:rPr>
-              <a:t>ts</a:t>
-            </a:r>
-          </a:p>
-          <a:p>
-            <a:pPr algn="l" marL="388620" indent="-194310" lvl="1">
-              <a:lnSpc>
-                <a:spcPts val="2880"/>
-              </a:lnSpc>
-              <a:buFont typeface="Arial"/>
-              <a:buChar char="•"/>
-            </a:pPr>
-            <a:r>
-              <a:rPr lang="en-US" sz="1800" strike="noStrike" u="none">
-                <a:solidFill>
-                  <a:srgbClr val="000000"/>
-                </a:solidFill>
-                <a:latin typeface="Open Sauce"/>
-                <a:ea typeface="Open Sauce"/>
-                <a:cs typeface="Open Sauce"/>
-                <a:sym typeface="Open Sauce"/>
-              </a:rPr>
-              <a:t>Ideal for </a:t>
-            </a:r>
-            <a:r>
-              <a:rPr lang="en-US" sz="1800" strike="noStrike" u="none">
-                <a:solidFill>
-                  <a:srgbClr val="000000"/>
-                </a:solidFill>
-                <a:latin typeface="Open Sauce"/>
-                <a:ea typeface="Open Sauce"/>
-                <a:cs typeface="Open Sauce"/>
-                <a:sym typeface="Open Sauce"/>
-              </a:rPr>
-              <a:t>cl</a:t>
-            </a:r>
-            <a:r>
-              <a:rPr lang="en-US" sz="1800" strike="noStrike" u="none">
-                <a:solidFill>
-                  <a:srgbClr val="000000"/>
-                </a:solidFill>
-                <a:latin typeface="Open Sauce"/>
-                <a:ea typeface="Open Sauce"/>
-                <a:cs typeface="Open Sauce"/>
-                <a:sym typeface="Open Sauce"/>
-              </a:rPr>
-              <a:t>i</a:t>
-            </a:r>
-            <a:r>
-              <a:rPr lang="en-US" sz="1800" strike="noStrike" u="none">
-                <a:solidFill>
-                  <a:srgbClr val="000000"/>
-                </a:solidFill>
-                <a:latin typeface="Open Sauce"/>
-                <a:ea typeface="Open Sauce"/>
-                <a:cs typeface="Open Sauce"/>
-                <a:sym typeface="Open Sauce"/>
-              </a:rPr>
-              <a:t>e</a:t>
-            </a:r>
-            <a:r>
-              <a:rPr lang="en-US" sz="1800" strike="noStrike" u="none">
-                <a:solidFill>
-                  <a:srgbClr val="000000"/>
-                </a:solidFill>
-                <a:latin typeface="Open Sauce"/>
-                <a:ea typeface="Open Sauce"/>
-                <a:cs typeface="Open Sauce"/>
-                <a:sym typeface="Open Sauce"/>
-              </a:rPr>
-              <a:t>n</a:t>
-            </a:r>
-            <a:r>
-              <a:rPr lang="en-US" sz="1800" strike="noStrike" u="none">
-                <a:solidFill>
-                  <a:srgbClr val="000000"/>
-                </a:solidFill>
-                <a:latin typeface="Open Sauce"/>
-                <a:ea typeface="Open Sauce"/>
-                <a:cs typeface="Open Sauce"/>
-                <a:sym typeface="Open Sauce"/>
-              </a:rPr>
-              <a:t>t</a:t>
-            </a:r>
-            <a:r>
-              <a:rPr lang="en-US" sz="1800" strike="noStrike" u="none">
-                <a:solidFill>
-                  <a:srgbClr val="000000"/>
-                </a:solidFill>
-                <a:latin typeface="Open Sauce"/>
-                <a:ea typeface="Open Sauce"/>
-                <a:cs typeface="Open Sauce"/>
-                <a:sym typeface="Open Sauce"/>
-              </a:rPr>
-              <a:t>s </a:t>
-            </a:r>
-            <a:r>
-              <a:rPr lang="en-US" sz="1800" strike="noStrike" u="none">
-                <a:solidFill>
-                  <a:srgbClr val="000000"/>
-                </a:solidFill>
-                <a:latin typeface="Open Sauce"/>
-                <a:ea typeface="Open Sauce"/>
-                <a:cs typeface="Open Sauce"/>
-                <a:sym typeface="Open Sauce"/>
-              </a:rPr>
-              <a:t>t</a:t>
-            </a:r>
-            <a:r>
-              <a:rPr lang="en-US" sz="1800" strike="noStrike" u="none">
-                <a:solidFill>
-                  <a:srgbClr val="000000"/>
-                </a:solidFill>
-                <a:latin typeface="Open Sauce"/>
-                <a:ea typeface="Open Sauce"/>
-                <a:cs typeface="Open Sauce"/>
-                <a:sym typeface="Open Sauce"/>
-              </a:rPr>
-              <a:t>e</a:t>
-            </a:r>
-            <a:r>
-              <a:rPr lang="en-US" sz="1800" strike="noStrike" u="none">
-                <a:solidFill>
-                  <a:srgbClr val="000000"/>
-                </a:solidFill>
-                <a:latin typeface="Open Sauce"/>
-                <a:ea typeface="Open Sauce"/>
-                <a:cs typeface="Open Sauce"/>
-                <a:sym typeface="Open Sauce"/>
-              </a:rPr>
-              <a:t>st</a:t>
-            </a:r>
-            <a:r>
-              <a:rPr lang="en-US" sz="1800" strike="noStrike" u="none">
-                <a:solidFill>
-                  <a:srgbClr val="000000"/>
-                </a:solidFill>
-                <a:latin typeface="Open Sauce"/>
-                <a:ea typeface="Open Sauce"/>
-                <a:cs typeface="Open Sauce"/>
-                <a:sym typeface="Open Sauce"/>
-              </a:rPr>
-              <a:t>ing the waters or addressing a specific need</a:t>
-            </a:r>
-          </a:p>
+          <a:p/>
         </p:txBody>
       </p:sp>
       <p:sp>
@@ -12343,184 +7822,7 @@
             <a:spAutoFit/>
           </a:bodyPr>
           <a:lstStyle/>
-          <a:p>
-            <a:pPr algn="l" marL="0" indent="0" lvl="0">
-              <a:lnSpc>
-                <a:spcPts val="3840"/>
-              </a:lnSpc>
-              <a:spcBef>
-                <a:spcPct val="0"/>
-              </a:spcBef>
-            </a:pPr>
-            <a:r>
-              <a:rPr lang="en-US" b="true" sz="2400">
-                <a:solidFill>
-                  <a:srgbClr val="000000"/>
-                </a:solidFill>
-                <a:latin typeface="Open Sauce Bold"/>
-                <a:ea typeface="Open Sauce Bold"/>
-                <a:cs typeface="Open Sauce Bold"/>
-                <a:sym typeface="Open Sauce Bold"/>
-              </a:rPr>
-              <a:t>W</a:t>
-            </a:r>
-            <a:r>
-              <a:rPr lang="en-US" b="true" sz="2400" strike="noStrike" u="none">
-                <a:solidFill>
-                  <a:srgbClr val="000000"/>
-                </a:solidFill>
-                <a:latin typeface="Open Sauce Bold"/>
-                <a:ea typeface="Open Sauce Bold"/>
-                <a:cs typeface="Open Sauce Bold"/>
-                <a:sym typeface="Open Sauce Bold"/>
-              </a:rPr>
-              <a:t>o</a:t>
-            </a:r>
-            <a:r>
-              <a:rPr lang="en-US" b="true" sz="2400" strike="noStrike" u="none">
-                <a:solidFill>
-                  <a:srgbClr val="000000"/>
-                </a:solidFill>
-                <a:latin typeface="Open Sauce Bold"/>
-                <a:ea typeface="Open Sauce Bold"/>
-                <a:cs typeface="Open Sauce Bold"/>
-                <a:sym typeface="Open Sauce Bold"/>
-              </a:rPr>
-              <a:t>rks</a:t>
-            </a:r>
-            <a:r>
-              <a:rPr lang="en-US" b="true" sz="2400" strike="noStrike" u="none">
-                <a:solidFill>
-                  <a:srgbClr val="000000"/>
-                </a:solidFill>
-                <a:latin typeface="Open Sauce Bold"/>
-                <a:ea typeface="Open Sauce Bold"/>
-                <a:cs typeface="Open Sauce Bold"/>
-                <a:sym typeface="Open Sauce Bold"/>
-              </a:rPr>
-              <a:t>h</a:t>
-            </a:r>
-            <a:r>
-              <a:rPr lang="en-US" b="true" sz="2400" strike="noStrike" u="none">
-                <a:solidFill>
-                  <a:srgbClr val="000000"/>
-                </a:solidFill>
-                <a:latin typeface="Open Sauce Bold"/>
-                <a:ea typeface="Open Sauce Bold"/>
-                <a:cs typeface="Open Sauce Bold"/>
-                <a:sym typeface="Open Sauce Bold"/>
-              </a:rPr>
-              <a:t>ops</a:t>
-            </a:r>
-            <a:r>
-              <a:rPr lang="en-US" b="true" sz="2400" strike="noStrike" u="none">
-                <a:solidFill>
-                  <a:srgbClr val="000000"/>
-                </a:solidFill>
-                <a:latin typeface="Open Sauce Bold"/>
-                <a:ea typeface="Open Sauce Bold"/>
-                <a:cs typeface="Open Sauce Bold"/>
-                <a:sym typeface="Open Sauce Bold"/>
-              </a:rPr>
-              <a:t> </a:t>
-            </a:r>
-            <a:r>
-              <a:rPr lang="en-US" b="true" sz="2400" strike="noStrike" u="none">
-                <a:solidFill>
-                  <a:srgbClr val="000000"/>
-                </a:solidFill>
-                <a:latin typeface="Open Sauce Bold"/>
-                <a:ea typeface="Open Sauce Bold"/>
-                <a:cs typeface="Open Sauce Bold"/>
-                <a:sym typeface="Open Sauce Bold"/>
-              </a:rPr>
-              <a:t>&amp; Tr</a:t>
-            </a:r>
-            <a:r>
-              <a:rPr lang="en-US" b="true" sz="2400" strike="noStrike" u="none">
-                <a:solidFill>
-                  <a:srgbClr val="000000"/>
-                </a:solidFill>
-                <a:latin typeface="Open Sauce Bold"/>
-                <a:ea typeface="Open Sauce Bold"/>
-                <a:cs typeface="Open Sauce Bold"/>
-                <a:sym typeface="Open Sauce Bold"/>
-              </a:rPr>
-              <a:t>ain</a:t>
-            </a:r>
-            <a:r>
-              <a:rPr lang="en-US" b="true" sz="2400" strike="noStrike" u="none">
-                <a:solidFill>
-                  <a:srgbClr val="000000"/>
-                </a:solidFill>
-                <a:latin typeface="Open Sauce Bold"/>
-                <a:ea typeface="Open Sauce Bold"/>
-                <a:cs typeface="Open Sauce Bold"/>
-                <a:sym typeface="Open Sauce Bold"/>
-              </a:rPr>
-              <a:t>ing fo</a:t>
-            </a:r>
-            <a:r>
-              <a:rPr lang="en-US" b="true" sz="2400" strike="noStrike" u="none">
-                <a:solidFill>
-                  <a:srgbClr val="000000"/>
-                </a:solidFill>
-                <a:latin typeface="Open Sauce Bold"/>
-                <a:ea typeface="Open Sauce Bold"/>
-                <a:cs typeface="Open Sauce Bold"/>
-                <a:sym typeface="Open Sauce Bold"/>
-              </a:rPr>
-              <a:t>r </a:t>
-            </a:r>
-            <a:r>
-              <a:rPr lang="en-US" b="true" sz="2400" strike="noStrike" u="none">
-                <a:solidFill>
-                  <a:srgbClr val="000000"/>
-                </a:solidFill>
-                <a:latin typeface="Open Sauce Bold"/>
-                <a:ea typeface="Open Sauce Bold"/>
-                <a:cs typeface="Open Sauce Bold"/>
-                <a:sym typeface="Open Sauce Bold"/>
-              </a:rPr>
-              <a:t>In-Hous</a:t>
-            </a:r>
-            <a:r>
-              <a:rPr lang="en-US" b="true" sz="2400" strike="noStrike" u="none">
-                <a:solidFill>
-                  <a:srgbClr val="000000"/>
-                </a:solidFill>
-                <a:latin typeface="Open Sauce Bold"/>
-                <a:ea typeface="Open Sauce Bold"/>
-                <a:cs typeface="Open Sauce Bold"/>
-                <a:sym typeface="Open Sauce Bold"/>
-              </a:rPr>
-              <a:t>e</a:t>
-            </a:r>
-            <a:r>
-              <a:rPr lang="en-US" b="true" sz="2400" strike="noStrike" u="none">
-                <a:solidFill>
-                  <a:srgbClr val="000000"/>
-                </a:solidFill>
-                <a:latin typeface="Open Sauce Bold"/>
-                <a:ea typeface="Open Sauce Bold"/>
-                <a:cs typeface="Open Sauce Bold"/>
-                <a:sym typeface="Open Sauce Bold"/>
-              </a:rPr>
-              <a:t> Team</a:t>
-            </a:r>
-            <a:r>
-              <a:rPr lang="en-US" b="true" sz="2400" strike="noStrike" u="none">
-                <a:solidFill>
-                  <a:srgbClr val="000000"/>
-                </a:solidFill>
-                <a:latin typeface="Open Sauce Bold"/>
-                <a:ea typeface="Open Sauce Bold"/>
-                <a:cs typeface="Open Sauce Bold"/>
-                <a:sym typeface="Open Sauce Bold"/>
-              </a:rPr>
-              <a:t>s</a:t>
-            </a:r>
-          </a:p>
+          <a:p/>
         </p:txBody>
       </p:sp>
       <p:sp>
@@ -12543,846 +7845,7 @@
             <a:spAutoFit/>
           </a:bodyPr>
           <a:lstStyle/>
-          <a:p>
-            <a:pPr algn="l" marL="388620" indent="-194310" lvl="1">
-              <a:lnSpc>
-                <a:spcPts val="2880"/>
-              </a:lnSpc>
-              <a:buFont typeface="Arial"/>
-              <a:buChar char="•"/>
-            </a:pPr>
-            <a:r>
-              <a:rPr lang="en-US" sz="1800">
-                <a:solidFill>
-                  <a:srgbClr val="000000"/>
-                </a:solidFill>
-                <a:latin typeface="Open Sauce"/>
-                <a:ea typeface="Open Sauce"/>
-                <a:cs typeface="Open Sauce"/>
-                <a:sym typeface="Open Sauce"/>
-              </a:rPr>
-              <a:t>Interactive, skill-based training: SEO, so</a:t>
-            </a:r>
-            <a:r>
-              <a:rPr lang="en-US" sz="1800">
-                <a:solidFill>
-                  <a:srgbClr val="000000"/>
-                </a:solidFill>
-                <a:latin typeface="Open Sauce"/>
-                <a:ea typeface="Open Sauce"/>
-                <a:cs typeface="Open Sauce"/>
-                <a:sym typeface="Open Sauce"/>
-              </a:rPr>
-              <a:t>cial med</a:t>
-            </a:r>
-            <a:r>
-              <a:rPr lang="en-US" sz="1800" strike="noStrike" u="none">
-                <a:solidFill>
-                  <a:srgbClr val="000000"/>
-                </a:solidFill>
-                <a:latin typeface="Open Sauce"/>
-                <a:ea typeface="Open Sauce"/>
-                <a:cs typeface="Open Sauce"/>
-                <a:sym typeface="Open Sauce"/>
-              </a:rPr>
-              <a:t>ia strategy, content </a:t>
-            </a:r>
-            <a:r>
-              <a:rPr lang="en-US" sz="1800" strike="noStrike" u="none">
-                <a:solidFill>
-                  <a:srgbClr val="000000"/>
-                </a:solidFill>
-                <a:latin typeface="Open Sauce"/>
-                <a:ea typeface="Open Sauce"/>
-                <a:cs typeface="Open Sauce"/>
-                <a:sym typeface="Open Sauce"/>
-              </a:rPr>
-              <a:t>pl</a:t>
-            </a:r>
-            <a:r>
-              <a:rPr lang="en-US" sz="1800" strike="noStrike" u="none">
-                <a:solidFill>
-                  <a:srgbClr val="000000"/>
-                </a:solidFill>
-                <a:latin typeface="Open Sauce"/>
-                <a:ea typeface="Open Sauce"/>
-                <a:cs typeface="Open Sauce"/>
-                <a:sym typeface="Open Sauce"/>
-              </a:rPr>
-              <a:t>a</a:t>
-            </a:r>
-            <a:r>
-              <a:rPr lang="en-US" sz="1800" strike="noStrike" u="none">
-                <a:solidFill>
-                  <a:srgbClr val="000000"/>
-                </a:solidFill>
-                <a:latin typeface="Open Sauce"/>
-                <a:ea typeface="Open Sauce"/>
-                <a:cs typeface="Open Sauce"/>
-                <a:sym typeface="Open Sauce"/>
-              </a:rPr>
-              <a:t>nn</a:t>
-            </a:r>
-            <a:r>
-              <a:rPr lang="en-US" sz="1800" strike="noStrike" u="none">
-                <a:solidFill>
-                  <a:srgbClr val="000000"/>
-                </a:solidFill>
-                <a:latin typeface="Open Sauce"/>
-                <a:ea typeface="Open Sauce"/>
-                <a:cs typeface="Open Sauce"/>
-                <a:sym typeface="Open Sauce"/>
-              </a:rPr>
-              <a:t>ing, rep</a:t>
-            </a:r>
-            <a:r>
-              <a:rPr lang="en-US" sz="1800" strike="noStrike" u="none">
-                <a:solidFill>
-                  <a:srgbClr val="000000"/>
-                </a:solidFill>
-                <a:latin typeface="Open Sauce"/>
-                <a:ea typeface="Open Sauce"/>
-                <a:cs typeface="Open Sauce"/>
-                <a:sym typeface="Open Sauce"/>
-              </a:rPr>
-              <a:t>ort</a:t>
-            </a:r>
-            <a:r>
-              <a:rPr lang="en-US" sz="1800" strike="noStrike" u="none">
-                <a:solidFill>
-                  <a:srgbClr val="000000"/>
-                </a:solidFill>
-                <a:latin typeface="Open Sauce"/>
-                <a:ea typeface="Open Sauce"/>
-                <a:cs typeface="Open Sauce"/>
-                <a:sym typeface="Open Sauce"/>
-              </a:rPr>
-              <a:t>i</a:t>
-            </a:r>
-            <a:r>
-              <a:rPr lang="en-US" sz="1800" strike="noStrike" u="none">
-                <a:solidFill>
-                  <a:srgbClr val="000000"/>
-                </a:solidFill>
-                <a:latin typeface="Open Sauce"/>
-                <a:ea typeface="Open Sauce"/>
-                <a:cs typeface="Open Sauce"/>
-                <a:sym typeface="Open Sauce"/>
-              </a:rPr>
-              <a:t>n</a:t>
-            </a:r>
-            <a:r>
-              <a:rPr lang="en-US" sz="1800" strike="noStrike" u="none">
-                <a:solidFill>
-                  <a:srgbClr val="000000"/>
-                </a:solidFill>
-                <a:latin typeface="Open Sauce"/>
-                <a:ea typeface="Open Sauce"/>
-                <a:cs typeface="Open Sauce"/>
-                <a:sym typeface="Open Sauce"/>
-              </a:rPr>
-              <a:t>g</a:t>
-            </a:r>
-          </a:p>
-          <a:p>
-            <a:pPr algn="l" marL="388620" indent="-194310" lvl="1">
-              <a:lnSpc>
-                <a:spcPts val="2880"/>
-              </a:lnSpc>
-              <a:buFont typeface="Arial"/>
-              <a:buChar char="•"/>
-            </a:pPr>
-            <a:r>
-              <a:rPr lang="en-US" sz="1800" strike="noStrike" u="none">
-                <a:solidFill>
-                  <a:srgbClr val="000000"/>
-                </a:solidFill>
-                <a:latin typeface="Open Sauce"/>
-                <a:ea typeface="Open Sauce"/>
-                <a:cs typeface="Open Sauce"/>
-                <a:sym typeface="Open Sauce"/>
-              </a:rPr>
-              <a:t>Delivered</a:t>
-            </a:r>
-            <a:r>
-              <a:rPr lang="en-US" sz="1800" strike="noStrike" u="none">
-                <a:solidFill>
-                  <a:srgbClr val="000000"/>
-                </a:solidFill>
-                <a:latin typeface="Open Sauce"/>
-                <a:ea typeface="Open Sauce"/>
-                <a:cs typeface="Open Sauce"/>
-                <a:sym typeface="Open Sauce"/>
-              </a:rPr>
-              <a:t> </a:t>
-            </a:r>
-            <a:r>
-              <a:rPr lang="en-US" sz="1800" strike="noStrike" u="none">
-                <a:solidFill>
-                  <a:srgbClr val="000000"/>
-                </a:solidFill>
-                <a:latin typeface="Open Sauce"/>
-                <a:ea typeface="Open Sauce"/>
-                <a:cs typeface="Open Sauce"/>
-                <a:sym typeface="Open Sauce"/>
-              </a:rPr>
-              <a:t>vi</a:t>
-            </a:r>
-            <a:r>
-              <a:rPr lang="en-US" sz="1800" strike="noStrike" u="none">
-                <a:solidFill>
-                  <a:srgbClr val="000000"/>
-                </a:solidFill>
-                <a:latin typeface="Open Sauce"/>
-                <a:ea typeface="Open Sauce"/>
-                <a:cs typeface="Open Sauce"/>
-                <a:sym typeface="Open Sauce"/>
-              </a:rPr>
-              <a:t>a</a:t>
-            </a:r>
-            <a:r>
-              <a:rPr lang="en-US" sz="1800" strike="noStrike" u="none">
-                <a:solidFill>
-                  <a:srgbClr val="000000"/>
-                </a:solidFill>
-                <a:latin typeface="Open Sauce"/>
-                <a:ea typeface="Open Sauce"/>
-                <a:cs typeface="Open Sauce"/>
-                <a:sym typeface="Open Sauce"/>
-              </a:rPr>
-              <a:t> webi</a:t>
-            </a:r>
-            <a:r>
-              <a:rPr lang="en-US" sz="1800" strike="noStrike" u="none">
-                <a:solidFill>
-                  <a:srgbClr val="000000"/>
-                </a:solidFill>
-                <a:latin typeface="Open Sauce"/>
-                <a:ea typeface="Open Sauce"/>
-                <a:cs typeface="Open Sauce"/>
-                <a:sym typeface="Open Sauce"/>
-              </a:rPr>
-              <a:t>na</a:t>
-            </a:r>
-            <a:r>
-              <a:rPr lang="en-US" sz="1800" strike="noStrike" u="none">
-                <a:solidFill>
-                  <a:srgbClr val="000000"/>
-                </a:solidFill>
-                <a:latin typeface="Open Sauce"/>
-                <a:ea typeface="Open Sauce"/>
-                <a:cs typeface="Open Sauce"/>
-                <a:sym typeface="Open Sauce"/>
-              </a:rPr>
-              <a:t>rs, vid</a:t>
-            </a:r>
-            <a:r>
-              <a:rPr lang="en-US" sz="1800" strike="noStrike" u="none">
-                <a:solidFill>
-                  <a:srgbClr val="000000"/>
-                </a:solidFill>
-                <a:latin typeface="Open Sauce"/>
-                <a:ea typeface="Open Sauce"/>
-                <a:cs typeface="Open Sauce"/>
-                <a:sym typeface="Open Sauce"/>
-              </a:rPr>
-              <a:t>eo m</a:t>
-            </a:r>
-            <a:r>
-              <a:rPr lang="en-US" sz="1800" strike="noStrike" u="none">
-                <a:solidFill>
-                  <a:srgbClr val="000000"/>
-                </a:solidFill>
-                <a:latin typeface="Open Sauce"/>
-                <a:ea typeface="Open Sauce"/>
-                <a:cs typeface="Open Sauce"/>
-                <a:sym typeface="Open Sauce"/>
-              </a:rPr>
-              <a:t>odul</a:t>
-            </a:r>
-            <a:r>
-              <a:rPr lang="en-US" sz="1800" strike="noStrike" u="none">
-                <a:solidFill>
-                  <a:srgbClr val="000000"/>
-                </a:solidFill>
-                <a:latin typeface="Open Sauce"/>
-                <a:ea typeface="Open Sauce"/>
-                <a:cs typeface="Open Sauce"/>
-                <a:sym typeface="Open Sauce"/>
-              </a:rPr>
-              <a:t>e</a:t>
-            </a:r>
-            <a:r>
-              <a:rPr lang="en-US" sz="1800" strike="noStrike" u="none">
-                <a:solidFill>
-                  <a:srgbClr val="000000"/>
-                </a:solidFill>
-                <a:latin typeface="Open Sauce"/>
-                <a:ea typeface="Open Sauce"/>
-                <a:cs typeface="Open Sauce"/>
-                <a:sym typeface="Open Sauce"/>
-              </a:rPr>
-              <a:t>s, or o</a:t>
-            </a:r>
-            <a:r>
-              <a:rPr lang="en-US" sz="1800" strike="noStrike" u="none">
-                <a:solidFill>
-                  <a:srgbClr val="000000"/>
-                </a:solidFill>
-                <a:latin typeface="Open Sauce"/>
-                <a:ea typeface="Open Sauce"/>
-                <a:cs typeface="Open Sauce"/>
-                <a:sym typeface="Open Sauce"/>
-              </a:rPr>
-              <a:t>n</a:t>
-            </a:r>
-            <a:r>
-              <a:rPr lang="en-US" sz="1800" strike="noStrike" u="none">
-                <a:solidFill>
-                  <a:srgbClr val="000000"/>
-                </a:solidFill>
-                <a:latin typeface="Open Sauce"/>
-                <a:ea typeface="Open Sauce"/>
-                <a:cs typeface="Open Sauce"/>
-                <a:sym typeface="Open Sauce"/>
-              </a:rPr>
-              <a:t>-si</a:t>
-            </a:r>
-            <a:r>
-              <a:rPr lang="en-US" sz="1800" strike="noStrike" u="none">
-                <a:solidFill>
-                  <a:srgbClr val="000000"/>
-                </a:solidFill>
-                <a:latin typeface="Open Sauce"/>
-                <a:ea typeface="Open Sauce"/>
-                <a:cs typeface="Open Sauce"/>
-                <a:sym typeface="Open Sauce"/>
-              </a:rPr>
-              <a:t>te </a:t>
-            </a:r>
-            <a:r>
-              <a:rPr lang="en-US" sz="1800" strike="noStrike" u="none">
-                <a:solidFill>
-                  <a:srgbClr val="000000"/>
-                </a:solidFill>
-                <a:latin typeface="Open Sauce"/>
-                <a:ea typeface="Open Sauce"/>
-                <a:cs typeface="Open Sauce"/>
-                <a:sym typeface="Open Sauce"/>
-              </a:rPr>
-              <a:t>s</a:t>
-            </a:r>
-            <a:r>
-              <a:rPr lang="en-US" sz="1800" strike="noStrike" u="none">
-                <a:solidFill>
-                  <a:srgbClr val="000000"/>
-                </a:solidFill>
-                <a:latin typeface="Open Sauce"/>
-                <a:ea typeface="Open Sauce"/>
-                <a:cs typeface="Open Sauce"/>
-                <a:sym typeface="Open Sauce"/>
-              </a:rPr>
-              <a:t>e</a:t>
-            </a:r>
-            <a:r>
-              <a:rPr lang="en-US" sz="1800" strike="noStrike" u="none">
-                <a:solidFill>
-                  <a:srgbClr val="000000"/>
-                </a:solidFill>
-                <a:latin typeface="Open Sauce"/>
-                <a:ea typeface="Open Sauce"/>
-                <a:cs typeface="Open Sauce"/>
-                <a:sym typeface="Open Sauce"/>
-              </a:rPr>
-              <a:t>ssions</a:t>
-            </a:r>
-          </a:p>
-          <a:p>
-            <a:pPr algn="l" marL="388620" indent="-194310" lvl="1">
-              <a:lnSpc>
-                <a:spcPts val="2880"/>
-              </a:lnSpc>
-              <a:buFont typeface="Arial"/>
-              <a:buChar char="•"/>
-            </a:pPr>
-            <a:r>
-              <a:rPr lang="en-US" sz="1800" strike="noStrike" u="none">
-                <a:solidFill>
-                  <a:srgbClr val="000000"/>
-                </a:solidFill>
-                <a:latin typeface="Open Sauce"/>
-                <a:ea typeface="Open Sauce"/>
-                <a:cs typeface="Open Sauce"/>
-                <a:sym typeface="Open Sauce"/>
-              </a:rPr>
-              <a:t>Gr</a:t>
-            </a:r>
-            <a:r>
-              <a:rPr lang="en-US" sz="1800" strike="noStrike" u="none">
-                <a:solidFill>
-                  <a:srgbClr val="000000"/>
-                </a:solidFill>
-                <a:latin typeface="Open Sauce"/>
-                <a:ea typeface="Open Sauce"/>
-                <a:cs typeface="Open Sauce"/>
-                <a:sym typeface="Open Sauce"/>
-              </a:rPr>
-              <a:t>ea</a:t>
-            </a:r>
-            <a:r>
-              <a:rPr lang="en-US" sz="1800" strike="noStrike" u="none">
-                <a:solidFill>
-                  <a:srgbClr val="000000"/>
-                </a:solidFill>
-                <a:latin typeface="Open Sauce"/>
-                <a:ea typeface="Open Sauce"/>
-                <a:cs typeface="Open Sauce"/>
-                <a:sym typeface="Open Sauce"/>
-              </a:rPr>
-              <a:t>t</a:t>
-            </a:r>
-            <a:r>
-              <a:rPr lang="en-US" sz="1800" strike="noStrike" u="none">
-                <a:solidFill>
-                  <a:srgbClr val="000000"/>
-                </a:solidFill>
-                <a:latin typeface="Open Sauce"/>
-                <a:ea typeface="Open Sauce"/>
-                <a:cs typeface="Open Sauce"/>
-                <a:sym typeface="Open Sauce"/>
-              </a:rPr>
-              <a:t> for businesses </a:t>
-            </a:r>
-            <a:r>
-              <a:rPr lang="en-US" sz="1800" strike="noStrike" u="none">
-                <a:solidFill>
-                  <a:srgbClr val="000000"/>
-                </a:solidFill>
-                <a:latin typeface="Open Sauce"/>
-                <a:ea typeface="Open Sauce"/>
-                <a:cs typeface="Open Sauce"/>
-                <a:sym typeface="Open Sauce"/>
-              </a:rPr>
-              <a:t>buil</a:t>
-            </a:r>
-            <a:r>
-              <a:rPr lang="en-US" sz="1800" strike="noStrike" u="none">
-                <a:solidFill>
-                  <a:srgbClr val="000000"/>
-                </a:solidFill>
-                <a:latin typeface="Open Sauce"/>
-                <a:ea typeface="Open Sauce"/>
-                <a:cs typeface="Open Sauce"/>
-                <a:sym typeface="Open Sauce"/>
-              </a:rPr>
-              <a:t>ding internal mar</a:t>
-            </a:r>
-            <a:r>
-              <a:rPr lang="en-US" sz="1800" strike="noStrike" u="none">
-                <a:solidFill>
-                  <a:srgbClr val="000000"/>
-                </a:solidFill>
-                <a:latin typeface="Open Sauce"/>
-                <a:ea typeface="Open Sauce"/>
-                <a:cs typeface="Open Sauce"/>
-                <a:sym typeface="Open Sauce"/>
-              </a:rPr>
-              <a:t>ke</a:t>
-            </a:r>
-            <a:r>
-              <a:rPr lang="en-US" sz="1800" strike="noStrike" u="none">
-                <a:solidFill>
-                  <a:srgbClr val="000000"/>
-                </a:solidFill>
-                <a:latin typeface="Open Sauce"/>
-                <a:ea typeface="Open Sauce"/>
-                <a:cs typeface="Open Sauce"/>
-                <a:sym typeface="Open Sauce"/>
-              </a:rPr>
-              <a:t>t</a:t>
-            </a:r>
-            <a:r>
-              <a:rPr lang="en-US" sz="1800" strike="noStrike" u="none">
-                <a:solidFill>
-                  <a:srgbClr val="000000"/>
-                </a:solidFill>
-                <a:latin typeface="Open Sauce"/>
-                <a:ea typeface="Open Sauce"/>
-                <a:cs typeface="Open Sauce"/>
-                <a:sym typeface="Open Sauce"/>
-              </a:rPr>
-              <a:t>i</a:t>
-            </a:r>
-            <a:r>
-              <a:rPr lang="en-US" sz="1800" strike="noStrike" u="none">
-                <a:solidFill>
-                  <a:srgbClr val="000000"/>
-                </a:solidFill>
-                <a:latin typeface="Open Sauce"/>
-                <a:ea typeface="Open Sauce"/>
-                <a:cs typeface="Open Sauce"/>
-                <a:sym typeface="Open Sauce"/>
-              </a:rPr>
-              <a:t>n</a:t>
-            </a:r>
-            <a:r>
-              <a:rPr lang="en-US" sz="1800" strike="noStrike" u="none">
-                <a:solidFill>
-                  <a:srgbClr val="000000"/>
-                </a:solidFill>
-                <a:latin typeface="Open Sauce"/>
-                <a:ea typeface="Open Sauce"/>
-                <a:cs typeface="Open Sauce"/>
-                <a:sym typeface="Open Sauce"/>
-              </a:rPr>
-              <a:t>g</a:t>
-            </a:r>
-            <a:r>
-              <a:rPr lang="en-US" sz="1800" strike="noStrike" u="none">
-                <a:solidFill>
-                  <a:srgbClr val="000000"/>
-                </a:solidFill>
-                <a:latin typeface="Open Sauce"/>
-                <a:ea typeface="Open Sauce"/>
-                <a:cs typeface="Open Sauce"/>
-                <a:sym typeface="Open Sauce"/>
-              </a:rPr>
-              <a:t> </a:t>
-            </a:r>
-            <a:r>
-              <a:rPr lang="en-US" sz="1800" strike="noStrike" u="none">
-                <a:solidFill>
-                  <a:srgbClr val="000000"/>
-                </a:solidFill>
-                <a:latin typeface="Open Sauce"/>
-                <a:ea typeface="Open Sauce"/>
-                <a:cs typeface="Open Sauce"/>
-                <a:sym typeface="Open Sauce"/>
-              </a:rPr>
-              <a:t>c</a:t>
-            </a:r>
-            <a:r>
-              <a:rPr lang="en-US" sz="1800" strike="noStrike" u="none">
-                <a:solidFill>
-                  <a:srgbClr val="000000"/>
-                </a:solidFill>
-                <a:latin typeface="Open Sauce"/>
-                <a:ea typeface="Open Sauce"/>
-                <a:cs typeface="Open Sauce"/>
-                <a:sym typeface="Open Sauce"/>
-              </a:rPr>
-              <a:t>a</a:t>
-            </a:r>
-            <a:r>
-              <a:rPr lang="en-US" sz="1800" strike="noStrike" u="none">
-                <a:solidFill>
-                  <a:srgbClr val="000000"/>
-                </a:solidFill>
-                <a:latin typeface="Open Sauce"/>
-                <a:ea typeface="Open Sauce"/>
-                <a:cs typeface="Open Sauce"/>
-                <a:sym typeface="Open Sauce"/>
-              </a:rPr>
-              <a:t>p</a:t>
-            </a:r>
-            <a:r>
-              <a:rPr lang="en-US" sz="1800" strike="noStrike" u="none">
-                <a:solidFill>
-                  <a:srgbClr val="000000"/>
-                </a:solidFill>
-                <a:latin typeface="Open Sauce"/>
-                <a:ea typeface="Open Sauce"/>
-                <a:cs typeface="Open Sauce"/>
-                <a:sym typeface="Open Sauce"/>
-              </a:rPr>
-              <a:t>ab</a:t>
-            </a:r>
-            <a:r>
-              <a:rPr lang="en-US" sz="1800" strike="noStrike" u="none">
-                <a:solidFill>
-                  <a:srgbClr val="000000"/>
-                </a:solidFill>
-                <a:latin typeface="Open Sauce"/>
-                <a:ea typeface="Open Sauce"/>
-                <a:cs typeface="Open Sauce"/>
-                <a:sym typeface="Open Sauce"/>
-              </a:rPr>
-              <a:t>i</a:t>
-            </a:r>
-            <a:r>
-              <a:rPr lang="en-US" sz="1800" strike="noStrike" u="none">
-                <a:solidFill>
-                  <a:srgbClr val="000000"/>
-                </a:solidFill>
-                <a:latin typeface="Open Sauce"/>
-                <a:ea typeface="Open Sauce"/>
-                <a:cs typeface="Open Sauce"/>
-                <a:sym typeface="Open Sauce"/>
-              </a:rPr>
-              <a:t>l</a:t>
-            </a:r>
-            <a:r>
-              <a:rPr lang="en-US" sz="1800" strike="noStrike" u="none">
-                <a:solidFill>
-                  <a:srgbClr val="000000"/>
-                </a:solidFill>
-                <a:latin typeface="Open Sauce"/>
-                <a:ea typeface="Open Sauce"/>
-                <a:cs typeface="Open Sauce"/>
-                <a:sym typeface="Open Sauce"/>
-              </a:rPr>
-              <a:t>ity</a:t>
-            </a:r>
-          </a:p>
-          <a:p>
-            <a:pPr algn="l" marL="388620" indent="-194310" lvl="1">
-              <a:lnSpc>
-                <a:spcPts val="2880"/>
-              </a:lnSpc>
-              <a:buFont typeface="Arial"/>
-              <a:buChar char="•"/>
-            </a:pPr>
-            <a:r>
-              <a:rPr lang="en-US" sz="1800" strike="noStrike" u="none">
-                <a:solidFill>
-                  <a:srgbClr val="000000"/>
-                </a:solidFill>
-                <a:latin typeface="Open Sauce"/>
-                <a:ea typeface="Open Sauce"/>
-                <a:cs typeface="Open Sauce"/>
-                <a:sym typeface="Open Sauce"/>
-              </a:rPr>
-              <a:t>R</a:t>
-            </a:r>
-            <a:r>
-              <a:rPr lang="en-US" sz="1800" strike="noStrike" u="none">
-                <a:solidFill>
-                  <a:srgbClr val="000000"/>
-                </a:solidFill>
-                <a:latin typeface="Open Sauce"/>
-                <a:ea typeface="Open Sauce"/>
-                <a:cs typeface="Open Sauce"/>
-                <a:sym typeface="Open Sauce"/>
-              </a:rPr>
-              <a:t>e</a:t>
-            </a:r>
-            <a:r>
-              <a:rPr lang="en-US" sz="1800" strike="noStrike" u="none">
-                <a:solidFill>
-                  <a:srgbClr val="000000"/>
-                </a:solidFill>
-                <a:latin typeface="Open Sauce"/>
-                <a:ea typeface="Open Sauce"/>
-                <a:cs typeface="Open Sauce"/>
-                <a:sym typeface="Open Sauce"/>
-              </a:rPr>
-              <a:t>v</a:t>
-            </a:r>
-            <a:r>
-              <a:rPr lang="en-US" sz="1800" strike="noStrike" u="none">
-                <a:solidFill>
-                  <a:srgbClr val="000000"/>
-                </a:solidFill>
-                <a:latin typeface="Open Sauce"/>
-                <a:ea typeface="Open Sauce"/>
-                <a:cs typeface="Open Sauce"/>
-                <a:sym typeface="Open Sauce"/>
-              </a:rPr>
-              <a:t>e</a:t>
-            </a:r>
-            <a:r>
-              <a:rPr lang="en-US" sz="1800" strike="noStrike" u="none">
-                <a:solidFill>
-                  <a:srgbClr val="000000"/>
-                </a:solidFill>
-                <a:latin typeface="Open Sauce"/>
-                <a:ea typeface="Open Sauce"/>
-                <a:cs typeface="Open Sauce"/>
-                <a:sym typeface="Open Sauce"/>
-              </a:rPr>
-              <a:t>n</a:t>
-            </a:r>
-            <a:r>
-              <a:rPr lang="en-US" sz="1800" strike="noStrike" u="none">
-                <a:solidFill>
-                  <a:srgbClr val="000000"/>
-                </a:solidFill>
-                <a:latin typeface="Open Sauce"/>
-                <a:ea typeface="Open Sauce"/>
-                <a:cs typeface="Open Sauce"/>
-                <a:sym typeface="Open Sauce"/>
-              </a:rPr>
-              <a:t>ue </a:t>
-            </a:r>
-            <a:r>
-              <a:rPr lang="en-US" sz="1800" strike="noStrike" u="none">
-                <a:solidFill>
-                  <a:srgbClr val="000000"/>
-                </a:solidFill>
-                <a:latin typeface="Open Sauce"/>
-                <a:ea typeface="Open Sauce"/>
-                <a:cs typeface="Open Sauce"/>
-                <a:sym typeface="Open Sauce"/>
-              </a:rPr>
-              <a:t>s</a:t>
-            </a:r>
-            <a:r>
-              <a:rPr lang="en-US" sz="1800" strike="noStrike" u="none">
-                <a:solidFill>
-                  <a:srgbClr val="000000"/>
-                </a:solidFill>
-                <a:latin typeface="Open Sauce"/>
-                <a:ea typeface="Open Sauce"/>
-                <a:cs typeface="Open Sauce"/>
-                <a:sym typeface="Open Sauce"/>
-              </a:rPr>
-              <a:t>tre</a:t>
-            </a:r>
-            <a:r>
-              <a:rPr lang="en-US" sz="1800" strike="noStrike" u="none">
-                <a:solidFill>
-                  <a:srgbClr val="000000"/>
-                </a:solidFill>
-                <a:latin typeface="Open Sauce"/>
-                <a:ea typeface="Open Sauce"/>
-                <a:cs typeface="Open Sauce"/>
-                <a:sym typeface="Open Sauce"/>
-              </a:rPr>
-              <a:t>am </a:t>
-            </a:r>
-            <a:r>
-              <a:rPr lang="en-US" sz="1800" strike="noStrike" u="none">
-                <a:solidFill>
-                  <a:srgbClr val="000000"/>
-                </a:solidFill>
-                <a:latin typeface="Open Sauce"/>
-                <a:ea typeface="Open Sauce"/>
-                <a:cs typeface="Open Sauce"/>
-                <a:sym typeface="Open Sauce"/>
-              </a:rPr>
-              <a:t>t</a:t>
-            </a:r>
-            <a:r>
-              <a:rPr lang="en-US" sz="1800" strike="noStrike" u="none">
-                <a:solidFill>
-                  <a:srgbClr val="000000"/>
-                </a:solidFill>
-                <a:latin typeface="Open Sauce"/>
-                <a:ea typeface="Open Sauce"/>
-                <a:cs typeface="Open Sauce"/>
-                <a:sym typeface="Open Sauce"/>
-              </a:rPr>
-              <a:t>h</a:t>
-            </a:r>
-            <a:r>
-              <a:rPr lang="en-US" sz="1800" strike="noStrike" u="none">
-                <a:solidFill>
-                  <a:srgbClr val="000000"/>
-                </a:solidFill>
-                <a:latin typeface="Open Sauce"/>
-                <a:ea typeface="Open Sauce"/>
-                <a:cs typeface="Open Sauce"/>
-                <a:sym typeface="Open Sauce"/>
-              </a:rPr>
-              <a:t>a</a:t>
-            </a:r>
-            <a:r>
-              <a:rPr lang="en-US" sz="1800" strike="noStrike" u="none">
-                <a:solidFill>
-                  <a:srgbClr val="000000"/>
-                </a:solidFill>
-                <a:latin typeface="Open Sauce"/>
-                <a:ea typeface="Open Sauce"/>
-                <a:cs typeface="Open Sauce"/>
-                <a:sym typeface="Open Sauce"/>
-              </a:rPr>
-              <a:t>t also </a:t>
-            </a:r>
-            <a:r>
-              <a:rPr lang="en-US" sz="1800" strike="noStrike" u="none">
-                <a:solidFill>
-                  <a:srgbClr val="000000"/>
-                </a:solidFill>
-                <a:latin typeface="Open Sauce"/>
-                <a:ea typeface="Open Sauce"/>
-                <a:cs typeface="Open Sauce"/>
-                <a:sym typeface="Open Sauce"/>
-              </a:rPr>
-              <a:t>b</a:t>
-            </a:r>
-            <a:r>
-              <a:rPr lang="en-US" sz="1800" strike="noStrike" u="none">
-                <a:solidFill>
-                  <a:srgbClr val="000000"/>
-                </a:solidFill>
-                <a:latin typeface="Open Sauce"/>
-                <a:ea typeface="Open Sauce"/>
-                <a:cs typeface="Open Sauce"/>
-                <a:sym typeface="Open Sauce"/>
-              </a:rPr>
-              <a:t>ui</a:t>
-            </a:r>
-            <a:r>
-              <a:rPr lang="en-US" sz="1800" strike="noStrike" u="none">
-                <a:solidFill>
-                  <a:srgbClr val="000000"/>
-                </a:solidFill>
-                <a:latin typeface="Open Sauce"/>
-                <a:ea typeface="Open Sauce"/>
-                <a:cs typeface="Open Sauce"/>
-                <a:sym typeface="Open Sauce"/>
-              </a:rPr>
-              <a:t>l</a:t>
-            </a:r>
-            <a:r>
-              <a:rPr lang="en-US" sz="1800" strike="noStrike" u="none">
-                <a:solidFill>
-                  <a:srgbClr val="000000"/>
-                </a:solidFill>
-                <a:latin typeface="Open Sauce"/>
-                <a:ea typeface="Open Sauce"/>
-                <a:cs typeface="Open Sauce"/>
-                <a:sym typeface="Open Sauce"/>
-              </a:rPr>
-              <a:t>ds</a:t>
-            </a:r>
-            <a:r>
-              <a:rPr lang="en-US" sz="1800" strike="noStrike" u="none">
-                <a:solidFill>
-                  <a:srgbClr val="000000"/>
-                </a:solidFill>
-                <a:latin typeface="Open Sauce"/>
-                <a:ea typeface="Open Sauce"/>
-                <a:cs typeface="Open Sauce"/>
-                <a:sym typeface="Open Sauce"/>
-              </a:rPr>
-              <a:t> </a:t>
-            </a:r>
-            <a:r>
-              <a:rPr lang="en-US" sz="1800" strike="noStrike" u="none">
-                <a:solidFill>
-                  <a:srgbClr val="000000"/>
-                </a:solidFill>
-                <a:latin typeface="Open Sauce"/>
-                <a:ea typeface="Open Sauce"/>
-                <a:cs typeface="Open Sauce"/>
-                <a:sym typeface="Open Sauce"/>
-              </a:rPr>
-              <a:t>b</a:t>
-            </a:r>
-            <a:r>
-              <a:rPr lang="en-US" sz="1800" strike="noStrike" u="none">
-                <a:solidFill>
-                  <a:srgbClr val="000000"/>
-                </a:solidFill>
-                <a:latin typeface="Open Sauce"/>
-                <a:ea typeface="Open Sauce"/>
-                <a:cs typeface="Open Sauce"/>
-                <a:sym typeface="Open Sauce"/>
-              </a:rPr>
-              <a:t>rand authority</a:t>
-            </a:r>
-          </a:p>
+          <a:p/>
         </p:txBody>
       </p:sp>
     </p:spTree>
@@ -13462,6 +7925,10 @@
             <a:miter/>
           </a:ln>
         </p:spPr>
+        <p:txBody>
+          <a:bodyPr/>
+          <a:p/>
+        </p:txBody>
       </p:sp>
       <p:sp>
         <p:nvSpPr>
@@ -13486,6 +7953,10 @@
             <a:tailEnd type="none" len="sm" w="sm"/>
           </a:ln>
         </p:spPr>
+        <p:txBody>
+          <a:bodyPr/>
+          <a:p/>
+        </p:txBody>
       </p:sp>
       <p:graphicFrame>
         <p:nvGraphicFramePr>
@@ -14526,25 +8997,7 @@
             <a:spAutoFit/>
           </a:bodyPr>
           <a:lstStyle/>
-          <a:p>
-            <a:pPr algn="l">
-              <a:lnSpc>
-                <a:spcPts val="8959"/>
-              </a:lnSpc>
-            </a:pPr>
-            <a:r>
-              <a:rPr lang="en-US" sz="6399">
-                <a:solidFill>
-                  <a:srgbClr val="000000"/>
-                </a:solidFill>
-                <a:latin typeface="DM Serif Display"/>
-                <a:ea typeface="DM Serif Display"/>
-                <a:cs typeface="DM Serif Display"/>
-                <a:sym typeface="DM Serif Display"/>
-              </a:rPr>
-              <a:t>Competitive Advantage</a:t>
-            </a:r>
-          </a:p>
+          <a:p/>
         </p:txBody>
       </p:sp>
       <p:sp>
@@ -14567,30 +9020,7 @@
             <a:spAutoFit/>
           </a:bodyPr>
           <a:lstStyle/>
-          <a:p>
-            <a:pPr algn="l" marL="0" indent="0" lvl="0">
-              <a:lnSpc>
-                <a:spcPts val="2239"/>
-              </a:lnSpc>
-              <a:spcBef>
-                <a:spcPct val="0"/>
-              </a:spcBef>
-            </a:pPr>
-            <a:r>
-              <a:rPr lang="en-US" sz="1599" spc="159" strike="noStrike" u="none">
-                <a:solidFill>
-                  <a:srgbClr val="000000">
-                    <a:alpha val="49804"/>
-                  </a:srgbClr>
-                </a:solidFill>
-                <a:latin typeface="Open Sauce"/>
-                <a:ea typeface="Open Sauce"/>
-                <a:cs typeface="Open Sauce"/>
-                <a:sym typeface="Open Sauce"/>
-              </a:rPr>
-              <a:t>STUDIO SHODWE</a:t>
-            </a:r>
-          </a:p>
+          <a:p/>
         </p:txBody>
       </p:sp>
       <p:sp>
@@ -14613,30 +9043,7 @@
             <a:spAutoFit/>
           </a:bodyPr>
           <a:lstStyle/>
-          <a:p>
-            <a:pPr algn="r" marL="0" indent="0" lvl="0">
-              <a:lnSpc>
-                <a:spcPts val="2239"/>
-              </a:lnSpc>
-              <a:spcBef>
-                <a:spcPct val="0"/>
-              </a:spcBef>
-            </a:pPr>
-            <a:r>
-              <a:rPr lang="en-US" sz="1599" spc="159">
-                <a:solidFill>
-                  <a:srgbClr val="000000">
-                    <a:alpha val="49804"/>
-                  </a:srgbClr>
-                </a:solidFill>
-                <a:latin typeface="Open Sauce"/>
-                <a:ea typeface="Open Sauce"/>
-                <a:cs typeface="Open Sauce"/>
-                <a:sym typeface="Open Sauce"/>
-              </a:rPr>
-              <a:t>8</a:t>
-            </a:r>
-          </a:p>
+          <a:p/>
         </p:txBody>
       </p:sp>
       <p:sp>
@@ -14659,460 +9066,7 @@
             <a:spAutoFit/>
           </a:bodyPr>
           <a:lstStyle/>
-          <a:p>
-            <a:pPr algn="l" marL="0" indent="0" lvl="0">
-              <a:lnSpc>
-                <a:spcPts val="3840"/>
-              </a:lnSpc>
-              <a:spcBef>
-                <a:spcPct val="0"/>
-              </a:spcBef>
-            </a:pPr>
-            <a:r>
-              <a:rPr lang="en-US" sz="2400">
-                <a:solidFill>
-                  <a:srgbClr val="000000"/>
-                </a:solidFill>
-                <a:latin typeface="Open Sauce"/>
-                <a:ea typeface="Open Sauce"/>
-                <a:cs typeface="Open Sauce"/>
-                <a:sym typeface="Open Sauce"/>
-              </a:rPr>
-              <a:t>Our</a:t>
-            </a:r>
-            <a:r>
-              <a:rPr lang="en-US" sz="2400" strike="noStrike" u="none">
-                <a:solidFill>
-                  <a:srgbClr val="000000"/>
-                </a:solidFill>
-                <a:latin typeface="Open Sauce"/>
-                <a:ea typeface="Open Sauce"/>
-                <a:cs typeface="Open Sauce"/>
-                <a:sym typeface="Open Sauce"/>
-              </a:rPr>
-              <a:t> </a:t>
-            </a:r>
-            <a:r>
-              <a:rPr lang="en-US" sz="2400" strike="noStrike" u="none">
-                <a:solidFill>
-                  <a:srgbClr val="000000"/>
-                </a:solidFill>
-                <a:latin typeface="Open Sauce"/>
-                <a:ea typeface="Open Sauce"/>
-                <a:cs typeface="Open Sauce"/>
-                <a:sym typeface="Open Sauce"/>
-              </a:rPr>
-              <a:t>appr</a:t>
-            </a:r>
-            <a:r>
-              <a:rPr lang="en-US" sz="2400" strike="noStrike" u="none">
-                <a:solidFill>
-                  <a:srgbClr val="000000"/>
-                </a:solidFill>
-                <a:latin typeface="Open Sauce"/>
-                <a:ea typeface="Open Sauce"/>
-                <a:cs typeface="Open Sauce"/>
-                <a:sym typeface="Open Sauce"/>
-              </a:rPr>
-              <a:t>o</a:t>
-            </a:r>
-            <a:r>
-              <a:rPr lang="en-US" sz="2400" strike="noStrike" u="none">
-                <a:solidFill>
-                  <a:srgbClr val="000000"/>
-                </a:solidFill>
-                <a:latin typeface="Open Sauce"/>
-                <a:ea typeface="Open Sauce"/>
-                <a:cs typeface="Open Sauce"/>
-                <a:sym typeface="Open Sauce"/>
-              </a:rPr>
-              <a:t>ach bl</a:t>
-            </a:r>
-            <a:r>
-              <a:rPr lang="en-US" sz="2400" strike="noStrike" u="none">
-                <a:solidFill>
-                  <a:srgbClr val="000000"/>
-                </a:solidFill>
-                <a:latin typeface="Open Sauce"/>
-                <a:ea typeface="Open Sauce"/>
-                <a:cs typeface="Open Sauce"/>
-                <a:sym typeface="Open Sauce"/>
-              </a:rPr>
-              <a:t>e</a:t>
-            </a:r>
-            <a:r>
-              <a:rPr lang="en-US" sz="2400" strike="noStrike" u="none">
-                <a:solidFill>
-                  <a:srgbClr val="000000"/>
-                </a:solidFill>
-                <a:latin typeface="Open Sauce"/>
-                <a:ea typeface="Open Sauce"/>
-                <a:cs typeface="Open Sauce"/>
-                <a:sym typeface="Open Sauce"/>
-              </a:rPr>
-              <a:t>nds st</a:t>
-            </a:r>
-            <a:r>
-              <a:rPr lang="en-US" sz="2400" strike="noStrike" u="none">
-                <a:solidFill>
-                  <a:srgbClr val="000000"/>
-                </a:solidFill>
-                <a:latin typeface="Open Sauce"/>
-                <a:ea typeface="Open Sauce"/>
-                <a:cs typeface="Open Sauce"/>
-                <a:sym typeface="Open Sauce"/>
-              </a:rPr>
-              <a:t>r</a:t>
-            </a:r>
-            <a:r>
-              <a:rPr lang="en-US" sz="2400" strike="noStrike" u="none">
-                <a:solidFill>
-                  <a:srgbClr val="000000"/>
-                </a:solidFill>
-                <a:latin typeface="Open Sauce"/>
-                <a:ea typeface="Open Sauce"/>
-                <a:cs typeface="Open Sauce"/>
-                <a:sym typeface="Open Sauce"/>
-              </a:rPr>
-              <a:t>ategic</a:t>
-            </a:r>
-            <a:r>
-              <a:rPr lang="en-US" sz="2400" strike="noStrike" u="none">
-                <a:solidFill>
-                  <a:srgbClr val="000000"/>
-                </a:solidFill>
-                <a:latin typeface="Open Sauce"/>
-                <a:ea typeface="Open Sauce"/>
-                <a:cs typeface="Open Sauce"/>
-                <a:sym typeface="Open Sauce"/>
-              </a:rPr>
-              <a:t> </a:t>
-            </a:r>
-            <a:r>
-              <a:rPr lang="en-US" sz="2400" strike="noStrike" u="none">
-                <a:solidFill>
-                  <a:srgbClr val="000000"/>
-                </a:solidFill>
-                <a:latin typeface="Open Sauce"/>
-                <a:ea typeface="Open Sauce"/>
-                <a:cs typeface="Open Sauce"/>
-                <a:sym typeface="Open Sauce"/>
-              </a:rPr>
-              <a:t>insight, creative </a:t>
-            </a:r>
-            <a:r>
-              <a:rPr lang="en-US" sz="2400" strike="noStrike" u="none">
-                <a:solidFill>
-                  <a:srgbClr val="000000"/>
-                </a:solidFill>
-                <a:latin typeface="Open Sauce"/>
-                <a:ea typeface="Open Sauce"/>
-                <a:cs typeface="Open Sauce"/>
-                <a:sym typeface="Open Sauce"/>
-              </a:rPr>
-              <a:t>ex</a:t>
-            </a:r>
-            <a:r>
-              <a:rPr lang="en-US" sz="2400" strike="noStrike" u="none">
-                <a:solidFill>
-                  <a:srgbClr val="000000"/>
-                </a:solidFill>
-                <a:latin typeface="Open Sauce"/>
-                <a:ea typeface="Open Sauce"/>
-                <a:cs typeface="Open Sauce"/>
-                <a:sym typeface="Open Sauce"/>
-              </a:rPr>
-              <a:t>ecut</a:t>
-            </a:r>
-            <a:r>
-              <a:rPr lang="en-US" sz="2400" strike="noStrike" u="none">
-                <a:solidFill>
-                  <a:srgbClr val="000000"/>
-                </a:solidFill>
-                <a:latin typeface="Open Sauce"/>
-                <a:ea typeface="Open Sauce"/>
-                <a:cs typeface="Open Sauce"/>
-                <a:sym typeface="Open Sauce"/>
-              </a:rPr>
-              <a:t>i</a:t>
-            </a:r>
-            <a:r>
-              <a:rPr lang="en-US" sz="2400" strike="noStrike" u="none">
-                <a:solidFill>
-                  <a:srgbClr val="000000"/>
-                </a:solidFill>
-                <a:latin typeface="Open Sauce"/>
-                <a:ea typeface="Open Sauce"/>
-                <a:cs typeface="Open Sauce"/>
-                <a:sym typeface="Open Sauce"/>
-              </a:rPr>
-              <a:t>on, and data-driv</a:t>
-            </a:r>
-            <a:r>
-              <a:rPr lang="en-US" sz="2400" strike="noStrike" u="none">
-                <a:solidFill>
-                  <a:srgbClr val="000000"/>
-                </a:solidFill>
-                <a:latin typeface="Open Sauce"/>
-                <a:ea typeface="Open Sauce"/>
-                <a:cs typeface="Open Sauce"/>
-                <a:sym typeface="Open Sauce"/>
-              </a:rPr>
-              <a:t>e</a:t>
-            </a:r>
-            <a:r>
-              <a:rPr lang="en-US" sz="2400" strike="noStrike" u="none">
-                <a:solidFill>
-                  <a:srgbClr val="000000"/>
-                </a:solidFill>
-                <a:latin typeface="Open Sauce"/>
-                <a:ea typeface="Open Sauce"/>
-                <a:cs typeface="Open Sauce"/>
-                <a:sym typeface="Open Sauce"/>
-              </a:rPr>
-              <a:t>n</a:t>
-            </a:r>
-            <a:r>
-              <a:rPr lang="en-US" sz="2400" strike="noStrike" u="none">
-                <a:solidFill>
-                  <a:srgbClr val="000000"/>
-                </a:solidFill>
-                <a:latin typeface="Open Sauce"/>
-                <a:ea typeface="Open Sauce"/>
-                <a:cs typeface="Open Sauce"/>
-                <a:sym typeface="Open Sauce"/>
-              </a:rPr>
-              <a:t> </a:t>
-            </a:r>
-            <a:r>
-              <a:rPr lang="en-US" sz="2400" strike="noStrike" u="none">
-                <a:solidFill>
-                  <a:srgbClr val="000000"/>
-                </a:solidFill>
-                <a:latin typeface="Open Sauce"/>
-                <a:ea typeface="Open Sauce"/>
-                <a:cs typeface="Open Sauce"/>
-                <a:sym typeface="Open Sauce"/>
-              </a:rPr>
-              <a:t>optimiz</a:t>
-            </a:r>
-            <a:r>
-              <a:rPr lang="en-US" sz="2400" strike="noStrike" u="none">
-                <a:solidFill>
-                  <a:srgbClr val="000000"/>
-                </a:solidFill>
-                <a:latin typeface="Open Sauce"/>
-                <a:ea typeface="Open Sauce"/>
-                <a:cs typeface="Open Sauce"/>
-                <a:sym typeface="Open Sauce"/>
-              </a:rPr>
-              <a:t>a</a:t>
-            </a:r>
-            <a:r>
-              <a:rPr lang="en-US" sz="2400" strike="noStrike" u="none">
-                <a:solidFill>
-                  <a:srgbClr val="000000"/>
-                </a:solidFill>
-                <a:latin typeface="Open Sauce"/>
-                <a:ea typeface="Open Sauce"/>
-                <a:cs typeface="Open Sauce"/>
-                <a:sym typeface="Open Sauce"/>
-              </a:rPr>
-              <a:t>tion — t</a:t>
-            </a:r>
-            <a:r>
-              <a:rPr lang="en-US" sz="2400" strike="noStrike" u="none">
-                <a:solidFill>
-                  <a:srgbClr val="000000"/>
-                </a:solidFill>
-                <a:latin typeface="Open Sauce"/>
-                <a:ea typeface="Open Sauce"/>
-                <a:cs typeface="Open Sauce"/>
-                <a:sym typeface="Open Sauce"/>
-              </a:rPr>
-              <a:t>a</a:t>
-            </a:r>
-            <a:r>
-              <a:rPr lang="en-US" sz="2400" strike="noStrike" u="none">
-                <a:solidFill>
-                  <a:srgbClr val="000000"/>
-                </a:solidFill>
-                <a:latin typeface="Open Sauce"/>
-                <a:ea typeface="Open Sauce"/>
-                <a:cs typeface="Open Sauce"/>
-                <a:sym typeface="Open Sauce"/>
-              </a:rPr>
-              <a:t>i</a:t>
-            </a:r>
-            <a:r>
-              <a:rPr lang="en-US" sz="2400" strike="noStrike" u="none">
-                <a:solidFill>
-                  <a:srgbClr val="000000"/>
-                </a:solidFill>
-                <a:latin typeface="Open Sauce"/>
-                <a:ea typeface="Open Sauce"/>
-                <a:cs typeface="Open Sauce"/>
-                <a:sym typeface="Open Sauce"/>
-              </a:rPr>
-              <a:t>l</a:t>
-            </a:r>
-            <a:r>
-              <a:rPr lang="en-US" sz="2400" strike="noStrike" u="none">
-                <a:solidFill>
-                  <a:srgbClr val="000000"/>
-                </a:solidFill>
-                <a:latin typeface="Open Sauce"/>
-                <a:ea typeface="Open Sauce"/>
-                <a:cs typeface="Open Sauce"/>
-                <a:sym typeface="Open Sauce"/>
-              </a:rPr>
-              <a:t>or</a:t>
-            </a:r>
-            <a:r>
-              <a:rPr lang="en-US" sz="2400" strike="noStrike" u="none">
-                <a:solidFill>
-                  <a:srgbClr val="000000"/>
-                </a:solidFill>
-                <a:latin typeface="Open Sauce"/>
-                <a:ea typeface="Open Sauce"/>
-                <a:cs typeface="Open Sauce"/>
-                <a:sym typeface="Open Sauce"/>
-              </a:rPr>
-              <a:t>e</a:t>
-            </a:r>
-            <a:r>
-              <a:rPr lang="en-US" sz="2400" strike="noStrike" u="none">
-                <a:solidFill>
-                  <a:srgbClr val="000000"/>
-                </a:solidFill>
-                <a:latin typeface="Open Sauce"/>
-                <a:ea typeface="Open Sauce"/>
-                <a:cs typeface="Open Sauce"/>
-                <a:sym typeface="Open Sauce"/>
-              </a:rPr>
-              <a:t>d</a:t>
-            </a:r>
-            <a:r>
-              <a:rPr lang="en-US" sz="2400" strike="noStrike" u="none">
-                <a:solidFill>
-                  <a:srgbClr val="000000"/>
-                </a:solidFill>
-                <a:latin typeface="Open Sauce"/>
-                <a:ea typeface="Open Sauce"/>
-                <a:cs typeface="Open Sauce"/>
-                <a:sym typeface="Open Sauce"/>
-              </a:rPr>
-              <a:t> s</a:t>
-            </a:r>
-            <a:r>
-              <a:rPr lang="en-US" sz="2400" strike="noStrike" u="none">
-                <a:solidFill>
-                  <a:srgbClr val="000000"/>
-                </a:solidFill>
-                <a:latin typeface="Open Sauce"/>
-                <a:ea typeface="Open Sauce"/>
-                <a:cs typeface="Open Sauce"/>
-                <a:sym typeface="Open Sauce"/>
-              </a:rPr>
-              <a:t>p</a:t>
-            </a:r>
-            <a:r>
-              <a:rPr lang="en-US" sz="2400" strike="noStrike" u="none">
-                <a:solidFill>
-                  <a:srgbClr val="000000"/>
-                </a:solidFill>
-                <a:latin typeface="Open Sauce"/>
-                <a:ea typeface="Open Sauce"/>
-                <a:cs typeface="Open Sauce"/>
-                <a:sym typeface="Open Sauce"/>
-              </a:rPr>
-              <a:t>e</a:t>
-            </a:r>
-            <a:r>
-              <a:rPr lang="en-US" sz="2400" strike="noStrike" u="none">
-                <a:solidFill>
-                  <a:srgbClr val="000000"/>
-                </a:solidFill>
-                <a:latin typeface="Open Sauce"/>
-                <a:ea typeface="Open Sauce"/>
-                <a:cs typeface="Open Sauce"/>
-                <a:sym typeface="Open Sauce"/>
-              </a:rPr>
-              <a:t>cif</a:t>
-            </a:r>
-            <a:r>
-              <a:rPr lang="en-US" sz="2400" strike="noStrike" u="none">
-                <a:solidFill>
-                  <a:srgbClr val="000000"/>
-                </a:solidFill>
-                <a:latin typeface="Open Sauce"/>
-                <a:ea typeface="Open Sauce"/>
-                <a:cs typeface="Open Sauce"/>
-                <a:sym typeface="Open Sauce"/>
-              </a:rPr>
-              <a:t>ic</a:t>
-            </a:r>
-            <a:r>
-              <a:rPr lang="en-US" sz="2400" strike="noStrike" u="none">
-                <a:solidFill>
-                  <a:srgbClr val="000000"/>
-                </a:solidFill>
-                <a:latin typeface="Open Sauce"/>
-                <a:ea typeface="Open Sauce"/>
-                <a:cs typeface="Open Sauce"/>
-                <a:sym typeface="Open Sauce"/>
-              </a:rPr>
-              <a:t>ally</a:t>
-            </a:r>
-            <a:r>
-              <a:rPr lang="en-US" sz="2400" strike="noStrike" u="none">
-                <a:solidFill>
-                  <a:srgbClr val="000000"/>
-                </a:solidFill>
-                <a:latin typeface="Open Sauce"/>
-                <a:ea typeface="Open Sauce"/>
-                <a:cs typeface="Open Sauce"/>
-                <a:sym typeface="Open Sauce"/>
-              </a:rPr>
-              <a:t> for </a:t>
-            </a:r>
-            <a:r>
-              <a:rPr lang="en-US" sz="2400" strike="noStrike" u="none">
-                <a:solidFill>
-                  <a:srgbClr val="000000"/>
-                </a:solidFill>
-                <a:latin typeface="Open Sauce"/>
-                <a:ea typeface="Open Sauce"/>
-                <a:cs typeface="Open Sauce"/>
-                <a:sym typeface="Open Sauce"/>
-              </a:rPr>
-              <a:t>growing </a:t>
-            </a:r>
-            <a:r>
-              <a:rPr lang="en-US" sz="2400" strike="noStrike" u="none">
-                <a:solidFill>
-                  <a:srgbClr val="000000"/>
-                </a:solidFill>
-                <a:latin typeface="Open Sauce"/>
-                <a:ea typeface="Open Sauce"/>
-                <a:cs typeface="Open Sauce"/>
-                <a:sym typeface="Open Sauce"/>
-              </a:rPr>
-              <a:t>businesses.</a:t>
-            </a:r>
-            <a:r>
-              <a:rPr lang="en-US" sz="2400" strike="noStrike" u="none">
-                <a:solidFill>
-                  <a:srgbClr val="000000"/>
-                </a:solidFill>
-                <a:latin typeface="Open Sauce"/>
-                <a:ea typeface="Open Sauce"/>
-                <a:cs typeface="Open Sauce"/>
-                <a:sym typeface="Open Sauce"/>
-              </a:rPr>
-              <a:t> </a:t>
-            </a:r>
-          </a:p>
+          <a:p/>
         </p:txBody>
       </p:sp>
     </p:spTree>
@@ -15192,6 +9146,10 @@
             <a:miter/>
           </a:ln>
         </p:spPr>
+        <p:txBody>
+          <a:bodyPr/>
+          <a:p/>
+        </p:txBody>
       </p:sp>
       <p:sp>
         <p:nvSpPr>
@@ -15216,6 +9174,10 @@
             <a:tailEnd type="none" len="sm" w="sm"/>
           </a:ln>
         </p:spPr>
+        <p:txBody>
+          <a:bodyPr/>
+          <a:p/>
+        </p:txBody>
       </p:sp>
       <p:sp>
         <p:nvSpPr>
@@ -15262,6 +9224,10 @@
             </a:stretch>
           </a:blipFill>
         </p:spPr>
+        <p:txBody>
+          <a:bodyPr/>
+          <a:p/>
+        </p:txBody>
       </p:sp>
       <p:sp>
         <p:nvSpPr>
@@ -15283,25 +9249,7 @@
             <a:spAutoFit/>
           </a:bodyPr>
           <a:lstStyle/>
-          <a:p>
-            <a:pPr algn="l">
-              <a:lnSpc>
-                <a:spcPts val="8959"/>
-              </a:lnSpc>
-            </a:pPr>
-            <a:r>
-              <a:rPr lang="en-US" sz="6399">
-                <a:solidFill>
-                  <a:srgbClr val="000000"/>
-                </a:solidFill>
-                <a:latin typeface="DM Serif Display"/>
-                <a:ea typeface="DM Serif Display"/>
-                <a:cs typeface="DM Serif Display"/>
-                <a:sym typeface="DM Serif Display"/>
-              </a:rPr>
-              <a:t>Team</a:t>
-            </a:r>
-          </a:p>
+          <a:p/>
         </p:txBody>
       </p:sp>
       <p:sp>
@@ -15324,30 +9272,7 @@
             <a:spAutoFit/>
           </a:bodyPr>
           <a:lstStyle/>
-          <a:p>
-            <a:pPr algn="l" marL="0" indent="0" lvl="0">
-              <a:lnSpc>
-                <a:spcPts val="2239"/>
-              </a:lnSpc>
-              <a:spcBef>
-                <a:spcPct val="0"/>
-              </a:spcBef>
-            </a:pPr>
-            <a:r>
-              <a:rPr lang="en-US" sz="1599" spc="159" strike="noStrike" u="none">
-                <a:solidFill>
-                  <a:srgbClr val="000000">
-                    <a:alpha val="49804"/>
-                  </a:srgbClr>
-                </a:solidFill>
-                <a:latin typeface="Open Sauce"/>
-                <a:ea typeface="Open Sauce"/>
-                <a:cs typeface="Open Sauce"/>
-                <a:sym typeface="Open Sauce"/>
-              </a:rPr>
-              <a:t>STUDIO SHODWE</a:t>
-            </a:r>
-          </a:p>
+          <a:p/>
         </p:txBody>
       </p:sp>
       <p:sp>
@@ -15370,30 +9295,7 @@
             <a:spAutoFit/>
           </a:bodyPr>
           <a:lstStyle/>
-          <a:p>
-            <a:pPr algn="r" marL="0" indent="0" lvl="0">
-              <a:lnSpc>
-                <a:spcPts val="2239"/>
-              </a:lnSpc>
-              <a:spcBef>
-                <a:spcPct val="0"/>
-              </a:spcBef>
-            </a:pPr>
-            <a:r>
-              <a:rPr lang="en-US" sz="1599" spc="159">
-                <a:solidFill>
-                  <a:srgbClr val="000000">
-                    <a:alpha val="49804"/>
-                  </a:srgbClr>
-                </a:solidFill>
-                <a:latin typeface="Open Sauce"/>
-                <a:ea typeface="Open Sauce"/>
-                <a:cs typeface="Open Sauce"/>
-                <a:sym typeface="Open Sauce"/>
-              </a:rPr>
-              <a:t>9</a:t>
-            </a:r>
-          </a:p>
+          <a:p/>
         </p:txBody>
       </p:sp>
       <p:sp>
@@ -15416,184 +9318,7 @@
             <a:spAutoFit/>
           </a:bodyPr>
           <a:lstStyle/>
-          <a:p>
-            <a:pPr algn="l" marL="0" indent="0" lvl="0">
-              <a:lnSpc>
-                <a:spcPts val="3360"/>
-              </a:lnSpc>
-              <a:spcBef>
-                <a:spcPct val="0"/>
-              </a:spcBef>
-            </a:pPr>
-            <a:r>
-              <a:rPr lang="en-US" sz="2100">
-                <a:solidFill>
-                  <a:srgbClr val="000000"/>
-                </a:solidFill>
-                <a:latin typeface="Open Sauce"/>
-                <a:ea typeface="Open Sauce"/>
-                <a:cs typeface="Open Sauce"/>
-                <a:sym typeface="Open Sauce"/>
-              </a:rPr>
-              <a:t>F</a:t>
-            </a:r>
-            <a:r>
-              <a:rPr lang="en-US" sz="2100" strike="noStrike" u="none">
-                <a:solidFill>
-                  <a:srgbClr val="000000"/>
-                </a:solidFill>
-                <a:latin typeface="Open Sauce"/>
-                <a:ea typeface="Open Sauce"/>
-                <a:cs typeface="Open Sauce"/>
-                <a:sym typeface="Open Sauce"/>
-              </a:rPr>
-              <a:t>ounder </a:t>
-            </a:r>
-            <a:r>
-              <a:rPr lang="en-US" sz="2100" strike="noStrike" u="none">
-                <a:solidFill>
-                  <a:srgbClr val="000000"/>
-                </a:solidFill>
-                <a:latin typeface="Open Sauce"/>
-                <a:ea typeface="Open Sauce"/>
-                <a:cs typeface="Open Sauce"/>
-                <a:sym typeface="Open Sauce"/>
-              </a:rPr>
-              <a:t>/</a:t>
-            </a:r>
-            <a:r>
-              <a:rPr lang="en-US" sz="2100" strike="noStrike" u="none">
-                <a:solidFill>
-                  <a:srgbClr val="000000"/>
-                </a:solidFill>
-                <a:latin typeface="Open Sauce"/>
-                <a:ea typeface="Open Sauce"/>
-                <a:cs typeface="Open Sauce"/>
-                <a:sym typeface="Open Sauce"/>
-              </a:rPr>
-              <a:t> </a:t>
-            </a:r>
-            <a:r>
-              <a:rPr lang="en-US" sz="2100" strike="noStrike" u="none">
-                <a:solidFill>
-                  <a:srgbClr val="000000"/>
-                </a:solidFill>
-                <a:latin typeface="Open Sauce"/>
-                <a:ea typeface="Open Sauce"/>
-                <a:cs typeface="Open Sauce"/>
-                <a:sym typeface="Open Sauce"/>
-              </a:rPr>
-              <a:t>M</a:t>
-            </a:r>
-            <a:r>
-              <a:rPr lang="en-US" sz="2100" strike="noStrike" u="none">
-                <a:solidFill>
-                  <a:srgbClr val="000000"/>
-                </a:solidFill>
-                <a:latin typeface="Open Sauce"/>
-                <a:ea typeface="Open Sauce"/>
-                <a:cs typeface="Open Sauce"/>
-                <a:sym typeface="Open Sauce"/>
-              </a:rPr>
-              <a:t>ar</a:t>
-            </a:r>
-            <a:r>
-              <a:rPr lang="en-US" sz="2100" strike="noStrike" u="none">
-                <a:solidFill>
-                  <a:srgbClr val="000000"/>
-                </a:solidFill>
-                <a:latin typeface="Open Sauce"/>
-                <a:ea typeface="Open Sauce"/>
-                <a:cs typeface="Open Sauce"/>
-                <a:sym typeface="Open Sauce"/>
-              </a:rPr>
-              <a:t>k</a:t>
-            </a:r>
-            <a:r>
-              <a:rPr lang="en-US" sz="2100" strike="noStrike" u="none">
-                <a:solidFill>
-                  <a:srgbClr val="000000"/>
-                </a:solidFill>
-                <a:latin typeface="Open Sauce"/>
-                <a:ea typeface="Open Sauce"/>
-                <a:cs typeface="Open Sauce"/>
-                <a:sym typeface="Open Sauce"/>
-              </a:rPr>
-              <a:t>etin</a:t>
-            </a:r>
-            <a:r>
-              <a:rPr lang="en-US" sz="2100" strike="noStrike" u="none">
-                <a:solidFill>
-                  <a:srgbClr val="000000"/>
-                </a:solidFill>
-                <a:latin typeface="Open Sauce"/>
-                <a:ea typeface="Open Sauce"/>
-                <a:cs typeface="Open Sauce"/>
-                <a:sym typeface="Open Sauce"/>
-              </a:rPr>
-              <a:t>g</a:t>
-            </a:r>
-            <a:r>
-              <a:rPr lang="en-US" sz="2100" strike="noStrike" u="none">
-                <a:solidFill>
-                  <a:srgbClr val="000000"/>
-                </a:solidFill>
-                <a:latin typeface="Open Sauce"/>
-                <a:ea typeface="Open Sauce"/>
-                <a:cs typeface="Open Sauce"/>
-                <a:sym typeface="Open Sauce"/>
-              </a:rPr>
-              <a:t> </a:t>
-            </a:r>
-            <a:r>
-              <a:rPr lang="en-US" sz="2100" strike="noStrike" u="none">
-                <a:solidFill>
-                  <a:srgbClr val="000000"/>
-                </a:solidFill>
-                <a:latin typeface="Open Sauce"/>
-                <a:ea typeface="Open Sauce"/>
-                <a:cs typeface="Open Sauce"/>
-                <a:sym typeface="Open Sauce"/>
-              </a:rPr>
-              <a:t>S</a:t>
-            </a:r>
-            <a:r>
-              <a:rPr lang="en-US" sz="2100" strike="noStrike" u="none">
-                <a:solidFill>
-                  <a:srgbClr val="000000"/>
-                </a:solidFill>
-                <a:latin typeface="Open Sauce"/>
-                <a:ea typeface="Open Sauce"/>
-                <a:cs typeface="Open Sauce"/>
-                <a:sym typeface="Open Sauce"/>
-              </a:rPr>
-              <a:t>tr</a:t>
-            </a:r>
-            <a:r>
-              <a:rPr lang="en-US" sz="2100" strike="noStrike" u="none">
-                <a:solidFill>
-                  <a:srgbClr val="000000"/>
-                </a:solidFill>
-                <a:latin typeface="Open Sauce"/>
-                <a:ea typeface="Open Sauce"/>
-                <a:cs typeface="Open Sauce"/>
-                <a:sym typeface="Open Sauce"/>
-              </a:rPr>
-              <a:t>at</a:t>
-            </a:r>
-            <a:r>
-              <a:rPr lang="en-US" sz="2100" strike="noStrike" u="none">
-                <a:solidFill>
-                  <a:srgbClr val="000000"/>
-                </a:solidFill>
-                <a:latin typeface="Open Sauce"/>
-                <a:ea typeface="Open Sauce"/>
-                <a:cs typeface="Open Sauce"/>
-                <a:sym typeface="Open Sauce"/>
-              </a:rPr>
-              <a:t>egist</a:t>
-            </a:r>
-          </a:p>
+          <a:p/>
         </p:txBody>
       </p:sp>
       <p:sp>
@@ -15616,76 +9341,7 @@
             <a:spAutoFit/>
           </a:bodyPr>
           <a:lstStyle/>
-          <a:p>
-            <a:pPr algn="l" marL="0" indent="0" lvl="0">
-              <a:lnSpc>
-                <a:spcPts val="4480"/>
-              </a:lnSpc>
-              <a:spcBef>
-                <a:spcPct val="0"/>
-              </a:spcBef>
-            </a:pPr>
-            <a:r>
-              <a:rPr lang="en-US" sz="3200">
-                <a:solidFill>
-                  <a:srgbClr val="000000"/>
-                </a:solidFill>
-                <a:latin typeface="DM Serif Display"/>
-                <a:ea typeface="DM Serif Display"/>
-                <a:cs typeface="DM Serif Display"/>
-                <a:sym typeface="DM Serif Display"/>
-              </a:rPr>
-              <a:t>Tayl</a:t>
-            </a:r>
-            <a:r>
-              <a:rPr lang="en-US" sz="3200" strike="noStrike" u="none">
-                <a:solidFill>
-                  <a:srgbClr val="000000"/>
-                </a:solidFill>
-                <a:latin typeface="DM Serif Display"/>
-                <a:ea typeface="DM Serif Display"/>
-                <a:cs typeface="DM Serif Display"/>
-                <a:sym typeface="DM Serif Display"/>
-              </a:rPr>
-              <a:t>or </a:t>
-            </a:r>
-            <a:r>
-              <a:rPr lang="en-US" sz="3200" strike="noStrike" u="none">
-                <a:solidFill>
-                  <a:srgbClr val="000000"/>
-                </a:solidFill>
-                <a:latin typeface="DM Serif Display"/>
-                <a:ea typeface="DM Serif Display"/>
-                <a:cs typeface="DM Serif Display"/>
-                <a:sym typeface="DM Serif Display"/>
-              </a:rPr>
-              <a:t>Alo</a:t>
-            </a:r>
-            <a:r>
-              <a:rPr lang="en-US" sz="3200" strike="noStrike" u="none">
-                <a:solidFill>
-                  <a:srgbClr val="000000"/>
-                </a:solidFill>
-                <a:latin typeface="DM Serif Display"/>
-                <a:ea typeface="DM Serif Display"/>
-                <a:cs typeface="DM Serif Display"/>
-                <a:sym typeface="DM Serif Display"/>
-              </a:rPr>
-              <a:t>ns</a:t>
-            </a:r>
-            <a:r>
-              <a:rPr lang="en-US" sz="3200" strike="noStrike" u="none">
-                <a:solidFill>
-                  <a:srgbClr val="000000"/>
-                </a:solidFill>
-                <a:latin typeface="DM Serif Display"/>
-                <a:ea typeface="DM Serif Display"/>
-                <a:cs typeface="DM Serif Display"/>
-                <a:sym typeface="DM Serif Display"/>
-              </a:rPr>
-              <a:t>o</a:t>
-            </a:r>
-          </a:p>
+          <a:p/>
         </p:txBody>
       </p:sp>
       <p:sp>
@@ -15733,6 +9389,10 @@
             </a:stretch>
           </a:blipFill>
         </p:spPr>
+        <p:txBody>
+          <a:bodyPr/>
+          <a:p/>
+        </p:txBody>
       </p:sp>
       <p:sp>
         <p:nvSpPr>
@@ -15754,40 +9414,7 @@
             <a:spAutoFit/>
           </a:bodyPr>
           <a:lstStyle/>
-          <a:p>
-            <a:pPr algn="l" marL="0" indent="0" lvl="0">
-              <a:lnSpc>
-                <a:spcPts val="3360"/>
-              </a:lnSpc>
-              <a:spcBef>
-                <a:spcPct val="0"/>
-              </a:spcBef>
-            </a:pPr>
-            <a:r>
-              <a:rPr lang="en-US" sz="2100">
-                <a:solidFill>
-                  <a:srgbClr val="000000"/>
-                </a:solidFill>
-                <a:latin typeface="Open Sauce"/>
-                <a:ea typeface="Open Sauce"/>
-                <a:cs typeface="Open Sauce"/>
-                <a:sym typeface="Open Sauce"/>
-              </a:rPr>
-              <a:t>Paid Ads &amp; F</a:t>
-            </a:r>
-            <a:r>
-              <a:rPr lang="en-US" sz="2100" strike="noStrike" u="none">
-                <a:solidFill>
-                  <a:srgbClr val="000000"/>
-                </a:solidFill>
-                <a:latin typeface="Open Sauce"/>
-                <a:ea typeface="Open Sauce"/>
-                <a:cs typeface="Open Sauce"/>
-                <a:sym typeface="Open Sauce"/>
-              </a:rPr>
-              <a:t>unnel Expert</a:t>
-            </a:r>
-          </a:p>
+          <a:p/>
         </p:txBody>
       </p:sp>
       <p:sp>
@@ -15810,40 +9437,7 @@
             <a:spAutoFit/>
           </a:bodyPr>
           <a:lstStyle/>
-          <a:p>
-            <a:pPr algn="l" marL="0" indent="0" lvl="0">
-              <a:lnSpc>
-                <a:spcPts val="4480"/>
-              </a:lnSpc>
-              <a:spcBef>
-                <a:spcPct val="0"/>
-              </a:spcBef>
-            </a:pPr>
-            <a:r>
-              <a:rPr lang="en-US" sz="3200">
-                <a:solidFill>
-                  <a:srgbClr val="000000"/>
-                </a:solidFill>
-                <a:latin typeface="DM Serif Display"/>
-                <a:ea typeface="DM Serif Display"/>
-                <a:cs typeface="DM Serif Display"/>
-                <a:sym typeface="DM Serif Display"/>
-              </a:rPr>
-              <a:t>Shawn Ga</a:t>
-            </a:r>
-            <a:r>
-              <a:rPr lang="en-US" sz="3200" strike="noStrike" u="none">
-                <a:solidFill>
-                  <a:srgbClr val="000000"/>
-                </a:solidFill>
-                <a:latin typeface="DM Serif Display"/>
-                <a:ea typeface="DM Serif Display"/>
-                <a:cs typeface="DM Serif Display"/>
-                <a:sym typeface="DM Serif Display"/>
-              </a:rPr>
-              <a:t>rcia</a:t>
-            </a:r>
-          </a:p>
+          <a:p/>
         </p:txBody>
       </p:sp>
       <p:sp>
@@ -15891,6 +9485,10 @@
             </a:stretch>
           </a:blipFill>
         </p:spPr>
+        <p:txBody>
+          <a:bodyPr/>
+          <a:p/>
+        </p:txBody>
       </p:sp>
       <p:sp>
         <p:nvSpPr>
@@ -15912,40 +9510,7 @@
             <a:spAutoFit/>
           </a:bodyPr>
           <a:lstStyle/>
-          <a:p>
-            <a:pPr algn="l" marL="0" indent="0" lvl="0">
-              <a:lnSpc>
-                <a:spcPts val="3360"/>
-              </a:lnSpc>
-              <a:spcBef>
-                <a:spcPct val="0"/>
-              </a:spcBef>
-            </a:pPr>
-            <a:r>
-              <a:rPr lang="en-US" sz="2100">
-                <a:solidFill>
-                  <a:srgbClr val="000000"/>
-                </a:solidFill>
-                <a:latin typeface="Open Sauce"/>
-                <a:ea typeface="Open Sauce"/>
-                <a:cs typeface="Open Sauce"/>
-                <a:sym typeface="Open Sauce"/>
-              </a:rPr>
-              <a:t>A</a:t>
-            </a:r>
-            <a:r>
-              <a:rPr lang="en-US" sz="2100" strike="noStrike" u="none">
-                <a:solidFill>
-                  <a:srgbClr val="000000"/>
-                </a:solidFill>
-                <a:latin typeface="Open Sauce"/>
-                <a:ea typeface="Open Sauce"/>
-                <a:cs typeface="Open Sauce"/>
-                <a:sym typeface="Open Sauce"/>
-              </a:rPr>
-              <a:t>nalytics &amp; Optimization</a:t>
-            </a:r>
-          </a:p>
+          <a:p/>
         </p:txBody>
       </p:sp>
       <p:sp>
@@ -15968,40 +9533,7 @@
             <a:spAutoFit/>
           </a:bodyPr>
           <a:lstStyle/>
-          <a:p>
-            <a:pPr algn="l" marL="0" indent="0" lvl="0">
-              <a:lnSpc>
-                <a:spcPts val="4480"/>
-              </a:lnSpc>
-              <a:spcBef>
-                <a:spcPct val="0"/>
-              </a:spcBef>
-            </a:pPr>
-            <a:r>
-              <a:rPr lang="en-US" sz="3200">
-                <a:solidFill>
-                  <a:srgbClr val="000000"/>
-                </a:solidFill>
-                <a:latin typeface="DM Serif Display"/>
-                <a:ea typeface="DM Serif Display"/>
-                <a:cs typeface="DM Serif Display"/>
-                <a:sym typeface="DM Serif Display"/>
-              </a:rPr>
-              <a:t>Neil</a:t>
-            </a:r>
-            <a:r>
-              <a:rPr lang="en-US" sz="3200" strike="noStrike" u="none">
-                <a:solidFill>
-                  <a:srgbClr val="000000"/>
-                </a:solidFill>
-                <a:latin typeface="DM Serif Display"/>
-                <a:ea typeface="DM Serif Display"/>
-                <a:cs typeface="DM Serif Display"/>
-                <a:sym typeface="DM Serif Display"/>
-              </a:rPr>
-              <a:t> Tran</a:t>
-            </a:r>
-          </a:p>
+          <a:p/>
         </p:txBody>
       </p:sp>
     </p:spTree>
